--- a/topic-10-week10/unit-1/talk-1/Presentation1.pptx
+++ b/topic-10-week10/unit-1/talk-1/Presentation1.pptx
@@ -212,7 +212,7 @@
           <a:p>
             <a:fld id="{FA226DE8-B920-4D4C-B2F6-8869A1D41495}" type="datetimeFigureOut">
               <a:rPr lang="en-IE" smtClean="0"/>
-              <a:t>02/12/2024</a:t>
+              <a:t>24/11/2025</a:t>
             </a:fld>
             <a:endParaRPr lang="en-IE"/>
           </a:p>
@@ -713,7 +713,7 @@
           <a:p>
             <a:fld id="{1564A75C-CC5C-47A2-B76F-314E0B373A42}" type="datetimeFigureOut">
               <a:rPr lang="en-IE" smtClean="0"/>
-              <a:t>02/12/2024</a:t>
+              <a:t>24/11/2025</a:t>
             </a:fld>
             <a:endParaRPr lang="en-IE"/>
           </a:p>
@@ -913,7 +913,7 @@
           <a:p>
             <a:fld id="{1564A75C-CC5C-47A2-B76F-314E0B373A42}" type="datetimeFigureOut">
               <a:rPr lang="en-IE" smtClean="0"/>
-              <a:t>02/12/2024</a:t>
+              <a:t>24/11/2025</a:t>
             </a:fld>
             <a:endParaRPr lang="en-IE"/>
           </a:p>
@@ -1123,7 +1123,7 @@
           <a:p>
             <a:fld id="{1564A75C-CC5C-47A2-B76F-314E0B373A42}" type="datetimeFigureOut">
               <a:rPr lang="en-IE" smtClean="0"/>
-              <a:t>02/12/2024</a:t>
+              <a:t>24/11/2025</a:t>
             </a:fld>
             <a:endParaRPr lang="en-IE"/>
           </a:p>
@@ -1323,7 +1323,7 @@
           <a:p>
             <a:fld id="{1564A75C-CC5C-47A2-B76F-314E0B373A42}" type="datetimeFigureOut">
               <a:rPr lang="en-IE" smtClean="0"/>
-              <a:t>02/12/2024</a:t>
+              <a:t>24/11/2025</a:t>
             </a:fld>
             <a:endParaRPr lang="en-IE"/>
           </a:p>
@@ -1599,7 +1599,7 @@
           <a:p>
             <a:fld id="{1564A75C-CC5C-47A2-B76F-314E0B373A42}" type="datetimeFigureOut">
               <a:rPr lang="en-IE" smtClean="0"/>
-              <a:t>02/12/2024</a:t>
+              <a:t>24/11/2025</a:t>
             </a:fld>
             <a:endParaRPr lang="en-IE"/>
           </a:p>
@@ -1867,7 +1867,7 @@
           <a:p>
             <a:fld id="{1564A75C-CC5C-47A2-B76F-314E0B373A42}" type="datetimeFigureOut">
               <a:rPr lang="en-IE" smtClean="0"/>
-              <a:t>02/12/2024</a:t>
+              <a:t>24/11/2025</a:t>
             </a:fld>
             <a:endParaRPr lang="en-IE"/>
           </a:p>
@@ -2282,7 +2282,7 @@
           <a:p>
             <a:fld id="{1564A75C-CC5C-47A2-B76F-314E0B373A42}" type="datetimeFigureOut">
               <a:rPr lang="en-IE" smtClean="0"/>
-              <a:t>02/12/2024</a:t>
+              <a:t>24/11/2025</a:t>
             </a:fld>
             <a:endParaRPr lang="en-IE"/>
           </a:p>
@@ -2424,7 +2424,7 @@
           <a:p>
             <a:fld id="{1564A75C-CC5C-47A2-B76F-314E0B373A42}" type="datetimeFigureOut">
               <a:rPr lang="en-IE" smtClean="0"/>
-              <a:t>02/12/2024</a:t>
+              <a:t>24/11/2025</a:t>
             </a:fld>
             <a:endParaRPr lang="en-IE"/>
           </a:p>
@@ -2537,7 +2537,7 @@
           <a:p>
             <a:fld id="{1564A75C-CC5C-47A2-B76F-314E0B373A42}" type="datetimeFigureOut">
               <a:rPr lang="en-IE" smtClean="0"/>
-              <a:t>02/12/2024</a:t>
+              <a:t>24/11/2025</a:t>
             </a:fld>
             <a:endParaRPr lang="en-IE"/>
           </a:p>
@@ -2850,7 +2850,7 @@
           <a:p>
             <a:fld id="{1564A75C-CC5C-47A2-B76F-314E0B373A42}" type="datetimeFigureOut">
               <a:rPr lang="en-IE" smtClean="0"/>
-              <a:t>02/12/2024</a:t>
+              <a:t>24/11/2025</a:t>
             </a:fld>
             <a:endParaRPr lang="en-IE"/>
           </a:p>
@@ -3139,7 +3139,7 @@
           <a:p>
             <a:fld id="{1564A75C-CC5C-47A2-B76F-314E0B373A42}" type="datetimeFigureOut">
               <a:rPr lang="en-IE" smtClean="0"/>
-              <a:t>02/12/2024</a:t>
+              <a:t>24/11/2025</a:t>
             </a:fld>
             <a:endParaRPr lang="en-IE"/>
           </a:p>
@@ -3382,7 +3382,7 @@
           <a:p>
             <a:fld id="{1564A75C-CC5C-47A2-B76F-314E0B373A42}" type="datetimeFigureOut">
               <a:rPr lang="en-IE" smtClean="0"/>
-              <a:t>02/12/2024</a:t>
+              <a:t>24/11/2025</a:t>
             </a:fld>
             <a:endParaRPr lang="en-IE"/>
           </a:p>
@@ -4461,7 +4461,7 @@
         </p:nvSpPr>
         <p:spPr>
           <a:xfrm>
-            <a:off x="4936113" y="3247949"/>
+            <a:off x="5117226" y="2794942"/>
             <a:ext cx="1159887" cy="855878"/>
           </a:xfrm>
           <a:prstGeom prst="rightArrow">
@@ -5697,7 +5697,7 @@
         </p:blipFill>
         <p:spPr>
           <a:xfrm>
-            <a:off x="1258626" y="3496840"/>
+            <a:off x="1534787" y="1132594"/>
             <a:ext cx="914400" cy="914400"/>
           </a:xfrm>
         </p:spPr>
@@ -5730,7 +5730,7 @@
         </p:blipFill>
         <p:spPr>
           <a:xfrm>
-            <a:off x="1304266" y="4619895"/>
+            <a:off x="1580427" y="2255649"/>
             <a:ext cx="914400" cy="914400"/>
           </a:xfrm>
           <a:prstGeom prst="rect">
@@ -5752,7 +5752,7 @@
         </p:nvSpPr>
         <p:spPr>
           <a:xfrm>
-            <a:off x="902126" y="3197332"/>
+            <a:off x="1178287" y="833086"/>
             <a:ext cx="1687651" cy="2595914"/>
           </a:xfrm>
           <a:prstGeom prst="roundRect">
@@ -5803,7 +5803,7 @@
         </p:nvSpPr>
         <p:spPr>
           <a:xfrm>
-            <a:off x="3327816" y="3197332"/>
+            <a:off x="3603977" y="833086"/>
             <a:ext cx="4212236" cy="2595914"/>
           </a:xfrm>
           <a:prstGeom prst="rect">
@@ -5849,7 +5849,7 @@
         </p:nvSpPr>
         <p:spPr>
           <a:xfrm>
-            <a:off x="943575" y="2718360"/>
+            <a:off x="1219736" y="354114"/>
             <a:ext cx="1805623" cy="369332"/>
           </a:xfrm>
           <a:prstGeom prst="rect">
@@ -5884,7 +5884,7 @@
         </p:nvSpPr>
         <p:spPr>
           <a:xfrm>
-            <a:off x="3650105" y="3429000"/>
+            <a:off x="3926266" y="1064754"/>
             <a:ext cx="3387777" cy="858187"/>
           </a:xfrm>
           <a:prstGeom prst="roundRect">
@@ -5933,7 +5933,7 @@
         </p:nvSpPr>
         <p:spPr>
           <a:xfrm>
-            <a:off x="5413948" y="4518855"/>
+            <a:off x="5690109" y="2154609"/>
             <a:ext cx="1623934" cy="1038495"/>
           </a:xfrm>
           <a:prstGeom prst="roundRect">
@@ -5982,7 +5982,7 @@
         </p:nvSpPr>
         <p:spPr>
           <a:xfrm>
-            <a:off x="3762531" y="4619895"/>
+            <a:off x="4038692" y="2255649"/>
             <a:ext cx="1469036" cy="776564"/>
           </a:xfrm>
           <a:prstGeom prst="flowChartMagneticDisk">
@@ -6031,7 +6031,7 @@
         </p:nvSpPr>
         <p:spPr>
           <a:xfrm>
-            <a:off x="8117172" y="3164393"/>
+            <a:off x="8393333" y="800147"/>
             <a:ext cx="1687651" cy="2595914"/>
           </a:xfrm>
           <a:prstGeom prst="roundRect">
@@ -6082,7 +6082,7 @@
         </p:nvSpPr>
         <p:spPr>
           <a:xfrm>
-            <a:off x="8006696" y="2765760"/>
+            <a:off x="8282857" y="401514"/>
             <a:ext cx="1945661" cy="369332"/>
           </a:xfrm>
           <a:prstGeom prst="rect">
@@ -6131,7 +6131,7 @@
         </p:blipFill>
         <p:spPr>
           <a:xfrm>
-            <a:off x="8511293" y="3301584"/>
+            <a:off x="8787454" y="937338"/>
             <a:ext cx="914400" cy="914400"/>
           </a:xfrm>
           <a:prstGeom prst="rect">
@@ -6167,7 +6167,7 @@
         </p:blipFill>
         <p:spPr>
           <a:xfrm>
-            <a:off x="8610585" y="4335851"/>
+            <a:off x="8886746" y="1971605"/>
             <a:ext cx="737881" cy="737881"/>
           </a:xfrm>
           <a:prstGeom prst="rect">
@@ -6203,7 +6203,7 @@
         </p:blipFill>
         <p:spPr>
           <a:xfrm>
-            <a:off x="8511293" y="4972967"/>
+            <a:off x="8787454" y="2608721"/>
             <a:ext cx="914400" cy="914400"/>
           </a:xfrm>
           <a:prstGeom prst="rect">
@@ -6225,7 +6225,7 @@
         </p:nvSpPr>
         <p:spPr>
           <a:xfrm>
-            <a:off x="2620324" y="4129790"/>
+            <a:off x="2896485" y="1765544"/>
             <a:ext cx="676944" cy="490105"/>
           </a:xfrm>
           <a:prstGeom prst="leftRightArrow">
@@ -6271,7 +6271,644 @@
         </p:nvSpPr>
         <p:spPr>
           <a:xfrm>
-            <a:off x="7531295" y="4259456"/>
+            <a:off x="7807456" y="1895210"/>
+            <a:ext cx="627032" cy="471666"/>
+          </a:xfrm>
+          <a:prstGeom prst="leftRightArrow">
+            <a:avLst/>
+          </a:prstGeom>
+        </p:spPr>
+        <p:style>
+          <a:lnRef idx="2">
+            <a:schemeClr val="accent1">
+              <a:shade val="15000"/>
+            </a:schemeClr>
+          </a:lnRef>
+          <a:fillRef idx="1">
+            <a:schemeClr val="accent1"/>
+          </a:fillRef>
+          <a:effectRef idx="0">
+            <a:schemeClr val="accent1"/>
+          </a:effectRef>
+          <a:fontRef idx="minor">
+            <a:schemeClr val="lt1"/>
+          </a:fontRef>
+        </p:style>
+        <p:txBody>
+          <a:bodyPr rtlCol="0" anchor="ctr"/>
+          <a:lstStyle/>
+          <a:p>
+            <a:pPr algn="ctr"/>
+            <a:endParaRPr lang="en-IE"/>
+          </a:p>
+        </p:txBody>
+      </p:sp>
+      <p:pic>
+        <p:nvPicPr>
+          <p:cNvPr id="12" name="Content Placeholder 4" descr="Thermometer with solid fill">
+            <a:extLst>
+              <a:ext uri="{FF2B5EF4-FFF2-40B4-BE49-F238E27FC236}">
+                <a16:creationId xmlns:a16="http://schemas.microsoft.com/office/drawing/2014/main" id="{F54A5D8A-4841-CD05-F984-AC720DA7F11E}"/>
+              </a:ext>
+            </a:extLst>
+          </p:cNvPr>
+          <p:cNvPicPr>
+            <a:picLocks noChangeAspect="1"/>
+          </p:cNvPicPr>
+          <p:nvPr/>
+        </p:nvPicPr>
+        <p:blipFill>
+          <a:blip r:embed="rId3">
+            <a:extLst>
+              <a:ext uri="{96DAC541-7B7A-43D3-8B79-37D633B846F1}">
+                <asvg:svgBlip xmlns:asvg="http://schemas.microsoft.com/office/drawing/2016/SVG/main" r:embed="rId4"/>
+              </a:ext>
+            </a:extLst>
+          </a:blip>
+          <a:stretch>
+            <a:fillRect/>
+          </a:stretch>
+        </p:blipFill>
+        <p:spPr>
+          <a:xfrm>
+            <a:off x="1460121" y="4332685"/>
+            <a:ext cx="914400" cy="914400"/>
+          </a:xfrm>
+          <a:prstGeom prst="rect">
+            <a:avLst/>
+          </a:prstGeom>
+        </p:spPr>
+      </p:pic>
+      <p:pic>
+        <p:nvPicPr>
+          <p:cNvPr id="14" name="Graphic 13" descr="Do Not Washing Machine with solid fill">
+            <a:extLst>
+              <a:ext uri="{FF2B5EF4-FFF2-40B4-BE49-F238E27FC236}">
+                <a16:creationId xmlns:a16="http://schemas.microsoft.com/office/drawing/2014/main" id="{FF412A39-DF00-981B-2702-8616233520DC}"/>
+              </a:ext>
+            </a:extLst>
+          </p:cNvPr>
+          <p:cNvPicPr>
+            <a:picLocks noChangeAspect="1"/>
+          </p:cNvPicPr>
+          <p:nvPr/>
+        </p:nvPicPr>
+        <p:blipFill>
+          <a:blip r:embed="rId5">
+            <a:extLst>
+              <a:ext uri="{96DAC541-7B7A-43D3-8B79-37D633B846F1}">
+                <asvg:svgBlip xmlns:asvg="http://schemas.microsoft.com/office/drawing/2016/SVG/main" r:embed="rId6"/>
+              </a:ext>
+            </a:extLst>
+          </a:blip>
+          <a:stretch>
+            <a:fillRect/>
+          </a:stretch>
+        </p:blipFill>
+        <p:spPr>
+          <a:xfrm>
+            <a:off x="1505761" y="5455740"/>
+            <a:ext cx="914400" cy="914400"/>
+          </a:xfrm>
+          <a:prstGeom prst="rect">
+            <a:avLst/>
+          </a:prstGeom>
+        </p:spPr>
+      </p:pic>
+      <p:sp>
+        <p:nvSpPr>
+          <p:cNvPr id="16" name="Rectangle: Rounded Corners 15">
+            <a:extLst>
+              <a:ext uri="{FF2B5EF4-FFF2-40B4-BE49-F238E27FC236}">
+                <a16:creationId xmlns:a16="http://schemas.microsoft.com/office/drawing/2014/main" id="{1235AF44-15EB-E701-9201-6D2A597E7CF3}"/>
+              </a:ext>
+            </a:extLst>
+          </p:cNvPr>
+          <p:cNvSpPr/>
+          <p:nvPr/>
+        </p:nvSpPr>
+        <p:spPr>
+          <a:xfrm>
+            <a:off x="1103621" y="4033177"/>
+            <a:ext cx="1687651" cy="2595914"/>
+          </a:xfrm>
+          <a:prstGeom prst="roundRect">
+            <a:avLst/>
+          </a:prstGeom>
+          <a:solidFill>
+            <a:schemeClr val="accent1">
+              <a:alpha val="19000"/>
+            </a:schemeClr>
+          </a:solidFill>
+        </p:spPr>
+        <p:style>
+          <a:lnRef idx="2">
+            <a:schemeClr val="accent1">
+              <a:shade val="15000"/>
+            </a:schemeClr>
+          </a:lnRef>
+          <a:fillRef idx="1">
+            <a:schemeClr val="accent1"/>
+          </a:fillRef>
+          <a:effectRef idx="0">
+            <a:schemeClr val="accent1"/>
+          </a:effectRef>
+          <a:fontRef idx="minor">
+            <a:schemeClr val="lt1"/>
+          </a:fontRef>
+        </p:style>
+        <p:txBody>
+          <a:bodyPr rtlCol="0" anchor="ctr"/>
+          <a:lstStyle/>
+          <a:p>
+            <a:pPr algn="ctr"/>
+            <a:endParaRPr lang="en-IE"/>
+          </a:p>
+        </p:txBody>
+      </p:sp>
+      <p:sp>
+        <p:nvSpPr>
+          <p:cNvPr id="20" name="Rectangle 19">
+            <a:extLst>
+              <a:ext uri="{FF2B5EF4-FFF2-40B4-BE49-F238E27FC236}">
+                <a16:creationId xmlns:a16="http://schemas.microsoft.com/office/drawing/2014/main" id="{3B24AAA9-FAC3-60AD-1876-869FA004C3F9}"/>
+              </a:ext>
+            </a:extLst>
+          </p:cNvPr>
+          <p:cNvSpPr/>
+          <p:nvPr/>
+        </p:nvSpPr>
+        <p:spPr>
+          <a:xfrm>
+            <a:off x="3529311" y="4033177"/>
+            <a:ext cx="4212236" cy="2595914"/>
+          </a:xfrm>
+          <a:prstGeom prst="rect">
+            <a:avLst/>
+          </a:prstGeom>
+        </p:spPr>
+        <p:style>
+          <a:lnRef idx="2">
+            <a:schemeClr val="accent1">
+              <a:shade val="15000"/>
+            </a:schemeClr>
+          </a:lnRef>
+          <a:fillRef idx="1">
+            <a:schemeClr val="accent1"/>
+          </a:fillRef>
+          <a:effectRef idx="0">
+            <a:schemeClr val="accent1"/>
+          </a:effectRef>
+          <a:fontRef idx="minor">
+            <a:schemeClr val="lt1"/>
+          </a:fontRef>
+        </p:style>
+        <p:txBody>
+          <a:bodyPr rtlCol="0" anchor="ctr"/>
+          <a:lstStyle/>
+          <a:p>
+            <a:pPr algn="ctr"/>
+            <a:endParaRPr lang="en-IE"/>
+          </a:p>
+        </p:txBody>
+      </p:sp>
+      <p:sp>
+        <p:nvSpPr>
+          <p:cNvPr id="21" name="TextBox 20">
+            <a:extLst>
+              <a:ext uri="{FF2B5EF4-FFF2-40B4-BE49-F238E27FC236}">
+                <a16:creationId xmlns:a16="http://schemas.microsoft.com/office/drawing/2014/main" id="{AD36C6FD-4870-21E7-A1C6-AC36C7641541}"/>
+              </a:ext>
+            </a:extLst>
+          </p:cNvPr>
+          <p:cNvSpPr txBox="1"/>
+          <p:nvPr/>
+        </p:nvSpPr>
+        <p:spPr>
+          <a:xfrm>
+            <a:off x="1145070" y="3554205"/>
+            <a:ext cx="1695657" cy="369332"/>
+          </a:xfrm>
+          <a:prstGeom prst="rect">
+            <a:avLst/>
+          </a:prstGeom>
+          <a:noFill/>
+        </p:spPr>
+        <p:txBody>
+          <a:bodyPr wrap="none" rtlCol="0">
+            <a:spAutoFit/>
+          </a:bodyPr>
+          <a:lstStyle/>
+          <a:p>
+            <a:r>
+              <a:rPr lang="en-IE" dirty="0"/>
+              <a:t>Event Producer</a:t>
+            </a:r>
+          </a:p>
+        </p:txBody>
+      </p:sp>
+      <p:sp>
+        <p:nvSpPr>
+          <p:cNvPr id="22" name="Rectangle: Rounded Corners 21">
+            <a:extLst>
+              <a:ext uri="{FF2B5EF4-FFF2-40B4-BE49-F238E27FC236}">
+                <a16:creationId xmlns:a16="http://schemas.microsoft.com/office/drawing/2014/main" id="{FF2FCFA3-A4C4-3109-5F88-C7A403B4C8AD}"/>
+              </a:ext>
+            </a:extLst>
+          </p:cNvPr>
+          <p:cNvSpPr/>
+          <p:nvPr/>
+        </p:nvSpPr>
+        <p:spPr>
+          <a:xfrm>
+            <a:off x="3851600" y="4264845"/>
+            <a:ext cx="3387777" cy="858187"/>
+          </a:xfrm>
+          <a:prstGeom prst="roundRect">
+            <a:avLst/>
+          </a:prstGeom>
+        </p:spPr>
+        <p:style>
+          <a:lnRef idx="2">
+            <a:schemeClr val="accent4">
+              <a:shade val="15000"/>
+            </a:schemeClr>
+          </a:lnRef>
+          <a:fillRef idx="1">
+            <a:schemeClr val="accent4"/>
+          </a:fillRef>
+          <a:effectRef idx="0">
+            <a:schemeClr val="accent4"/>
+          </a:effectRef>
+          <a:fontRef idx="minor">
+            <a:schemeClr val="lt1"/>
+          </a:fontRef>
+        </p:style>
+        <p:txBody>
+          <a:bodyPr rtlCol="0" anchor="ctr"/>
+          <a:lstStyle/>
+          <a:p>
+            <a:pPr algn="ctr"/>
+            <a:r>
+              <a:rPr lang="en-IE" dirty="0"/>
+              <a:t>Event Channel</a:t>
+            </a:r>
+          </a:p>
+        </p:txBody>
+      </p:sp>
+      <p:sp>
+        <p:nvSpPr>
+          <p:cNvPr id="23" name="Rectangle: Rounded Corners 22">
+            <a:extLst>
+              <a:ext uri="{FF2B5EF4-FFF2-40B4-BE49-F238E27FC236}">
+                <a16:creationId xmlns:a16="http://schemas.microsoft.com/office/drawing/2014/main" id="{2F8C1B5A-6325-0DAA-53F7-09950199A2AD}"/>
+              </a:ext>
+            </a:extLst>
+          </p:cNvPr>
+          <p:cNvSpPr/>
+          <p:nvPr/>
+        </p:nvSpPr>
+        <p:spPr>
+          <a:xfrm>
+            <a:off x="5615443" y="5354700"/>
+            <a:ext cx="1623934" cy="1038495"/>
+          </a:xfrm>
+          <a:prstGeom prst="roundRect">
+            <a:avLst/>
+          </a:prstGeom>
+        </p:spPr>
+        <p:style>
+          <a:lnRef idx="2">
+            <a:schemeClr val="accent4">
+              <a:shade val="15000"/>
+            </a:schemeClr>
+          </a:lnRef>
+          <a:fillRef idx="1">
+            <a:schemeClr val="accent4"/>
+          </a:fillRef>
+          <a:effectRef idx="0">
+            <a:schemeClr val="accent4"/>
+          </a:effectRef>
+          <a:fontRef idx="minor">
+            <a:schemeClr val="lt1"/>
+          </a:fontRef>
+        </p:style>
+        <p:txBody>
+          <a:bodyPr rtlCol="0" anchor="ctr"/>
+          <a:lstStyle/>
+          <a:p>
+            <a:pPr algn="ctr"/>
+            <a:r>
+              <a:rPr lang="en-IE" dirty="0"/>
+              <a:t>Event Processor</a:t>
+            </a:r>
+          </a:p>
+        </p:txBody>
+      </p:sp>
+      <p:sp>
+        <p:nvSpPr>
+          <p:cNvPr id="24" name="Flowchart: Magnetic Disk 23">
+            <a:extLst>
+              <a:ext uri="{FF2B5EF4-FFF2-40B4-BE49-F238E27FC236}">
+                <a16:creationId xmlns:a16="http://schemas.microsoft.com/office/drawing/2014/main" id="{BE6A1E30-A5A9-3C51-D395-3DB989BD4D8C}"/>
+              </a:ext>
+            </a:extLst>
+          </p:cNvPr>
+          <p:cNvSpPr/>
+          <p:nvPr/>
+        </p:nvSpPr>
+        <p:spPr>
+          <a:xfrm>
+            <a:off x="3964026" y="5455740"/>
+            <a:ext cx="1469036" cy="776564"/>
+          </a:xfrm>
+          <a:prstGeom prst="flowChartMagneticDisk">
+            <a:avLst/>
+          </a:prstGeom>
+        </p:spPr>
+        <p:style>
+          <a:lnRef idx="2">
+            <a:schemeClr val="accent4">
+              <a:shade val="15000"/>
+            </a:schemeClr>
+          </a:lnRef>
+          <a:fillRef idx="1">
+            <a:schemeClr val="accent4"/>
+          </a:fillRef>
+          <a:effectRef idx="0">
+            <a:schemeClr val="accent4"/>
+          </a:effectRef>
+          <a:fontRef idx="minor">
+            <a:schemeClr val="lt1"/>
+          </a:fontRef>
+        </p:style>
+        <p:txBody>
+          <a:bodyPr rtlCol="0" anchor="ctr"/>
+          <a:lstStyle/>
+          <a:p>
+            <a:pPr algn="ctr"/>
+            <a:r>
+              <a:rPr lang="en-IE" dirty="0"/>
+              <a:t>Event DB</a:t>
+            </a:r>
+          </a:p>
+        </p:txBody>
+      </p:sp>
+      <p:sp>
+        <p:nvSpPr>
+          <p:cNvPr id="25" name="Rectangle: Rounded Corners 24">
+            <a:extLst>
+              <a:ext uri="{FF2B5EF4-FFF2-40B4-BE49-F238E27FC236}">
+                <a16:creationId xmlns:a16="http://schemas.microsoft.com/office/drawing/2014/main" id="{3E74A5C8-3056-5A36-4EFF-1ADD2ABB1DD4}"/>
+              </a:ext>
+            </a:extLst>
+          </p:cNvPr>
+          <p:cNvSpPr/>
+          <p:nvPr/>
+        </p:nvSpPr>
+        <p:spPr>
+          <a:xfrm>
+            <a:off x="8318667" y="4000238"/>
+            <a:ext cx="1687651" cy="2595914"/>
+          </a:xfrm>
+          <a:prstGeom prst="roundRect">
+            <a:avLst/>
+          </a:prstGeom>
+          <a:solidFill>
+            <a:schemeClr val="accent1">
+              <a:alpha val="19000"/>
+            </a:schemeClr>
+          </a:solidFill>
+        </p:spPr>
+        <p:style>
+          <a:lnRef idx="2">
+            <a:schemeClr val="accent1">
+              <a:shade val="15000"/>
+            </a:schemeClr>
+          </a:lnRef>
+          <a:fillRef idx="1">
+            <a:schemeClr val="accent1"/>
+          </a:fillRef>
+          <a:effectRef idx="0">
+            <a:schemeClr val="accent1"/>
+          </a:effectRef>
+          <a:fontRef idx="minor">
+            <a:schemeClr val="lt1"/>
+          </a:fontRef>
+        </p:style>
+        <p:txBody>
+          <a:bodyPr rtlCol="0" anchor="ctr"/>
+          <a:lstStyle/>
+          <a:p>
+            <a:pPr algn="ctr"/>
+            <a:endParaRPr lang="en-IE" dirty="0"/>
+          </a:p>
+        </p:txBody>
+      </p:sp>
+      <p:sp>
+        <p:nvSpPr>
+          <p:cNvPr id="26" name="TextBox 25">
+            <a:extLst>
+              <a:ext uri="{FF2B5EF4-FFF2-40B4-BE49-F238E27FC236}">
+                <a16:creationId xmlns:a16="http://schemas.microsoft.com/office/drawing/2014/main" id="{F6A2CA49-B702-F96C-4450-F080B2CE99DE}"/>
+              </a:ext>
+            </a:extLst>
+          </p:cNvPr>
+          <p:cNvSpPr txBox="1"/>
+          <p:nvPr/>
+        </p:nvSpPr>
+        <p:spPr>
+          <a:xfrm>
+            <a:off x="8208191" y="3601605"/>
+            <a:ext cx="1945661" cy="369332"/>
+          </a:xfrm>
+          <a:prstGeom prst="rect">
+            <a:avLst/>
+          </a:prstGeom>
+          <a:noFill/>
+        </p:spPr>
+        <p:txBody>
+          <a:bodyPr wrap="none" rtlCol="0">
+            <a:spAutoFit/>
+          </a:bodyPr>
+          <a:lstStyle/>
+          <a:p>
+            <a:r>
+              <a:rPr lang="en-IE" dirty="0"/>
+              <a:t>Event Consumers</a:t>
+            </a:r>
+          </a:p>
+        </p:txBody>
+      </p:sp>
+      <p:pic>
+        <p:nvPicPr>
+          <p:cNvPr id="27" name="Graphic 26" descr="Programmer female with solid fill">
+            <a:extLst>
+              <a:ext uri="{FF2B5EF4-FFF2-40B4-BE49-F238E27FC236}">
+                <a16:creationId xmlns:a16="http://schemas.microsoft.com/office/drawing/2014/main" id="{5AFD5F19-091A-9C00-45A0-D2AA9741275B}"/>
+              </a:ext>
+            </a:extLst>
+          </p:cNvPr>
+          <p:cNvPicPr>
+            <a:picLocks noChangeAspect="1"/>
+          </p:cNvPicPr>
+          <p:nvPr/>
+        </p:nvPicPr>
+        <p:blipFill>
+          <a:blip r:embed="rId7">
+            <a:extLst>
+              <a:ext uri="{96DAC541-7B7A-43D3-8B79-37D633B846F1}">
+                <asvg:svgBlip xmlns:asvg="http://schemas.microsoft.com/office/drawing/2016/SVG/main" r:embed="rId8"/>
+              </a:ext>
+            </a:extLst>
+          </a:blip>
+          <a:stretch>
+            <a:fillRect/>
+          </a:stretch>
+        </p:blipFill>
+        <p:spPr>
+          <a:xfrm>
+            <a:off x="8712788" y="4137429"/>
+            <a:ext cx="914400" cy="914400"/>
+          </a:xfrm>
+          <a:prstGeom prst="rect">
+            <a:avLst/>
+          </a:prstGeom>
+        </p:spPr>
+      </p:pic>
+      <p:pic>
+        <p:nvPicPr>
+          <p:cNvPr id="28" name="Graphic 27" descr="Robot Hand with solid fill">
+            <a:extLst>
+              <a:ext uri="{FF2B5EF4-FFF2-40B4-BE49-F238E27FC236}">
+                <a16:creationId xmlns:a16="http://schemas.microsoft.com/office/drawing/2014/main" id="{27C3D723-5A55-DA97-C8BE-CAD3BE45888C}"/>
+              </a:ext>
+            </a:extLst>
+          </p:cNvPr>
+          <p:cNvPicPr>
+            <a:picLocks noChangeAspect="1"/>
+          </p:cNvPicPr>
+          <p:nvPr/>
+        </p:nvPicPr>
+        <p:blipFill>
+          <a:blip r:embed="rId9">
+            <a:extLst>
+              <a:ext uri="{96DAC541-7B7A-43D3-8B79-37D633B846F1}">
+                <asvg:svgBlip xmlns:asvg="http://schemas.microsoft.com/office/drawing/2016/SVG/main" r:embed="rId10"/>
+              </a:ext>
+            </a:extLst>
+          </a:blip>
+          <a:stretch>
+            <a:fillRect/>
+          </a:stretch>
+        </p:blipFill>
+        <p:spPr>
+          <a:xfrm>
+            <a:off x="8812080" y="5171696"/>
+            <a:ext cx="737881" cy="737881"/>
+          </a:xfrm>
+          <a:prstGeom prst="rect">
+            <a:avLst/>
+          </a:prstGeom>
+        </p:spPr>
+      </p:pic>
+      <p:pic>
+        <p:nvPicPr>
+          <p:cNvPr id="29" name="Graphic 28" descr="Syncing cloud with solid fill">
+            <a:extLst>
+              <a:ext uri="{FF2B5EF4-FFF2-40B4-BE49-F238E27FC236}">
+                <a16:creationId xmlns:a16="http://schemas.microsoft.com/office/drawing/2014/main" id="{ED7C4629-6EB5-1AA2-1B88-D8B5C49DCA54}"/>
+              </a:ext>
+            </a:extLst>
+          </p:cNvPr>
+          <p:cNvPicPr>
+            <a:picLocks noChangeAspect="1"/>
+          </p:cNvPicPr>
+          <p:nvPr/>
+        </p:nvPicPr>
+        <p:blipFill>
+          <a:blip r:embed="rId11">
+            <a:extLst>
+              <a:ext uri="{96DAC541-7B7A-43D3-8B79-37D633B846F1}">
+                <asvg:svgBlip xmlns:asvg="http://schemas.microsoft.com/office/drawing/2016/SVG/main" r:embed="rId12"/>
+              </a:ext>
+            </a:extLst>
+          </a:blip>
+          <a:stretch>
+            <a:fillRect/>
+          </a:stretch>
+        </p:blipFill>
+        <p:spPr>
+          <a:xfrm>
+            <a:off x="8712788" y="5808812"/>
+            <a:ext cx="914400" cy="914400"/>
+          </a:xfrm>
+          <a:prstGeom prst="rect">
+            <a:avLst/>
+          </a:prstGeom>
+        </p:spPr>
+      </p:pic>
+      <p:sp>
+        <p:nvSpPr>
+          <p:cNvPr id="30" name="Arrow: Left-Right 29">
+            <a:extLst>
+              <a:ext uri="{FF2B5EF4-FFF2-40B4-BE49-F238E27FC236}">
+                <a16:creationId xmlns:a16="http://schemas.microsoft.com/office/drawing/2014/main" id="{30353518-F994-6BD5-324D-0D2A8C21B4B3}"/>
+              </a:ext>
+            </a:extLst>
+          </p:cNvPr>
+          <p:cNvSpPr/>
+          <p:nvPr/>
+        </p:nvSpPr>
+        <p:spPr>
+          <a:xfrm>
+            <a:off x="2821819" y="4965635"/>
+            <a:ext cx="676944" cy="490105"/>
+          </a:xfrm>
+          <a:prstGeom prst="leftRightArrow">
+            <a:avLst/>
+          </a:prstGeom>
+        </p:spPr>
+        <p:style>
+          <a:lnRef idx="2">
+            <a:schemeClr val="accent1">
+              <a:shade val="15000"/>
+            </a:schemeClr>
+          </a:lnRef>
+          <a:fillRef idx="1">
+            <a:schemeClr val="accent1"/>
+          </a:fillRef>
+          <a:effectRef idx="0">
+            <a:schemeClr val="accent1"/>
+          </a:effectRef>
+          <a:fontRef idx="minor">
+            <a:schemeClr val="lt1"/>
+          </a:fontRef>
+        </p:style>
+        <p:txBody>
+          <a:bodyPr rtlCol="0" anchor="ctr"/>
+          <a:lstStyle/>
+          <a:p>
+            <a:pPr algn="ctr"/>
+            <a:endParaRPr lang="en-IE"/>
+          </a:p>
+        </p:txBody>
+      </p:sp>
+      <p:sp>
+        <p:nvSpPr>
+          <p:cNvPr id="31" name="Arrow: Left-Right 30">
+            <a:extLst>
+              <a:ext uri="{FF2B5EF4-FFF2-40B4-BE49-F238E27FC236}">
+                <a16:creationId xmlns:a16="http://schemas.microsoft.com/office/drawing/2014/main" id="{AFC0076F-8AE6-16E7-A0E6-486FD81566B1}"/>
+              </a:ext>
+            </a:extLst>
+          </p:cNvPr>
+          <p:cNvSpPr/>
+          <p:nvPr/>
+        </p:nvSpPr>
+        <p:spPr>
+          <a:xfrm>
+            <a:off x="7732790" y="5095301"/>
             <a:ext cx="627032" cy="471666"/>
           </a:xfrm>
           <a:prstGeom prst="leftRightArrow">

--- a/topic-10-week10/unit-1/talk-1/Presentation1.pptx
+++ b/topic-10-week10/unit-1/talk-1/Presentation1.pptx
@@ -5,14 +5,15 @@
     <p:sldMasterId id="2147483648" r:id="rId1"/>
   </p:sldMasterIdLst>
   <p:notesMasterIdLst>
-    <p:notesMasterId r:id="rId7"/>
+    <p:notesMasterId r:id="rId8"/>
   </p:notesMasterIdLst>
   <p:sldIdLst>
     <p:sldId id="256" r:id="rId2"/>
-    <p:sldId id="260" r:id="rId3"/>
-    <p:sldId id="257" r:id="rId4"/>
-    <p:sldId id="259" r:id="rId5"/>
-    <p:sldId id="261" r:id="rId6"/>
+    <p:sldId id="262" r:id="rId3"/>
+    <p:sldId id="260" r:id="rId4"/>
+    <p:sldId id="257" r:id="rId5"/>
+    <p:sldId id="259" r:id="rId6"/>
+    <p:sldId id="261" r:id="rId7"/>
   </p:sldIdLst>
   <p:sldSz cx="12192000" cy="6858000"/>
   <p:notesSz cx="6858000" cy="9144000"/>
@@ -128,6 +129,3399 @@
     </p:ext>
   </p:extLst>
 </p:presentation>
+</file>
+
+<file path=ppt/diagrams/colors1.xml><?xml version="1.0" encoding="utf-8"?>
+<dgm:colorsDef xmlns:dgm="http://schemas.openxmlformats.org/drawingml/2006/diagram" xmlns:a="http://schemas.openxmlformats.org/drawingml/2006/main" uniqueId="urn:microsoft.com/office/officeart/2005/8/colors/accent1_2">
+  <dgm:title val=""/>
+  <dgm:desc val=""/>
+  <dgm:catLst>
+    <dgm:cat type="accent1" pri="11200"/>
+  </dgm:catLst>
+  <dgm:styleLbl name="node0">
+    <dgm:fillClrLst meth="repeat">
+      <a:schemeClr val="accent1"/>
+    </dgm:fillClrLst>
+    <dgm:linClrLst meth="repeat">
+      <a:schemeClr val="lt1"/>
+    </dgm:linClrLst>
+    <dgm:effectClrLst/>
+    <dgm:txLinClrLst/>
+    <dgm:txFillClrLst/>
+    <dgm:txEffectClrLst/>
+  </dgm:styleLbl>
+  <dgm:styleLbl name="alignNode1">
+    <dgm:fillClrLst meth="repeat">
+      <a:schemeClr val="accent1"/>
+    </dgm:fillClrLst>
+    <dgm:linClrLst meth="repeat">
+      <a:schemeClr val="accent1"/>
+    </dgm:linClrLst>
+    <dgm:effectClrLst/>
+    <dgm:txLinClrLst/>
+    <dgm:txFillClrLst/>
+    <dgm:txEffectClrLst/>
+  </dgm:styleLbl>
+  <dgm:styleLbl name="node1">
+    <dgm:fillClrLst meth="repeat">
+      <a:schemeClr val="accent1"/>
+    </dgm:fillClrLst>
+    <dgm:linClrLst meth="repeat">
+      <a:schemeClr val="lt1"/>
+    </dgm:linClrLst>
+    <dgm:effectClrLst/>
+    <dgm:txLinClrLst/>
+    <dgm:txFillClrLst/>
+    <dgm:txEffectClrLst/>
+  </dgm:styleLbl>
+  <dgm:styleLbl name="lnNode1">
+    <dgm:fillClrLst meth="repeat">
+      <a:schemeClr val="accent1"/>
+    </dgm:fillClrLst>
+    <dgm:linClrLst meth="repeat">
+      <a:schemeClr val="lt1"/>
+    </dgm:linClrLst>
+    <dgm:effectClrLst/>
+    <dgm:txLinClrLst/>
+    <dgm:txFillClrLst/>
+    <dgm:txEffectClrLst/>
+  </dgm:styleLbl>
+  <dgm:styleLbl name="vennNode1">
+    <dgm:fillClrLst meth="repeat">
+      <a:schemeClr val="accent1">
+        <a:alpha val="50000"/>
+      </a:schemeClr>
+    </dgm:fillClrLst>
+    <dgm:linClrLst meth="repeat">
+      <a:schemeClr val="lt1"/>
+    </dgm:linClrLst>
+    <dgm:effectClrLst/>
+    <dgm:txLinClrLst/>
+    <dgm:txFillClrLst/>
+    <dgm:txEffectClrLst/>
+  </dgm:styleLbl>
+  <dgm:styleLbl name="node2">
+    <dgm:fillClrLst meth="repeat">
+      <a:schemeClr val="accent1"/>
+    </dgm:fillClrLst>
+    <dgm:linClrLst meth="repeat">
+      <a:schemeClr val="lt1"/>
+    </dgm:linClrLst>
+    <dgm:effectClrLst/>
+    <dgm:txLinClrLst/>
+    <dgm:txFillClrLst/>
+    <dgm:txEffectClrLst/>
+  </dgm:styleLbl>
+  <dgm:styleLbl name="node3">
+    <dgm:fillClrLst meth="repeat">
+      <a:schemeClr val="accent1"/>
+    </dgm:fillClrLst>
+    <dgm:linClrLst meth="repeat">
+      <a:schemeClr val="lt1"/>
+    </dgm:linClrLst>
+    <dgm:effectClrLst/>
+    <dgm:txLinClrLst/>
+    <dgm:txFillClrLst/>
+    <dgm:txEffectClrLst/>
+  </dgm:styleLbl>
+  <dgm:styleLbl name="node4">
+    <dgm:fillClrLst meth="repeat">
+      <a:schemeClr val="accent1"/>
+    </dgm:fillClrLst>
+    <dgm:linClrLst meth="repeat">
+      <a:schemeClr val="lt1"/>
+    </dgm:linClrLst>
+    <dgm:effectClrLst/>
+    <dgm:txLinClrLst/>
+    <dgm:txFillClrLst/>
+    <dgm:txEffectClrLst/>
+  </dgm:styleLbl>
+  <dgm:styleLbl name="fgImgPlace1">
+    <dgm:fillClrLst meth="repeat">
+      <a:schemeClr val="accent1">
+        <a:tint val="50000"/>
+      </a:schemeClr>
+    </dgm:fillClrLst>
+    <dgm:linClrLst meth="repeat">
+      <a:schemeClr val="lt1"/>
+    </dgm:linClrLst>
+    <dgm:effectClrLst/>
+    <dgm:txLinClrLst/>
+    <dgm:txFillClrLst meth="repeat">
+      <a:schemeClr val="lt1"/>
+    </dgm:txFillClrLst>
+    <dgm:txEffectClrLst/>
+  </dgm:styleLbl>
+  <dgm:styleLbl name="alignImgPlace1">
+    <dgm:fillClrLst meth="repeat">
+      <a:schemeClr val="accent1">
+        <a:tint val="50000"/>
+      </a:schemeClr>
+    </dgm:fillClrLst>
+    <dgm:linClrLst meth="repeat">
+      <a:schemeClr val="lt1"/>
+    </dgm:linClrLst>
+    <dgm:effectClrLst/>
+    <dgm:txLinClrLst/>
+    <dgm:txFillClrLst meth="repeat">
+      <a:schemeClr val="lt1"/>
+    </dgm:txFillClrLst>
+    <dgm:txEffectClrLst/>
+  </dgm:styleLbl>
+  <dgm:styleLbl name="bgImgPlace1">
+    <dgm:fillClrLst meth="repeat">
+      <a:schemeClr val="accent1">
+        <a:tint val="50000"/>
+      </a:schemeClr>
+    </dgm:fillClrLst>
+    <dgm:linClrLst meth="repeat">
+      <a:schemeClr val="lt1"/>
+    </dgm:linClrLst>
+    <dgm:effectClrLst/>
+    <dgm:txLinClrLst/>
+    <dgm:txFillClrLst meth="repeat">
+      <a:schemeClr val="lt1"/>
+    </dgm:txFillClrLst>
+    <dgm:txEffectClrLst/>
+  </dgm:styleLbl>
+  <dgm:styleLbl name="sibTrans2D1">
+    <dgm:fillClrLst meth="repeat">
+      <a:schemeClr val="accent1">
+        <a:tint val="60000"/>
+      </a:schemeClr>
+    </dgm:fillClrLst>
+    <dgm:linClrLst meth="repeat">
+      <a:schemeClr val="accent1">
+        <a:tint val="60000"/>
+      </a:schemeClr>
+    </dgm:linClrLst>
+    <dgm:effectClrLst/>
+    <dgm:txLinClrLst/>
+    <dgm:txFillClrLst/>
+    <dgm:txEffectClrLst/>
+  </dgm:styleLbl>
+  <dgm:styleLbl name="fgSibTrans2D1">
+    <dgm:fillClrLst meth="repeat">
+      <a:schemeClr val="accent1">
+        <a:tint val="60000"/>
+      </a:schemeClr>
+    </dgm:fillClrLst>
+    <dgm:linClrLst meth="repeat">
+      <a:schemeClr val="accent1">
+        <a:tint val="60000"/>
+      </a:schemeClr>
+    </dgm:linClrLst>
+    <dgm:effectClrLst/>
+    <dgm:txLinClrLst/>
+    <dgm:txFillClrLst/>
+    <dgm:txEffectClrLst/>
+  </dgm:styleLbl>
+  <dgm:styleLbl name="bgSibTrans2D1">
+    <dgm:fillClrLst meth="repeat">
+      <a:schemeClr val="accent1">
+        <a:tint val="60000"/>
+      </a:schemeClr>
+    </dgm:fillClrLst>
+    <dgm:linClrLst meth="repeat">
+      <a:schemeClr val="accent1">
+        <a:tint val="60000"/>
+      </a:schemeClr>
+    </dgm:linClrLst>
+    <dgm:effectClrLst/>
+    <dgm:txLinClrLst/>
+    <dgm:txFillClrLst/>
+    <dgm:txEffectClrLst/>
+  </dgm:styleLbl>
+  <dgm:styleLbl name="sibTrans1D1">
+    <dgm:fillClrLst meth="repeat">
+      <a:schemeClr val="accent1"/>
+    </dgm:fillClrLst>
+    <dgm:linClrLst meth="repeat">
+      <a:schemeClr val="accent1"/>
+    </dgm:linClrLst>
+    <dgm:effectClrLst/>
+    <dgm:txLinClrLst/>
+    <dgm:txFillClrLst meth="repeat">
+      <a:schemeClr val="tx1"/>
+    </dgm:txFillClrLst>
+    <dgm:txEffectClrLst/>
+  </dgm:styleLbl>
+  <dgm:styleLbl name="callout">
+    <dgm:fillClrLst meth="repeat">
+      <a:schemeClr val="accent1"/>
+    </dgm:fillClrLst>
+    <dgm:linClrLst meth="repeat">
+      <a:schemeClr val="accent1">
+        <a:tint val="50000"/>
+      </a:schemeClr>
+    </dgm:linClrLst>
+    <dgm:effectClrLst/>
+    <dgm:txLinClrLst/>
+    <dgm:txFillClrLst meth="repeat">
+      <a:schemeClr val="tx1"/>
+    </dgm:txFillClrLst>
+    <dgm:txEffectClrLst/>
+  </dgm:styleLbl>
+  <dgm:styleLbl name="asst0">
+    <dgm:fillClrLst meth="repeat">
+      <a:schemeClr val="accent1"/>
+    </dgm:fillClrLst>
+    <dgm:linClrLst meth="repeat">
+      <a:schemeClr val="lt1"/>
+    </dgm:linClrLst>
+    <dgm:effectClrLst/>
+    <dgm:txLinClrLst/>
+    <dgm:txFillClrLst/>
+    <dgm:txEffectClrLst/>
+  </dgm:styleLbl>
+  <dgm:styleLbl name="asst1">
+    <dgm:fillClrLst meth="repeat">
+      <a:schemeClr val="accent1"/>
+    </dgm:fillClrLst>
+    <dgm:linClrLst meth="repeat">
+      <a:schemeClr val="lt1"/>
+    </dgm:linClrLst>
+    <dgm:effectClrLst/>
+    <dgm:txLinClrLst/>
+    <dgm:txFillClrLst/>
+    <dgm:txEffectClrLst/>
+  </dgm:styleLbl>
+  <dgm:styleLbl name="asst2">
+    <dgm:fillClrLst meth="repeat">
+      <a:schemeClr val="accent1"/>
+    </dgm:fillClrLst>
+    <dgm:linClrLst meth="repeat">
+      <a:schemeClr val="lt1"/>
+    </dgm:linClrLst>
+    <dgm:effectClrLst/>
+    <dgm:txLinClrLst/>
+    <dgm:txFillClrLst/>
+    <dgm:txEffectClrLst/>
+  </dgm:styleLbl>
+  <dgm:styleLbl name="asst3">
+    <dgm:fillClrLst meth="repeat">
+      <a:schemeClr val="accent1"/>
+    </dgm:fillClrLst>
+    <dgm:linClrLst meth="repeat">
+      <a:schemeClr val="lt1"/>
+    </dgm:linClrLst>
+    <dgm:effectClrLst/>
+    <dgm:txLinClrLst/>
+    <dgm:txFillClrLst/>
+    <dgm:txEffectClrLst/>
+  </dgm:styleLbl>
+  <dgm:styleLbl name="asst4">
+    <dgm:fillClrLst meth="repeat">
+      <a:schemeClr val="accent1"/>
+    </dgm:fillClrLst>
+    <dgm:linClrLst meth="repeat">
+      <a:schemeClr val="lt1"/>
+    </dgm:linClrLst>
+    <dgm:effectClrLst/>
+    <dgm:txLinClrLst/>
+    <dgm:txFillClrLst/>
+    <dgm:txEffectClrLst/>
+  </dgm:styleLbl>
+  <dgm:styleLbl name="parChTrans2D1">
+    <dgm:fillClrLst meth="repeat">
+      <a:schemeClr val="accent1">
+        <a:tint val="60000"/>
+      </a:schemeClr>
+    </dgm:fillClrLst>
+    <dgm:linClrLst meth="repeat">
+      <a:schemeClr val="accent1">
+        <a:tint val="60000"/>
+      </a:schemeClr>
+    </dgm:linClrLst>
+    <dgm:effectClrLst/>
+    <dgm:txLinClrLst/>
+    <dgm:txFillClrLst meth="repeat">
+      <a:schemeClr val="lt1"/>
+    </dgm:txFillClrLst>
+    <dgm:txEffectClrLst/>
+  </dgm:styleLbl>
+  <dgm:styleLbl name="parChTrans2D2">
+    <dgm:fillClrLst meth="repeat">
+      <a:schemeClr val="accent1"/>
+    </dgm:fillClrLst>
+    <dgm:linClrLst meth="repeat">
+      <a:schemeClr val="accent1"/>
+    </dgm:linClrLst>
+    <dgm:effectClrLst/>
+    <dgm:txLinClrLst/>
+    <dgm:txFillClrLst meth="repeat">
+      <a:schemeClr val="lt1"/>
+    </dgm:txFillClrLst>
+    <dgm:txEffectClrLst/>
+  </dgm:styleLbl>
+  <dgm:styleLbl name="parChTrans2D3">
+    <dgm:fillClrLst meth="repeat">
+      <a:schemeClr val="accent1"/>
+    </dgm:fillClrLst>
+    <dgm:linClrLst meth="repeat">
+      <a:schemeClr val="accent1"/>
+    </dgm:linClrLst>
+    <dgm:effectClrLst/>
+    <dgm:txLinClrLst/>
+    <dgm:txFillClrLst meth="repeat">
+      <a:schemeClr val="lt1"/>
+    </dgm:txFillClrLst>
+    <dgm:txEffectClrLst/>
+  </dgm:styleLbl>
+  <dgm:styleLbl name="parChTrans2D4">
+    <dgm:fillClrLst meth="repeat">
+      <a:schemeClr val="accent1"/>
+    </dgm:fillClrLst>
+    <dgm:linClrLst meth="repeat">
+      <a:schemeClr val="accent1"/>
+    </dgm:linClrLst>
+    <dgm:effectClrLst/>
+    <dgm:txLinClrLst/>
+    <dgm:txFillClrLst meth="repeat">
+      <a:schemeClr val="lt1"/>
+    </dgm:txFillClrLst>
+    <dgm:txEffectClrLst/>
+  </dgm:styleLbl>
+  <dgm:styleLbl name="parChTrans1D1">
+    <dgm:fillClrLst meth="repeat">
+      <a:schemeClr val="accent1"/>
+    </dgm:fillClrLst>
+    <dgm:linClrLst meth="repeat">
+      <a:schemeClr val="accent1">
+        <a:shade val="60000"/>
+      </a:schemeClr>
+    </dgm:linClrLst>
+    <dgm:effectClrLst/>
+    <dgm:txLinClrLst/>
+    <dgm:txFillClrLst meth="repeat">
+      <a:schemeClr val="tx1"/>
+    </dgm:txFillClrLst>
+    <dgm:txEffectClrLst/>
+  </dgm:styleLbl>
+  <dgm:styleLbl name="parChTrans1D2">
+    <dgm:fillClrLst meth="repeat">
+      <a:schemeClr val="accent1"/>
+    </dgm:fillClrLst>
+    <dgm:linClrLst meth="repeat">
+      <a:schemeClr val="accent1">
+        <a:shade val="60000"/>
+      </a:schemeClr>
+    </dgm:linClrLst>
+    <dgm:effectClrLst/>
+    <dgm:txLinClrLst/>
+    <dgm:txFillClrLst meth="repeat">
+      <a:schemeClr val="tx1"/>
+    </dgm:txFillClrLst>
+    <dgm:txEffectClrLst/>
+  </dgm:styleLbl>
+  <dgm:styleLbl name="parChTrans1D3">
+    <dgm:fillClrLst meth="repeat">
+      <a:schemeClr val="accent1"/>
+    </dgm:fillClrLst>
+    <dgm:linClrLst meth="repeat">
+      <a:schemeClr val="accent1">
+        <a:shade val="80000"/>
+      </a:schemeClr>
+    </dgm:linClrLst>
+    <dgm:effectClrLst/>
+    <dgm:txLinClrLst/>
+    <dgm:txFillClrLst meth="repeat">
+      <a:schemeClr val="tx1"/>
+    </dgm:txFillClrLst>
+    <dgm:txEffectClrLst/>
+  </dgm:styleLbl>
+  <dgm:styleLbl name="parChTrans1D4">
+    <dgm:fillClrLst meth="repeat">
+      <a:schemeClr val="accent1"/>
+    </dgm:fillClrLst>
+    <dgm:linClrLst meth="repeat">
+      <a:schemeClr val="accent1">
+        <a:shade val="80000"/>
+      </a:schemeClr>
+    </dgm:linClrLst>
+    <dgm:effectClrLst/>
+    <dgm:txLinClrLst/>
+    <dgm:txFillClrLst meth="repeat">
+      <a:schemeClr val="tx1"/>
+    </dgm:txFillClrLst>
+    <dgm:txEffectClrLst/>
+  </dgm:styleLbl>
+  <dgm:styleLbl name="fgAcc1">
+    <dgm:fillClrLst meth="repeat">
+      <a:schemeClr val="lt1">
+        <a:alpha val="90000"/>
+      </a:schemeClr>
+    </dgm:fillClrLst>
+    <dgm:linClrLst meth="repeat">
+      <a:schemeClr val="accent1"/>
+    </dgm:linClrLst>
+    <dgm:effectClrLst/>
+    <dgm:txLinClrLst/>
+    <dgm:txFillClrLst meth="repeat">
+      <a:schemeClr val="dk1"/>
+    </dgm:txFillClrLst>
+    <dgm:txEffectClrLst/>
+  </dgm:styleLbl>
+  <dgm:styleLbl name="conFgAcc1">
+    <dgm:fillClrLst meth="repeat">
+      <a:schemeClr val="lt1">
+        <a:alpha val="90000"/>
+      </a:schemeClr>
+    </dgm:fillClrLst>
+    <dgm:linClrLst meth="repeat">
+      <a:schemeClr val="accent1"/>
+    </dgm:linClrLst>
+    <dgm:effectClrLst/>
+    <dgm:txLinClrLst/>
+    <dgm:txFillClrLst meth="repeat">
+      <a:schemeClr val="dk1"/>
+    </dgm:txFillClrLst>
+    <dgm:txEffectClrLst/>
+  </dgm:styleLbl>
+  <dgm:styleLbl name="alignAcc1">
+    <dgm:fillClrLst meth="repeat">
+      <a:schemeClr val="lt1">
+        <a:alpha val="90000"/>
+      </a:schemeClr>
+    </dgm:fillClrLst>
+    <dgm:linClrLst meth="repeat">
+      <a:schemeClr val="accent1"/>
+    </dgm:linClrLst>
+    <dgm:effectClrLst/>
+    <dgm:txLinClrLst/>
+    <dgm:txFillClrLst meth="repeat">
+      <a:schemeClr val="dk1"/>
+    </dgm:txFillClrLst>
+    <dgm:txEffectClrLst/>
+  </dgm:styleLbl>
+  <dgm:styleLbl name="trAlignAcc1">
+    <dgm:fillClrLst meth="repeat">
+      <a:schemeClr val="lt1">
+        <a:alpha val="40000"/>
+      </a:schemeClr>
+    </dgm:fillClrLst>
+    <dgm:linClrLst meth="repeat">
+      <a:schemeClr val="accent1"/>
+    </dgm:linClrLst>
+    <dgm:effectClrLst/>
+    <dgm:txLinClrLst/>
+    <dgm:txFillClrLst meth="repeat">
+      <a:schemeClr val="dk1"/>
+    </dgm:txFillClrLst>
+    <dgm:txEffectClrLst/>
+  </dgm:styleLbl>
+  <dgm:styleLbl name="bgAcc1">
+    <dgm:fillClrLst meth="repeat">
+      <a:schemeClr val="lt1">
+        <a:alpha val="90000"/>
+      </a:schemeClr>
+    </dgm:fillClrLst>
+    <dgm:linClrLst meth="repeat">
+      <a:schemeClr val="accent1"/>
+    </dgm:linClrLst>
+    <dgm:effectClrLst/>
+    <dgm:txLinClrLst/>
+    <dgm:txFillClrLst meth="repeat">
+      <a:schemeClr val="dk1"/>
+    </dgm:txFillClrLst>
+    <dgm:txEffectClrLst/>
+  </dgm:styleLbl>
+  <dgm:styleLbl name="solidFgAcc1">
+    <dgm:fillClrLst meth="repeat">
+      <a:schemeClr val="lt1"/>
+    </dgm:fillClrLst>
+    <dgm:linClrLst meth="repeat">
+      <a:schemeClr val="accent1"/>
+    </dgm:linClrLst>
+    <dgm:effectClrLst/>
+    <dgm:txLinClrLst/>
+    <dgm:txFillClrLst meth="repeat">
+      <a:schemeClr val="dk1"/>
+    </dgm:txFillClrLst>
+    <dgm:txEffectClrLst/>
+  </dgm:styleLbl>
+  <dgm:styleLbl name="solidAlignAcc1">
+    <dgm:fillClrLst meth="repeat">
+      <a:schemeClr val="lt1"/>
+    </dgm:fillClrLst>
+    <dgm:linClrLst meth="repeat">
+      <a:schemeClr val="accent1"/>
+    </dgm:linClrLst>
+    <dgm:effectClrLst/>
+    <dgm:txLinClrLst/>
+    <dgm:txFillClrLst meth="repeat">
+      <a:schemeClr val="dk1"/>
+    </dgm:txFillClrLst>
+    <dgm:txEffectClrLst/>
+  </dgm:styleLbl>
+  <dgm:styleLbl name="solidBgAcc1">
+    <dgm:fillClrLst meth="repeat">
+      <a:schemeClr val="lt1"/>
+    </dgm:fillClrLst>
+    <dgm:linClrLst meth="repeat">
+      <a:schemeClr val="accent1"/>
+    </dgm:linClrLst>
+    <dgm:effectClrLst/>
+    <dgm:txLinClrLst/>
+    <dgm:txFillClrLst meth="repeat">
+      <a:schemeClr val="dk1"/>
+    </dgm:txFillClrLst>
+    <dgm:txEffectClrLst/>
+  </dgm:styleLbl>
+  <dgm:styleLbl name="fgAccFollowNode1">
+    <dgm:fillClrLst meth="repeat">
+      <a:schemeClr val="accent1">
+        <a:alpha val="90000"/>
+        <a:tint val="40000"/>
+      </a:schemeClr>
+    </dgm:fillClrLst>
+    <dgm:linClrLst meth="repeat">
+      <a:schemeClr val="accent1">
+        <a:alpha val="90000"/>
+        <a:tint val="40000"/>
+      </a:schemeClr>
+    </dgm:linClrLst>
+    <dgm:effectClrLst/>
+    <dgm:txLinClrLst/>
+    <dgm:txFillClrLst meth="repeat">
+      <a:schemeClr val="dk1"/>
+    </dgm:txFillClrLst>
+    <dgm:txEffectClrLst/>
+  </dgm:styleLbl>
+  <dgm:styleLbl name="alignAccFollowNode1">
+    <dgm:fillClrLst meth="repeat">
+      <a:schemeClr val="accent1">
+        <a:alpha val="90000"/>
+        <a:tint val="40000"/>
+      </a:schemeClr>
+    </dgm:fillClrLst>
+    <dgm:linClrLst meth="repeat">
+      <a:schemeClr val="accent1">
+        <a:alpha val="90000"/>
+        <a:tint val="40000"/>
+      </a:schemeClr>
+    </dgm:linClrLst>
+    <dgm:effectClrLst/>
+    <dgm:txLinClrLst/>
+    <dgm:txFillClrLst meth="repeat">
+      <a:schemeClr val="dk1"/>
+    </dgm:txFillClrLst>
+    <dgm:txEffectClrLst/>
+  </dgm:styleLbl>
+  <dgm:styleLbl name="bgAccFollowNode1">
+    <dgm:fillClrLst meth="repeat">
+      <a:schemeClr val="accent1">
+        <a:alpha val="90000"/>
+        <a:tint val="40000"/>
+      </a:schemeClr>
+    </dgm:fillClrLst>
+    <dgm:linClrLst meth="repeat">
+      <a:schemeClr val="accent1">
+        <a:alpha val="90000"/>
+        <a:tint val="40000"/>
+      </a:schemeClr>
+    </dgm:linClrLst>
+    <dgm:effectClrLst/>
+    <dgm:txLinClrLst/>
+    <dgm:txFillClrLst meth="repeat">
+      <a:schemeClr val="dk1"/>
+    </dgm:txFillClrLst>
+    <dgm:txEffectClrLst/>
+  </dgm:styleLbl>
+  <dgm:styleLbl name="fgAcc0">
+    <dgm:fillClrLst meth="repeat">
+      <a:schemeClr val="lt1">
+        <a:alpha val="90000"/>
+      </a:schemeClr>
+    </dgm:fillClrLst>
+    <dgm:linClrLst meth="repeat">
+      <a:schemeClr val="accent1"/>
+    </dgm:linClrLst>
+    <dgm:effectClrLst/>
+    <dgm:txLinClrLst/>
+    <dgm:txFillClrLst meth="repeat">
+      <a:schemeClr val="dk1"/>
+    </dgm:txFillClrLst>
+    <dgm:txEffectClrLst/>
+  </dgm:styleLbl>
+  <dgm:styleLbl name="fgAcc2">
+    <dgm:fillClrLst meth="repeat">
+      <a:schemeClr val="lt1">
+        <a:alpha val="90000"/>
+      </a:schemeClr>
+    </dgm:fillClrLst>
+    <dgm:linClrLst meth="repeat">
+      <a:schemeClr val="accent1"/>
+    </dgm:linClrLst>
+    <dgm:effectClrLst/>
+    <dgm:txLinClrLst/>
+    <dgm:txFillClrLst meth="repeat">
+      <a:schemeClr val="dk1"/>
+    </dgm:txFillClrLst>
+    <dgm:txEffectClrLst/>
+  </dgm:styleLbl>
+  <dgm:styleLbl name="fgAcc3">
+    <dgm:fillClrLst meth="repeat">
+      <a:schemeClr val="lt1">
+        <a:alpha val="90000"/>
+      </a:schemeClr>
+    </dgm:fillClrLst>
+    <dgm:linClrLst meth="repeat">
+      <a:schemeClr val="accent1"/>
+    </dgm:linClrLst>
+    <dgm:effectClrLst/>
+    <dgm:txLinClrLst/>
+    <dgm:txFillClrLst meth="repeat">
+      <a:schemeClr val="dk1"/>
+    </dgm:txFillClrLst>
+    <dgm:txEffectClrLst/>
+  </dgm:styleLbl>
+  <dgm:styleLbl name="fgAcc4">
+    <dgm:fillClrLst meth="repeat">
+      <a:schemeClr val="lt1">
+        <a:alpha val="90000"/>
+      </a:schemeClr>
+    </dgm:fillClrLst>
+    <dgm:linClrLst meth="repeat">
+      <a:schemeClr val="accent1"/>
+    </dgm:linClrLst>
+    <dgm:effectClrLst/>
+    <dgm:txLinClrLst/>
+    <dgm:txFillClrLst meth="repeat">
+      <a:schemeClr val="dk1"/>
+    </dgm:txFillClrLst>
+    <dgm:txEffectClrLst/>
+  </dgm:styleLbl>
+  <dgm:styleLbl name="bgShp">
+    <dgm:fillClrLst meth="repeat">
+      <a:schemeClr val="accent1">
+        <a:tint val="40000"/>
+      </a:schemeClr>
+    </dgm:fillClrLst>
+    <dgm:linClrLst meth="repeat">
+      <a:schemeClr val="accent1"/>
+    </dgm:linClrLst>
+    <dgm:effectClrLst/>
+    <dgm:txLinClrLst/>
+    <dgm:txFillClrLst meth="repeat">
+      <a:schemeClr val="dk1"/>
+    </dgm:txFillClrLst>
+    <dgm:txEffectClrLst/>
+  </dgm:styleLbl>
+  <dgm:styleLbl name="dkBgShp">
+    <dgm:fillClrLst meth="repeat">
+      <a:schemeClr val="accent1">
+        <a:shade val="80000"/>
+      </a:schemeClr>
+    </dgm:fillClrLst>
+    <dgm:linClrLst meth="repeat">
+      <a:schemeClr val="accent1"/>
+    </dgm:linClrLst>
+    <dgm:effectClrLst/>
+    <dgm:txLinClrLst/>
+    <dgm:txFillClrLst meth="repeat">
+      <a:schemeClr val="lt1"/>
+    </dgm:txFillClrLst>
+    <dgm:txEffectClrLst/>
+  </dgm:styleLbl>
+  <dgm:styleLbl name="trBgShp">
+    <dgm:fillClrLst meth="repeat">
+      <a:schemeClr val="accent1">
+        <a:tint val="50000"/>
+        <a:alpha val="40000"/>
+      </a:schemeClr>
+    </dgm:fillClrLst>
+    <dgm:linClrLst meth="repeat">
+      <a:schemeClr val="accent1"/>
+    </dgm:linClrLst>
+    <dgm:effectClrLst/>
+    <dgm:txLinClrLst/>
+    <dgm:txFillClrLst meth="repeat">
+      <a:schemeClr val="lt1"/>
+    </dgm:txFillClrLst>
+    <dgm:txEffectClrLst/>
+  </dgm:styleLbl>
+  <dgm:styleLbl name="fgShp">
+    <dgm:fillClrLst meth="repeat">
+      <a:schemeClr val="accent1">
+        <a:tint val="60000"/>
+      </a:schemeClr>
+    </dgm:fillClrLst>
+    <dgm:linClrLst meth="repeat">
+      <a:schemeClr val="lt1"/>
+    </dgm:linClrLst>
+    <dgm:effectClrLst/>
+    <dgm:txLinClrLst/>
+    <dgm:txFillClrLst meth="repeat">
+      <a:schemeClr val="dk1"/>
+    </dgm:txFillClrLst>
+    <dgm:txEffectClrLst/>
+  </dgm:styleLbl>
+  <dgm:styleLbl name="revTx">
+    <dgm:fillClrLst meth="repeat">
+      <a:schemeClr val="lt1">
+        <a:alpha val="0"/>
+      </a:schemeClr>
+    </dgm:fillClrLst>
+    <dgm:linClrLst meth="repeat">
+      <a:schemeClr val="dk1">
+        <a:alpha val="0"/>
+      </a:schemeClr>
+    </dgm:linClrLst>
+    <dgm:effectClrLst/>
+    <dgm:txLinClrLst/>
+    <dgm:txFillClrLst meth="repeat">
+      <a:schemeClr val="tx1"/>
+    </dgm:txFillClrLst>
+    <dgm:txEffectClrLst/>
+  </dgm:styleLbl>
+</dgm:colorsDef>
+</file>
+
+<file path=ppt/diagrams/data1.xml><?xml version="1.0" encoding="utf-8"?>
+<dgm:dataModel xmlns:dgm="http://schemas.openxmlformats.org/drawingml/2006/diagram" xmlns:a="http://schemas.openxmlformats.org/drawingml/2006/main">
+  <dgm:ptLst>
+    <dgm:pt modelId="{70BE38BA-9720-4649-B89B-DC2FDA4D0662}" type="doc">
+      <dgm:prSet loTypeId="urn:microsoft.com/office/officeart/2005/8/layout/process3" loCatId="process" qsTypeId="urn:microsoft.com/office/officeart/2005/8/quickstyle/simple1" qsCatId="simple" csTypeId="urn:microsoft.com/office/officeart/2005/8/colors/accent1_2" csCatId="accent1" phldr="1"/>
+      <dgm:spPr/>
+      <dgm:t>
+        <a:bodyPr/>
+        <a:lstStyle/>
+        <a:p>
+          <a:endParaRPr lang="en-IE"/>
+        </a:p>
+      </dgm:t>
+    </dgm:pt>
+    <dgm:pt modelId="{36F41769-C211-4FAA-8968-622273B0D287}">
+      <dgm:prSet phldrT="[Text]" phldr="0"/>
+      <dgm:spPr/>
+      <dgm:t>
+        <a:bodyPr/>
+        <a:lstStyle/>
+        <a:p>
+          <a:r>
+            <a:rPr lang="en-GB" dirty="0"/>
+            <a:t>Part 1: All on the </a:t>
+          </a:r>
+          <a:r>
+            <a:rPr lang="en-GB" dirty="0" err="1"/>
+            <a:t>Rpi</a:t>
+          </a:r>
+          <a:endParaRPr lang="en-GB" dirty="0"/>
+        </a:p>
+      </dgm:t>
+    </dgm:pt>
+    <dgm:pt modelId="{06707697-C68C-43A1-BA76-016D9E1BDE30}" type="parTrans" cxnId="{CD17A31B-D5B6-4B94-B72E-1A0564906A38}">
+      <dgm:prSet/>
+      <dgm:spPr/>
+      <dgm:t>
+        <a:bodyPr/>
+        <a:lstStyle/>
+        <a:p>
+          <a:endParaRPr lang="en-IE"/>
+        </a:p>
+      </dgm:t>
+    </dgm:pt>
+    <dgm:pt modelId="{1CC0F81A-5828-4851-B325-4A3346A1E96F}" type="sibTrans" cxnId="{CD17A31B-D5B6-4B94-B72E-1A0564906A38}">
+      <dgm:prSet/>
+      <dgm:spPr/>
+      <dgm:t>
+        <a:bodyPr/>
+        <a:lstStyle/>
+        <a:p>
+          <a:endParaRPr lang="en-IE"/>
+        </a:p>
+      </dgm:t>
+    </dgm:pt>
+    <dgm:pt modelId="{BB22690F-DBAE-47FB-B9B4-A8414C4132DA}">
+      <dgm:prSet phldrT="[Text]" phldr="0"/>
+      <dgm:spPr/>
+      <dgm:t>
+        <a:bodyPr/>
+        <a:lstStyle/>
+        <a:p>
+          <a:r>
+            <a:rPr lang="en-GB" dirty="0"/>
+            <a:t>Part 2: Deployed to Cloud</a:t>
+          </a:r>
+          <a:endParaRPr lang="en-IE" dirty="0"/>
+        </a:p>
+      </dgm:t>
+    </dgm:pt>
+    <dgm:pt modelId="{C43F0C73-7AF4-4D06-A7BD-0EFE37A9D094}" type="parTrans" cxnId="{4FC77C08-CC23-4A53-8CD1-B2DB23A01F19}">
+      <dgm:prSet/>
+      <dgm:spPr/>
+      <dgm:t>
+        <a:bodyPr/>
+        <a:lstStyle/>
+        <a:p>
+          <a:endParaRPr lang="en-IE"/>
+        </a:p>
+      </dgm:t>
+    </dgm:pt>
+    <dgm:pt modelId="{F3FFA1E4-611B-4D66-A439-855F37811470}" type="sibTrans" cxnId="{4FC77C08-CC23-4A53-8CD1-B2DB23A01F19}">
+      <dgm:prSet/>
+      <dgm:spPr/>
+      <dgm:t>
+        <a:bodyPr/>
+        <a:lstStyle/>
+        <a:p>
+          <a:endParaRPr lang="en-IE"/>
+        </a:p>
+      </dgm:t>
+    </dgm:pt>
+    <dgm:pt modelId="{29F508D7-C93D-4D80-B944-A075DD7B9391}">
+      <dgm:prSet phldrT="[Text]" phldr="0"/>
+      <dgm:spPr/>
+      <dgm:t>
+        <a:bodyPr/>
+        <a:lstStyle/>
+        <a:p>
+          <a:r>
+            <a:rPr lang="en-GB" dirty="0"/>
+            <a:t>Part 3: Event Driven</a:t>
+          </a:r>
+          <a:endParaRPr lang="en-IE" dirty="0"/>
+        </a:p>
+      </dgm:t>
+    </dgm:pt>
+    <dgm:pt modelId="{4DAB0CE5-B1E0-4815-BF58-80AB481D6D0F}" type="parTrans" cxnId="{6D7681B1-91BA-49D5-8E53-489846C04302}">
+      <dgm:prSet/>
+      <dgm:spPr/>
+      <dgm:t>
+        <a:bodyPr/>
+        <a:lstStyle/>
+        <a:p>
+          <a:endParaRPr lang="en-IE"/>
+        </a:p>
+      </dgm:t>
+    </dgm:pt>
+    <dgm:pt modelId="{48C6DDDE-DA47-4B3C-9C3A-84A9ED9BE244}" type="sibTrans" cxnId="{6D7681B1-91BA-49D5-8E53-489846C04302}">
+      <dgm:prSet/>
+      <dgm:spPr/>
+      <dgm:t>
+        <a:bodyPr/>
+        <a:lstStyle/>
+        <a:p>
+          <a:endParaRPr lang="en-IE"/>
+        </a:p>
+      </dgm:t>
+    </dgm:pt>
+    <dgm:pt modelId="{39E6831F-5356-4F6C-B032-8D78D9829915}">
+      <dgm:prSet/>
+      <dgm:spPr/>
+      <dgm:t>
+        <a:bodyPr/>
+        <a:lstStyle/>
+        <a:p>
+          <a:pPr>
+            <a:buFont typeface="Arial" panose="020B0604020202020204" pitchFamily="34" charset="0"/>
+            <a:buChar char="•"/>
+          </a:pPr>
+          <a:r>
+            <a:rPr lang="en-GB" b="0" i="0" dirty="0"/>
+            <a:t>Press the </a:t>
+          </a:r>
+          <a:r>
+            <a:rPr lang="en-GB" b="1" i="0" dirty="0"/>
+            <a:t>Button</a:t>
+          </a:r>
+          <a:endParaRPr lang="en-IE" dirty="0"/>
+        </a:p>
+      </dgm:t>
+    </dgm:pt>
+    <dgm:pt modelId="{53DDE2C2-4491-43DE-819A-44B0EF8B5EAF}" type="parTrans" cxnId="{1E5BA0C0-606E-4C15-A50C-E09D65AF1B48}">
+      <dgm:prSet/>
+      <dgm:spPr/>
+      <dgm:t>
+        <a:bodyPr/>
+        <a:lstStyle/>
+        <a:p>
+          <a:endParaRPr lang="en-IE"/>
+        </a:p>
+      </dgm:t>
+    </dgm:pt>
+    <dgm:pt modelId="{8C544B24-AD9A-45A9-8EE0-DBC144D50A72}" type="sibTrans" cxnId="{1E5BA0C0-606E-4C15-A50C-E09D65AF1B48}">
+      <dgm:prSet/>
+      <dgm:spPr/>
+      <dgm:t>
+        <a:bodyPr/>
+        <a:lstStyle/>
+        <a:p>
+          <a:endParaRPr lang="en-IE"/>
+        </a:p>
+      </dgm:t>
+    </dgm:pt>
+    <dgm:pt modelId="{9CE14B7E-A201-46AD-8801-67B88CBDA3D9}">
+      <dgm:prSet/>
+      <dgm:spPr/>
+      <dgm:t>
+        <a:bodyPr/>
+        <a:lstStyle/>
+        <a:p>
+          <a:pPr>
+            <a:buFont typeface="Arial" panose="020B0604020202020204" pitchFamily="34" charset="0"/>
+            <a:buChar char="•"/>
+          </a:pPr>
+          <a:r>
+            <a:rPr lang="en-IE" b="0" i="0" dirty="0"/>
+            <a:t>capture a photo</a:t>
+          </a:r>
+          <a:endParaRPr lang="en-IE" dirty="0"/>
+        </a:p>
+      </dgm:t>
+    </dgm:pt>
+    <dgm:pt modelId="{428F92B8-AD68-42C6-9CAC-8200830B5F93}" type="parTrans" cxnId="{56A45F7C-C313-4120-ACB7-BB3C3310C33E}">
+      <dgm:prSet/>
+      <dgm:spPr/>
+      <dgm:t>
+        <a:bodyPr/>
+        <a:lstStyle/>
+        <a:p>
+          <a:endParaRPr lang="en-IE"/>
+        </a:p>
+      </dgm:t>
+    </dgm:pt>
+    <dgm:pt modelId="{3ECD2ED3-E28F-48ED-8607-77B10415D648}" type="sibTrans" cxnId="{56A45F7C-C313-4120-ACB7-BB3C3310C33E}">
+      <dgm:prSet/>
+      <dgm:spPr/>
+      <dgm:t>
+        <a:bodyPr/>
+        <a:lstStyle/>
+        <a:p>
+          <a:endParaRPr lang="en-IE"/>
+        </a:p>
+      </dgm:t>
+    </dgm:pt>
+    <dgm:pt modelId="{73D6E33B-5100-4887-AE5C-1825209409C7}">
+      <dgm:prSet/>
+      <dgm:spPr/>
+      <dgm:t>
+        <a:bodyPr/>
+        <a:lstStyle/>
+        <a:p>
+          <a:pPr>
+            <a:buFont typeface="Arial" panose="020B0604020202020204" pitchFamily="34" charset="0"/>
+            <a:buChar char="•"/>
+          </a:pPr>
+          <a:r>
+            <a:rPr lang="en-GB" dirty="0"/>
+            <a:t>Saves Event data</a:t>
+          </a:r>
+          <a:endParaRPr lang="en-IE" dirty="0"/>
+        </a:p>
+      </dgm:t>
+    </dgm:pt>
+    <dgm:pt modelId="{D7901254-6A09-4665-A47E-67DAFC9671A8}" type="parTrans" cxnId="{A5A87B72-5906-4D55-9D62-7B95AD56CEA5}">
+      <dgm:prSet/>
+      <dgm:spPr/>
+      <dgm:t>
+        <a:bodyPr/>
+        <a:lstStyle/>
+        <a:p>
+          <a:endParaRPr lang="en-IE"/>
+        </a:p>
+      </dgm:t>
+    </dgm:pt>
+    <dgm:pt modelId="{C9BA6C43-2A62-4529-B20C-48881C53C4B7}" type="sibTrans" cxnId="{A5A87B72-5906-4D55-9D62-7B95AD56CEA5}">
+      <dgm:prSet/>
+      <dgm:spPr/>
+      <dgm:t>
+        <a:bodyPr/>
+        <a:lstStyle/>
+        <a:p>
+          <a:endParaRPr lang="en-IE"/>
+        </a:p>
+      </dgm:t>
+    </dgm:pt>
+    <dgm:pt modelId="{F78BA07E-E53A-4CCA-962C-3E898AF851BB}">
+      <dgm:prSet/>
+      <dgm:spPr/>
+      <dgm:t>
+        <a:bodyPr/>
+        <a:lstStyle/>
+        <a:p>
+          <a:r>
+            <a:rPr lang="en-GB" dirty="0"/>
+            <a:t>Saves photo to cloud</a:t>
+          </a:r>
+          <a:endParaRPr lang="en-IE" dirty="0"/>
+        </a:p>
+      </dgm:t>
+    </dgm:pt>
+    <dgm:pt modelId="{9093A21B-6AF3-4EA3-A7B2-206C41689BC1}" type="parTrans" cxnId="{8E6238B4-F496-4E61-9655-2ADCE4F31D96}">
+      <dgm:prSet/>
+      <dgm:spPr/>
+      <dgm:t>
+        <a:bodyPr/>
+        <a:lstStyle/>
+        <a:p>
+          <a:endParaRPr lang="en-IE"/>
+        </a:p>
+      </dgm:t>
+    </dgm:pt>
+    <dgm:pt modelId="{571F8BD3-A20E-4316-BF10-1BEB69072751}" type="sibTrans" cxnId="{8E6238B4-F496-4E61-9655-2ADCE4F31D96}">
+      <dgm:prSet/>
+      <dgm:spPr/>
+      <dgm:t>
+        <a:bodyPr/>
+        <a:lstStyle/>
+        <a:p>
+          <a:endParaRPr lang="en-IE"/>
+        </a:p>
+      </dgm:t>
+    </dgm:pt>
+    <dgm:pt modelId="{3E82D1C5-2957-4884-959D-4A10C493F104}">
+      <dgm:prSet/>
+      <dgm:spPr/>
+      <dgm:t>
+        <a:bodyPr/>
+        <a:lstStyle/>
+        <a:p>
+          <a:r>
+            <a:rPr lang="en-GB" dirty="0"/>
+            <a:t>Can view last visitor on App deployed to hosting platform</a:t>
+          </a:r>
+          <a:endParaRPr lang="en-IE" dirty="0"/>
+        </a:p>
+      </dgm:t>
+    </dgm:pt>
+    <dgm:pt modelId="{E15AC97D-D10F-4E8B-8FCF-4EA95C1571DC}" type="parTrans" cxnId="{0FE0CC85-6B4A-4F62-B710-4FD14CA1EF30}">
+      <dgm:prSet/>
+      <dgm:spPr/>
+      <dgm:t>
+        <a:bodyPr/>
+        <a:lstStyle/>
+        <a:p>
+          <a:endParaRPr lang="en-IE"/>
+        </a:p>
+      </dgm:t>
+    </dgm:pt>
+    <dgm:pt modelId="{754C7C6B-C34A-4BCF-AC35-16CDD9070CFC}" type="sibTrans" cxnId="{0FE0CC85-6B4A-4F62-B710-4FD14CA1EF30}">
+      <dgm:prSet/>
+      <dgm:spPr/>
+      <dgm:t>
+        <a:bodyPr/>
+        <a:lstStyle/>
+        <a:p>
+          <a:endParaRPr lang="en-IE"/>
+        </a:p>
+      </dgm:t>
+    </dgm:pt>
+    <dgm:pt modelId="{514D2634-32E3-4992-A3D0-7EAC6550BA3C}">
+      <dgm:prSet/>
+      <dgm:spPr/>
+      <dgm:t>
+        <a:bodyPr/>
+        <a:lstStyle/>
+        <a:p>
+          <a:r>
+            <a:rPr lang="en-GB" dirty="0" err="1"/>
+            <a:t>Rpi</a:t>
+          </a:r>
+          <a:r>
+            <a:rPr lang="en-GB" dirty="0"/>
+            <a:t> publishes event data to Message Broker</a:t>
+          </a:r>
+          <a:endParaRPr lang="en-IE" dirty="0"/>
+        </a:p>
+      </dgm:t>
+    </dgm:pt>
+    <dgm:pt modelId="{7348A3F1-D63A-4362-AE29-F2A858B4BCB0}" type="parTrans" cxnId="{9F0E39F8-4423-4ECF-9C8F-09A3070567EE}">
+      <dgm:prSet/>
+      <dgm:spPr/>
+      <dgm:t>
+        <a:bodyPr/>
+        <a:lstStyle/>
+        <a:p>
+          <a:endParaRPr lang="en-IE"/>
+        </a:p>
+      </dgm:t>
+    </dgm:pt>
+    <dgm:pt modelId="{798A5A1C-92D6-4EEB-9234-11363908A368}" type="sibTrans" cxnId="{9F0E39F8-4423-4ECF-9C8F-09A3070567EE}">
+      <dgm:prSet/>
+      <dgm:spPr/>
+      <dgm:t>
+        <a:bodyPr/>
+        <a:lstStyle/>
+        <a:p>
+          <a:endParaRPr lang="en-IE"/>
+        </a:p>
+      </dgm:t>
+    </dgm:pt>
+    <dgm:pt modelId="{D137508D-DE69-43D9-B91D-39A6B700D7AC}">
+      <dgm:prSet/>
+      <dgm:spPr/>
+      <dgm:t>
+        <a:bodyPr/>
+        <a:lstStyle/>
+        <a:p>
+          <a:r>
+            <a:rPr lang="en-GB" dirty="0"/>
+            <a:t> Deployed app </a:t>
+          </a:r>
+          <a:r>
+            <a:rPr lang="en-GB" dirty="0" err="1"/>
+            <a:t>subscibes</a:t>
+          </a:r>
+          <a:r>
+            <a:rPr lang="en-GB" dirty="0"/>
+            <a:t> to Broker</a:t>
+          </a:r>
+          <a:endParaRPr lang="en-IE" dirty="0"/>
+        </a:p>
+      </dgm:t>
+    </dgm:pt>
+    <dgm:pt modelId="{8DB2CD36-D107-44EE-A8ED-E80C38E35FD8}" type="parTrans" cxnId="{949B0723-588C-4E77-B451-C51D7F85C65E}">
+      <dgm:prSet/>
+      <dgm:spPr/>
+      <dgm:t>
+        <a:bodyPr/>
+        <a:lstStyle/>
+        <a:p>
+          <a:endParaRPr lang="en-IE"/>
+        </a:p>
+      </dgm:t>
+    </dgm:pt>
+    <dgm:pt modelId="{4F76D0E1-1DEB-4213-B99E-70225B27BE89}" type="sibTrans" cxnId="{949B0723-588C-4E77-B451-C51D7F85C65E}">
+      <dgm:prSet/>
+      <dgm:spPr/>
+      <dgm:t>
+        <a:bodyPr/>
+        <a:lstStyle/>
+        <a:p>
+          <a:endParaRPr lang="en-IE"/>
+        </a:p>
+      </dgm:t>
+    </dgm:pt>
+    <dgm:pt modelId="{16948C04-E040-426A-A099-8A69D3976B03}" type="pres">
+      <dgm:prSet presAssocID="{70BE38BA-9720-4649-B89B-DC2FDA4D0662}" presName="linearFlow" presStyleCnt="0">
+        <dgm:presLayoutVars>
+          <dgm:dir/>
+          <dgm:animLvl val="lvl"/>
+          <dgm:resizeHandles val="exact"/>
+        </dgm:presLayoutVars>
+      </dgm:prSet>
+      <dgm:spPr/>
+    </dgm:pt>
+    <dgm:pt modelId="{79928042-CCEF-4607-932E-BBB2C3F535DD}" type="pres">
+      <dgm:prSet presAssocID="{36F41769-C211-4FAA-8968-622273B0D287}" presName="composite" presStyleCnt="0"/>
+      <dgm:spPr/>
+    </dgm:pt>
+    <dgm:pt modelId="{D92444E0-9D80-491B-8005-A53FE1CCF9EB}" type="pres">
+      <dgm:prSet presAssocID="{36F41769-C211-4FAA-8968-622273B0D287}" presName="parTx" presStyleLbl="node1" presStyleIdx="0" presStyleCnt="3">
+        <dgm:presLayoutVars>
+          <dgm:chMax val="0"/>
+          <dgm:chPref val="0"/>
+          <dgm:bulletEnabled val="1"/>
+        </dgm:presLayoutVars>
+      </dgm:prSet>
+      <dgm:spPr/>
+    </dgm:pt>
+    <dgm:pt modelId="{B76DDF6B-E239-4ADB-B567-DDC91827FC2B}" type="pres">
+      <dgm:prSet presAssocID="{36F41769-C211-4FAA-8968-622273B0D287}" presName="parSh" presStyleLbl="node1" presStyleIdx="0" presStyleCnt="3"/>
+      <dgm:spPr/>
+    </dgm:pt>
+    <dgm:pt modelId="{C364250F-339B-4830-BA06-65AE85AEDE09}" type="pres">
+      <dgm:prSet presAssocID="{36F41769-C211-4FAA-8968-622273B0D287}" presName="desTx" presStyleLbl="fgAcc1" presStyleIdx="0" presStyleCnt="3" custScaleX="124954">
+        <dgm:presLayoutVars>
+          <dgm:bulletEnabled val="1"/>
+        </dgm:presLayoutVars>
+      </dgm:prSet>
+      <dgm:spPr/>
+    </dgm:pt>
+    <dgm:pt modelId="{FEBF097F-A45D-4177-BA5B-34716002641C}" type="pres">
+      <dgm:prSet presAssocID="{1CC0F81A-5828-4851-B325-4A3346A1E96F}" presName="sibTrans" presStyleLbl="sibTrans2D1" presStyleIdx="0" presStyleCnt="2"/>
+      <dgm:spPr/>
+    </dgm:pt>
+    <dgm:pt modelId="{5D5834DB-8355-4463-BA0D-BF1CEDB08969}" type="pres">
+      <dgm:prSet presAssocID="{1CC0F81A-5828-4851-B325-4A3346A1E96F}" presName="connTx" presStyleLbl="sibTrans2D1" presStyleIdx="0" presStyleCnt="2"/>
+      <dgm:spPr/>
+    </dgm:pt>
+    <dgm:pt modelId="{AFA69BDC-CBA3-40D1-982E-D4638C7778B1}" type="pres">
+      <dgm:prSet presAssocID="{BB22690F-DBAE-47FB-B9B4-A8414C4132DA}" presName="composite" presStyleCnt="0"/>
+      <dgm:spPr/>
+    </dgm:pt>
+    <dgm:pt modelId="{432FC985-F9BD-47C1-963E-0510EE55D903}" type="pres">
+      <dgm:prSet presAssocID="{BB22690F-DBAE-47FB-B9B4-A8414C4132DA}" presName="parTx" presStyleLbl="node1" presStyleIdx="0" presStyleCnt="3">
+        <dgm:presLayoutVars>
+          <dgm:chMax val="0"/>
+          <dgm:chPref val="0"/>
+          <dgm:bulletEnabled val="1"/>
+        </dgm:presLayoutVars>
+      </dgm:prSet>
+      <dgm:spPr/>
+    </dgm:pt>
+    <dgm:pt modelId="{B406980F-7C33-4F41-9903-3C3E56A5E851}" type="pres">
+      <dgm:prSet presAssocID="{BB22690F-DBAE-47FB-B9B4-A8414C4132DA}" presName="parSh" presStyleLbl="node1" presStyleIdx="1" presStyleCnt="3"/>
+      <dgm:spPr/>
+    </dgm:pt>
+    <dgm:pt modelId="{6D861FB8-EB67-4826-9F94-21A22604FC81}" type="pres">
+      <dgm:prSet presAssocID="{BB22690F-DBAE-47FB-B9B4-A8414C4132DA}" presName="desTx" presStyleLbl="fgAcc1" presStyleIdx="1" presStyleCnt="3" custScaleX="120520">
+        <dgm:presLayoutVars>
+          <dgm:bulletEnabled val="1"/>
+        </dgm:presLayoutVars>
+      </dgm:prSet>
+      <dgm:spPr/>
+    </dgm:pt>
+    <dgm:pt modelId="{F5015279-0E80-48CE-BB3C-84E311D73487}" type="pres">
+      <dgm:prSet presAssocID="{F3FFA1E4-611B-4D66-A439-855F37811470}" presName="sibTrans" presStyleLbl="sibTrans2D1" presStyleIdx="1" presStyleCnt="2"/>
+      <dgm:spPr/>
+    </dgm:pt>
+    <dgm:pt modelId="{D1F6CEF1-10EB-41CD-B63F-D20FF4B02760}" type="pres">
+      <dgm:prSet presAssocID="{F3FFA1E4-611B-4D66-A439-855F37811470}" presName="connTx" presStyleLbl="sibTrans2D1" presStyleIdx="1" presStyleCnt="2"/>
+      <dgm:spPr/>
+    </dgm:pt>
+    <dgm:pt modelId="{63920F19-CBF2-4AB7-8CA8-620CA123098F}" type="pres">
+      <dgm:prSet presAssocID="{29F508D7-C93D-4D80-B944-A075DD7B9391}" presName="composite" presStyleCnt="0"/>
+      <dgm:spPr/>
+    </dgm:pt>
+    <dgm:pt modelId="{932268D2-1C4A-4966-B51B-584703E83940}" type="pres">
+      <dgm:prSet presAssocID="{29F508D7-C93D-4D80-B944-A075DD7B9391}" presName="parTx" presStyleLbl="node1" presStyleIdx="1" presStyleCnt="3">
+        <dgm:presLayoutVars>
+          <dgm:chMax val="0"/>
+          <dgm:chPref val="0"/>
+          <dgm:bulletEnabled val="1"/>
+        </dgm:presLayoutVars>
+      </dgm:prSet>
+      <dgm:spPr/>
+    </dgm:pt>
+    <dgm:pt modelId="{1E59154B-8A20-4D6B-9E68-B6FB15FE88C5}" type="pres">
+      <dgm:prSet presAssocID="{29F508D7-C93D-4D80-B944-A075DD7B9391}" presName="parSh" presStyleLbl="node1" presStyleIdx="2" presStyleCnt="3"/>
+      <dgm:spPr/>
+    </dgm:pt>
+    <dgm:pt modelId="{749122D7-474D-4389-98D9-0CF7D8087194}" type="pres">
+      <dgm:prSet presAssocID="{29F508D7-C93D-4D80-B944-A075DD7B9391}" presName="desTx" presStyleLbl="fgAcc1" presStyleIdx="2" presStyleCnt="3" custScaleX="143515">
+        <dgm:presLayoutVars>
+          <dgm:bulletEnabled val="1"/>
+        </dgm:presLayoutVars>
+      </dgm:prSet>
+      <dgm:spPr/>
+    </dgm:pt>
+  </dgm:ptLst>
+  <dgm:cxnLst>
+    <dgm:cxn modelId="{FB69B004-02D4-4EB9-9673-826DE2D5D1B2}" type="presOf" srcId="{D137508D-DE69-43D9-B91D-39A6B700D7AC}" destId="{749122D7-474D-4389-98D9-0CF7D8087194}" srcOrd="0" destOrd="1" presId="urn:microsoft.com/office/officeart/2005/8/layout/process3"/>
+    <dgm:cxn modelId="{4FC77C08-CC23-4A53-8CD1-B2DB23A01F19}" srcId="{70BE38BA-9720-4649-B89B-DC2FDA4D0662}" destId="{BB22690F-DBAE-47FB-B9B4-A8414C4132DA}" srcOrd="1" destOrd="0" parTransId="{C43F0C73-7AF4-4D06-A7BD-0EFE37A9D094}" sibTransId="{F3FFA1E4-611B-4D66-A439-855F37811470}"/>
+    <dgm:cxn modelId="{FB7CCD0F-4D60-4EED-B059-7E2451313F70}" type="presOf" srcId="{73D6E33B-5100-4887-AE5C-1825209409C7}" destId="{C364250F-339B-4830-BA06-65AE85AEDE09}" srcOrd="0" destOrd="2" presId="urn:microsoft.com/office/officeart/2005/8/layout/process3"/>
+    <dgm:cxn modelId="{E5DAA111-4775-47D0-8D6D-BBF09F1D982B}" type="presOf" srcId="{3E82D1C5-2957-4884-959D-4A10C493F104}" destId="{6D861FB8-EB67-4826-9F94-21A22604FC81}" srcOrd="0" destOrd="1" presId="urn:microsoft.com/office/officeart/2005/8/layout/process3"/>
+    <dgm:cxn modelId="{CD17A31B-D5B6-4B94-B72E-1A0564906A38}" srcId="{70BE38BA-9720-4649-B89B-DC2FDA4D0662}" destId="{36F41769-C211-4FAA-8968-622273B0D287}" srcOrd="0" destOrd="0" parTransId="{06707697-C68C-43A1-BA76-016D9E1BDE30}" sibTransId="{1CC0F81A-5828-4851-B325-4A3346A1E96F}"/>
+    <dgm:cxn modelId="{949B0723-588C-4E77-B451-C51D7F85C65E}" srcId="{29F508D7-C93D-4D80-B944-A075DD7B9391}" destId="{D137508D-DE69-43D9-B91D-39A6B700D7AC}" srcOrd="1" destOrd="0" parTransId="{8DB2CD36-D107-44EE-A8ED-E80C38E35FD8}" sibTransId="{4F76D0E1-1DEB-4213-B99E-70225B27BE89}"/>
+    <dgm:cxn modelId="{919A0E25-58DE-47FE-A765-C341A13C9AE1}" type="presOf" srcId="{29F508D7-C93D-4D80-B944-A075DD7B9391}" destId="{1E59154B-8A20-4D6B-9E68-B6FB15FE88C5}" srcOrd="1" destOrd="0" presId="urn:microsoft.com/office/officeart/2005/8/layout/process3"/>
+    <dgm:cxn modelId="{FF03F169-4C4D-4BD8-A237-564A77007B1C}" type="presOf" srcId="{9CE14B7E-A201-46AD-8801-67B88CBDA3D9}" destId="{C364250F-339B-4830-BA06-65AE85AEDE09}" srcOrd="0" destOrd="1" presId="urn:microsoft.com/office/officeart/2005/8/layout/process3"/>
+    <dgm:cxn modelId="{3DB92771-F175-4318-AA64-B4E07E6E5CDC}" type="presOf" srcId="{1CC0F81A-5828-4851-B325-4A3346A1E96F}" destId="{5D5834DB-8355-4463-BA0D-BF1CEDB08969}" srcOrd="1" destOrd="0" presId="urn:microsoft.com/office/officeart/2005/8/layout/process3"/>
+    <dgm:cxn modelId="{A5A87B72-5906-4D55-9D62-7B95AD56CEA5}" srcId="{36F41769-C211-4FAA-8968-622273B0D287}" destId="{73D6E33B-5100-4887-AE5C-1825209409C7}" srcOrd="2" destOrd="0" parTransId="{D7901254-6A09-4665-A47E-67DAFC9671A8}" sibTransId="{C9BA6C43-2A62-4529-B20C-48881C53C4B7}"/>
+    <dgm:cxn modelId="{6F951876-B538-4AE2-BEEA-C6ECA84E0B8B}" type="presOf" srcId="{BB22690F-DBAE-47FB-B9B4-A8414C4132DA}" destId="{B406980F-7C33-4F41-9903-3C3E56A5E851}" srcOrd="1" destOrd="0" presId="urn:microsoft.com/office/officeart/2005/8/layout/process3"/>
+    <dgm:cxn modelId="{56A45F7C-C313-4120-ACB7-BB3C3310C33E}" srcId="{36F41769-C211-4FAA-8968-622273B0D287}" destId="{9CE14B7E-A201-46AD-8801-67B88CBDA3D9}" srcOrd="1" destOrd="0" parTransId="{428F92B8-AD68-42C6-9CAC-8200830B5F93}" sibTransId="{3ECD2ED3-E28F-48ED-8607-77B10415D648}"/>
+    <dgm:cxn modelId="{0AA27D81-FD9F-471D-A146-63509D52DB82}" type="presOf" srcId="{F78BA07E-E53A-4CCA-962C-3E898AF851BB}" destId="{6D861FB8-EB67-4826-9F94-21A22604FC81}" srcOrd="0" destOrd="0" presId="urn:microsoft.com/office/officeart/2005/8/layout/process3"/>
+    <dgm:cxn modelId="{0FE0CC85-6B4A-4F62-B710-4FD14CA1EF30}" srcId="{BB22690F-DBAE-47FB-B9B4-A8414C4132DA}" destId="{3E82D1C5-2957-4884-959D-4A10C493F104}" srcOrd="1" destOrd="0" parTransId="{E15AC97D-D10F-4E8B-8FCF-4EA95C1571DC}" sibTransId="{754C7C6B-C34A-4BCF-AC35-16CDD9070CFC}"/>
+    <dgm:cxn modelId="{12C0B08E-4DF4-453A-944A-425D4A6E3E08}" type="presOf" srcId="{70BE38BA-9720-4649-B89B-DC2FDA4D0662}" destId="{16948C04-E040-426A-A099-8A69D3976B03}" srcOrd="0" destOrd="0" presId="urn:microsoft.com/office/officeart/2005/8/layout/process3"/>
+    <dgm:cxn modelId="{43DAA091-BCBB-4269-A8A9-AF839A3B6EE0}" type="presOf" srcId="{36F41769-C211-4FAA-8968-622273B0D287}" destId="{B76DDF6B-E239-4ADB-B567-DDC91827FC2B}" srcOrd="1" destOrd="0" presId="urn:microsoft.com/office/officeart/2005/8/layout/process3"/>
+    <dgm:cxn modelId="{4BE61B97-C402-4B78-B705-82091BD9F36A}" type="presOf" srcId="{F3FFA1E4-611B-4D66-A439-855F37811470}" destId="{F5015279-0E80-48CE-BB3C-84E311D73487}" srcOrd="0" destOrd="0" presId="urn:microsoft.com/office/officeart/2005/8/layout/process3"/>
+    <dgm:cxn modelId="{DAA9A7A6-228A-47EF-A511-FBA9DF17CCE3}" type="presOf" srcId="{39E6831F-5356-4F6C-B032-8D78D9829915}" destId="{C364250F-339B-4830-BA06-65AE85AEDE09}" srcOrd="0" destOrd="0" presId="urn:microsoft.com/office/officeart/2005/8/layout/process3"/>
+    <dgm:cxn modelId="{B3EC2BB1-9A74-406C-952F-7E29FCFB9889}" type="presOf" srcId="{BB22690F-DBAE-47FB-B9B4-A8414C4132DA}" destId="{432FC985-F9BD-47C1-963E-0510EE55D903}" srcOrd="0" destOrd="0" presId="urn:microsoft.com/office/officeart/2005/8/layout/process3"/>
+    <dgm:cxn modelId="{6D7681B1-91BA-49D5-8E53-489846C04302}" srcId="{70BE38BA-9720-4649-B89B-DC2FDA4D0662}" destId="{29F508D7-C93D-4D80-B944-A075DD7B9391}" srcOrd="2" destOrd="0" parTransId="{4DAB0CE5-B1E0-4815-BF58-80AB481D6D0F}" sibTransId="{48C6DDDE-DA47-4B3C-9C3A-84A9ED9BE244}"/>
+    <dgm:cxn modelId="{8E6238B4-F496-4E61-9655-2ADCE4F31D96}" srcId="{BB22690F-DBAE-47FB-B9B4-A8414C4132DA}" destId="{F78BA07E-E53A-4CCA-962C-3E898AF851BB}" srcOrd="0" destOrd="0" parTransId="{9093A21B-6AF3-4EA3-A7B2-206C41689BC1}" sibTransId="{571F8BD3-A20E-4316-BF10-1BEB69072751}"/>
+    <dgm:cxn modelId="{8BFD36BB-F461-4658-A2EF-E4AC0AA8642C}" type="presOf" srcId="{29F508D7-C93D-4D80-B944-A075DD7B9391}" destId="{932268D2-1C4A-4966-B51B-584703E83940}" srcOrd="0" destOrd="0" presId="urn:microsoft.com/office/officeart/2005/8/layout/process3"/>
+    <dgm:cxn modelId="{1E5BA0C0-606E-4C15-A50C-E09D65AF1B48}" srcId="{36F41769-C211-4FAA-8968-622273B0D287}" destId="{39E6831F-5356-4F6C-B032-8D78D9829915}" srcOrd="0" destOrd="0" parTransId="{53DDE2C2-4491-43DE-819A-44B0EF8B5EAF}" sibTransId="{8C544B24-AD9A-45A9-8EE0-DBC144D50A72}"/>
+    <dgm:cxn modelId="{C244A3C5-E703-4F88-A4F0-AEEEBD758466}" type="presOf" srcId="{1CC0F81A-5828-4851-B325-4A3346A1E96F}" destId="{FEBF097F-A45D-4177-BA5B-34716002641C}" srcOrd="0" destOrd="0" presId="urn:microsoft.com/office/officeart/2005/8/layout/process3"/>
+    <dgm:cxn modelId="{2B71BCD8-6BC7-46FC-9616-BE1BC84855F6}" type="presOf" srcId="{F3FFA1E4-611B-4D66-A439-855F37811470}" destId="{D1F6CEF1-10EB-41CD-B63F-D20FF4B02760}" srcOrd="1" destOrd="0" presId="urn:microsoft.com/office/officeart/2005/8/layout/process3"/>
+    <dgm:cxn modelId="{EE6F0EE8-DEFB-436E-9E99-6D59BEE4DC0C}" type="presOf" srcId="{36F41769-C211-4FAA-8968-622273B0D287}" destId="{D92444E0-9D80-491B-8005-A53FE1CCF9EB}" srcOrd="0" destOrd="0" presId="urn:microsoft.com/office/officeart/2005/8/layout/process3"/>
+    <dgm:cxn modelId="{9F0E39F8-4423-4ECF-9C8F-09A3070567EE}" srcId="{29F508D7-C93D-4D80-B944-A075DD7B9391}" destId="{514D2634-32E3-4992-A3D0-7EAC6550BA3C}" srcOrd="0" destOrd="0" parTransId="{7348A3F1-D63A-4362-AE29-F2A858B4BCB0}" sibTransId="{798A5A1C-92D6-4EEB-9234-11363908A368}"/>
+    <dgm:cxn modelId="{25AA56FD-5013-4FF3-BCCF-1C5E627288B4}" type="presOf" srcId="{514D2634-32E3-4992-A3D0-7EAC6550BA3C}" destId="{749122D7-474D-4389-98D9-0CF7D8087194}" srcOrd="0" destOrd="0" presId="urn:microsoft.com/office/officeart/2005/8/layout/process3"/>
+    <dgm:cxn modelId="{2CD4A817-099F-454B-B5E1-965808B53AA5}" type="presParOf" srcId="{16948C04-E040-426A-A099-8A69D3976B03}" destId="{79928042-CCEF-4607-932E-BBB2C3F535DD}" srcOrd="0" destOrd="0" presId="urn:microsoft.com/office/officeart/2005/8/layout/process3"/>
+    <dgm:cxn modelId="{9949B6AD-BB37-490D-BD6E-99251722BBED}" type="presParOf" srcId="{79928042-CCEF-4607-932E-BBB2C3F535DD}" destId="{D92444E0-9D80-491B-8005-A53FE1CCF9EB}" srcOrd="0" destOrd="0" presId="urn:microsoft.com/office/officeart/2005/8/layout/process3"/>
+    <dgm:cxn modelId="{3D1609E0-FF30-4F4A-8500-676301F6B072}" type="presParOf" srcId="{79928042-CCEF-4607-932E-BBB2C3F535DD}" destId="{B76DDF6B-E239-4ADB-B567-DDC91827FC2B}" srcOrd="1" destOrd="0" presId="urn:microsoft.com/office/officeart/2005/8/layout/process3"/>
+    <dgm:cxn modelId="{05F7982A-F9B3-4F3B-9E75-94CC281FF771}" type="presParOf" srcId="{79928042-CCEF-4607-932E-BBB2C3F535DD}" destId="{C364250F-339B-4830-BA06-65AE85AEDE09}" srcOrd="2" destOrd="0" presId="urn:microsoft.com/office/officeart/2005/8/layout/process3"/>
+    <dgm:cxn modelId="{2FF86DE3-3C73-473C-B5FF-84D3E251BBDA}" type="presParOf" srcId="{16948C04-E040-426A-A099-8A69D3976B03}" destId="{FEBF097F-A45D-4177-BA5B-34716002641C}" srcOrd="1" destOrd="0" presId="urn:microsoft.com/office/officeart/2005/8/layout/process3"/>
+    <dgm:cxn modelId="{BA9A682D-6320-48B1-9F9C-EB3284604DFF}" type="presParOf" srcId="{FEBF097F-A45D-4177-BA5B-34716002641C}" destId="{5D5834DB-8355-4463-BA0D-BF1CEDB08969}" srcOrd="0" destOrd="0" presId="urn:microsoft.com/office/officeart/2005/8/layout/process3"/>
+    <dgm:cxn modelId="{31BD9E1B-8D87-4AFF-A866-F779CAF5D2B9}" type="presParOf" srcId="{16948C04-E040-426A-A099-8A69D3976B03}" destId="{AFA69BDC-CBA3-40D1-982E-D4638C7778B1}" srcOrd="2" destOrd="0" presId="urn:microsoft.com/office/officeart/2005/8/layout/process3"/>
+    <dgm:cxn modelId="{8D62421E-0B6B-4825-A5E9-AC9A230B7655}" type="presParOf" srcId="{AFA69BDC-CBA3-40D1-982E-D4638C7778B1}" destId="{432FC985-F9BD-47C1-963E-0510EE55D903}" srcOrd="0" destOrd="0" presId="urn:microsoft.com/office/officeart/2005/8/layout/process3"/>
+    <dgm:cxn modelId="{9881A844-DD00-41B3-82CF-2E3183D6E309}" type="presParOf" srcId="{AFA69BDC-CBA3-40D1-982E-D4638C7778B1}" destId="{B406980F-7C33-4F41-9903-3C3E56A5E851}" srcOrd="1" destOrd="0" presId="urn:microsoft.com/office/officeart/2005/8/layout/process3"/>
+    <dgm:cxn modelId="{B19A392F-C7AA-4634-A078-910421BE3141}" type="presParOf" srcId="{AFA69BDC-CBA3-40D1-982E-D4638C7778B1}" destId="{6D861FB8-EB67-4826-9F94-21A22604FC81}" srcOrd="2" destOrd="0" presId="urn:microsoft.com/office/officeart/2005/8/layout/process3"/>
+    <dgm:cxn modelId="{4B6AFA4F-FB11-4CC9-B9C7-A11B0534B443}" type="presParOf" srcId="{16948C04-E040-426A-A099-8A69D3976B03}" destId="{F5015279-0E80-48CE-BB3C-84E311D73487}" srcOrd="3" destOrd="0" presId="urn:microsoft.com/office/officeart/2005/8/layout/process3"/>
+    <dgm:cxn modelId="{CCBCE215-0E9F-44F3-BCBF-1C1D379D5C1B}" type="presParOf" srcId="{F5015279-0E80-48CE-BB3C-84E311D73487}" destId="{D1F6CEF1-10EB-41CD-B63F-D20FF4B02760}" srcOrd="0" destOrd="0" presId="urn:microsoft.com/office/officeart/2005/8/layout/process3"/>
+    <dgm:cxn modelId="{89133471-CD8E-4B75-84EA-297A1608D63B}" type="presParOf" srcId="{16948C04-E040-426A-A099-8A69D3976B03}" destId="{63920F19-CBF2-4AB7-8CA8-620CA123098F}" srcOrd="4" destOrd="0" presId="urn:microsoft.com/office/officeart/2005/8/layout/process3"/>
+    <dgm:cxn modelId="{AE3A7E4A-C506-4593-B72B-F3007BC24903}" type="presParOf" srcId="{63920F19-CBF2-4AB7-8CA8-620CA123098F}" destId="{932268D2-1C4A-4966-B51B-584703E83940}" srcOrd="0" destOrd="0" presId="urn:microsoft.com/office/officeart/2005/8/layout/process3"/>
+    <dgm:cxn modelId="{27434228-DEE7-43FD-8796-6CC1AE0CBD4D}" type="presParOf" srcId="{63920F19-CBF2-4AB7-8CA8-620CA123098F}" destId="{1E59154B-8A20-4D6B-9E68-B6FB15FE88C5}" srcOrd="1" destOrd="0" presId="urn:microsoft.com/office/officeart/2005/8/layout/process3"/>
+    <dgm:cxn modelId="{AB07FB7C-288C-45C9-8702-464ECEC050C4}" type="presParOf" srcId="{63920F19-CBF2-4AB7-8CA8-620CA123098F}" destId="{749122D7-474D-4389-98D9-0CF7D8087194}" srcOrd="2" destOrd="0" presId="urn:microsoft.com/office/officeart/2005/8/layout/process3"/>
+  </dgm:cxnLst>
+  <dgm:bg/>
+  <dgm:whole/>
+  <dgm:extLst>
+    <a:ext uri="http://schemas.microsoft.com/office/drawing/2008/diagram">
+      <dsp:dataModelExt xmlns:dsp="http://schemas.microsoft.com/office/drawing/2008/diagram" relId="rId6" minVer="http://schemas.openxmlformats.org/drawingml/2006/diagram"/>
+    </a:ext>
+  </dgm:extLst>
+</dgm:dataModel>
+</file>
+
+<file path=ppt/diagrams/drawing1.xml><?xml version="1.0" encoding="utf-8"?>
+<dsp:drawing xmlns:dgm="http://schemas.openxmlformats.org/drawingml/2006/diagram" xmlns:dsp="http://schemas.microsoft.com/office/drawing/2008/diagram" xmlns:a="http://schemas.openxmlformats.org/drawingml/2006/main">
+  <dsp:spTree>
+    <dsp:nvGrpSpPr>
+      <dsp:cNvPr id="0" name=""/>
+      <dsp:cNvGrpSpPr/>
+    </dsp:nvGrpSpPr>
+    <dsp:grpSpPr/>
+    <dsp:sp modelId="{B76DDF6B-E239-4ADB-B567-DDC91827FC2B}">
+      <dsp:nvSpPr>
+        <dsp:cNvPr id="0" name=""/>
+        <dsp:cNvSpPr/>
+      </dsp:nvSpPr>
+      <dsp:spPr>
+        <a:xfrm>
+          <a:off x="1238" y="1107509"/>
+          <a:ext cx="2188507" cy="1236997"/>
+        </a:xfrm>
+        <a:prstGeom prst="roundRect">
+          <a:avLst>
+            <a:gd name="adj" fmla="val 10000"/>
+          </a:avLst>
+        </a:prstGeom>
+        <a:solidFill>
+          <a:schemeClr val="accent1">
+            <a:hueOff val="0"/>
+            <a:satOff val="0"/>
+            <a:lumOff val="0"/>
+            <a:alphaOff val="0"/>
+          </a:schemeClr>
+        </a:solidFill>
+        <a:ln w="19050" cap="flat" cmpd="sng" algn="ctr">
+          <a:solidFill>
+            <a:schemeClr val="lt1">
+              <a:hueOff val="0"/>
+              <a:satOff val="0"/>
+              <a:lumOff val="0"/>
+              <a:alphaOff val="0"/>
+            </a:schemeClr>
+          </a:solidFill>
+          <a:prstDash val="solid"/>
+          <a:miter lim="800000"/>
+        </a:ln>
+        <a:effectLst/>
+      </dsp:spPr>
+      <dsp:style>
+        <a:lnRef idx="2">
+          <a:scrgbClr r="0" g="0" b="0"/>
+        </a:lnRef>
+        <a:fillRef idx="1">
+          <a:scrgbClr r="0" g="0" b="0"/>
+        </a:fillRef>
+        <a:effectRef idx="0">
+          <a:scrgbClr r="0" g="0" b="0"/>
+        </a:effectRef>
+        <a:fontRef idx="minor">
+          <a:schemeClr val="lt1"/>
+        </a:fontRef>
+      </dsp:style>
+      <dsp:txBody>
+        <a:bodyPr spcFirstLastPara="0" vert="horz" wrap="square" lIns="149352" tIns="149352" rIns="149352" bIns="80010" numCol="1" spcCol="1270" anchor="t" anchorCtr="0">
+          <a:noAutofit/>
+        </a:bodyPr>
+        <a:lstStyle/>
+        <a:p>
+          <a:pPr marL="0" lvl="0" indent="0" algn="l" defTabSz="933450">
+            <a:lnSpc>
+              <a:spcPct val="90000"/>
+            </a:lnSpc>
+            <a:spcBef>
+              <a:spcPct val="0"/>
+            </a:spcBef>
+            <a:spcAft>
+              <a:spcPct val="35000"/>
+            </a:spcAft>
+            <a:buNone/>
+          </a:pPr>
+          <a:r>
+            <a:rPr lang="en-GB" sz="2100" kern="1200" dirty="0"/>
+            <a:t>Part 1: All on the </a:t>
+          </a:r>
+          <a:r>
+            <a:rPr lang="en-GB" sz="2100" kern="1200" dirty="0" err="1"/>
+            <a:t>Rpi</a:t>
+          </a:r>
+          <a:endParaRPr lang="en-GB" sz="2100" kern="1200" dirty="0"/>
+        </a:p>
+      </dsp:txBody>
+      <dsp:txXfrm>
+        <a:off x="1238" y="1107509"/>
+        <a:ext cx="2188507" cy="824665"/>
+      </dsp:txXfrm>
+    </dsp:sp>
+    <dsp:sp modelId="{C364250F-339B-4830-BA06-65AE85AEDE09}">
+      <dsp:nvSpPr>
+        <dsp:cNvPr id="0" name=""/>
+        <dsp:cNvSpPr/>
+      </dsp:nvSpPr>
+      <dsp:spPr>
+        <a:xfrm>
+          <a:off x="176426" y="1932174"/>
+          <a:ext cx="2734628" cy="3152460"/>
+        </a:xfrm>
+        <a:prstGeom prst="roundRect">
+          <a:avLst>
+            <a:gd name="adj" fmla="val 10000"/>
+          </a:avLst>
+        </a:prstGeom>
+        <a:solidFill>
+          <a:schemeClr val="lt1">
+            <a:alpha val="90000"/>
+            <a:hueOff val="0"/>
+            <a:satOff val="0"/>
+            <a:lumOff val="0"/>
+            <a:alphaOff val="0"/>
+          </a:schemeClr>
+        </a:solidFill>
+        <a:ln w="19050" cap="flat" cmpd="sng" algn="ctr">
+          <a:solidFill>
+            <a:schemeClr val="accent1">
+              <a:hueOff val="0"/>
+              <a:satOff val="0"/>
+              <a:lumOff val="0"/>
+              <a:alphaOff val="0"/>
+            </a:schemeClr>
+          </a:solidFill>
+          <a:prstDash val="solid"/>
+          <a:miter lim="800000"/>
+        </a:ln>
+        <a:effectLst/>
+      </dsp:spPr>
+      <dsp:style>
+        <a:lnRef idx="2">
+          <a:scrgbClr r="0" g="0" b="0"/>
+        </a:lnRef>
+        <a:fillRef idx="1">
+          <a:scrgbClr r="0" g="0" b="0"/>
+        </a:fillRef>
+        <a:effectRef idx="0">
+          <a:scrgbClr r="0" g="0" b="0"/>
+        </a:effectRef>
+        <a:fontRef idx="minor"/>
+      </dsp:style>
+      <dsp:txBody>
+        <a:bodyPr spcFirstLastPara="0" vert="horz" wrap="square" lIns="149352" tIns="149352" rIns="149352" bIns="149352" numCol="1" spcCol="1270" anchor="t" anchorCtr="0">
+          <a:noAutofit/>
+        </a:bodyPr>
+        <a:lstStyle/>
+        <a:p>
+          <a:pPr marL="228600" lvl="1" indent="-228600" algn="l" defTabSz="933450">
+            <a:lnSpc>
+              <a:spcPct val="90000"/>
+            </a:lnSpc>
+            <a:spcBef>
+              <a:spcPct val="0"/>
+            </a:spcBef>
+            <a:spcAft>
+              <a:spcPct val="15000"/>
+            </a:spcAft>
+            <a:buFont typeface="Arial" panose="020B0604020202020204" pitchFamily="34" charset="0"/>
+            <a:buChar char="•"/>
+          </a:pPr>
+          <a:r>
+            <a:rPr lang="en-GB" sz="2100" b="0" i="0" kern="1200" dirty="0"/>
+            <a:t>Press the </a:t>
+          </a:r>
+          <a:r>
+            <a:rPr lang="en-GB" sz="2100" b="1" i="0" kern="1200" dirty="0"/>
+            <a:t>Button</a:t>
+          </a:r>
+          <a:endParaRPr lang="en-IE" sz="2100" kern="1200" dirty="0"/>
+        </a:p>
+        <a:p>
+          <a:pPr marL="228600" lvl="1" indent="-228600" algn="l" defTabSz="933450">
+            <a:lnSpc>
+              <a:spcPct val="90000"/>
+            </a:lnSpc>
+            <a:spcBef>
+              <a:spcPct val="0"/>
+            </a:spcBef>
+            <a:spcAft>
+              <a:spcPct val="15000"/>
+            </a:spcAft>
+            <a:buFont typeface="Arial" panose="020B0604020202020204" pitchFamily="34" charset="0"/>
+            <a:buChar char="•"/>
+          </a:pPr>
+          <a:r>
+            <a:rPr lang="en-IE" sz="2100" b="0" i="0" kern="1200" dirty="0"/>
+            <a:t>capture a photo</a:t>
+          </a:r>
+          <a:endParaRPr lang="en-IE" sz="2100" kern="1200" dirty="0"/>
+        </a:p>
+        <a:p>
+          <a:pPr marL="228600" lvl="1" indent="-228600" algn="l" defTabSz="933450">
+            <a:lnSpc>
+              <a:spcPct val="90000"/>
+            </a:lnSpc>
+            <a:spcBef>
+              <a:spcPct val="0"/>
+            </a:spcBef>
+            <a:spcAft>
+              <a:spcPct val="15000"/>
+            </a:spcAft>
+            <a:buFont typeface="Arial" panose="020B0604020202020204" pitchFamily="34" charset="0"/>
+            <a:buChar char="•"/>
+          </a:pPr>
+          <a:r>
+            <a:rPr lang="en-GB" sz="2100" kern="1200" dirty="0"/>
+            <a:t>Saves Event data</a:t>
+          </a:r>
+          <a:endParaRPr lang="en-IE" sz="2100" kern="1200" dirty="0"/>
+        </a:p>
+      </dsp:txBody>
+      <dsp:txXfrm>
+        <a:off x="256521" y="2012269"/>
+        <a:ext cx="2574438" cy="2992270"/>
+      </dsp:txXfrm>
+    </dsp:sp>
+    <dsp:sp modelId="{FEBF097F-A45D-4177-BA5B-34716002641C}">
+      <dsp:nvSpPr>
+        <dsp:cNvPr id="0" name=""/>
+        <dsp:cNvSpPr/>
+      </dsp:nvSpPr>
+      <dsp:spPr>
+        <a:xfrm>
+          <a:off x="2589781" y="1247404"/>
+          <a:ext cx="848074" cy="544875"/>
+        </a:xfrm>
+        <a:prstGeom prst="rightArrow">
+          <a:avLst>
+            <a:gd name="adj1" fmla="val 60000"/>
+            <a:gd name="adj2" fmla="val 50000"/>
+          </a:avLst>
+        </a:prstGeom>
+        <a:solidFill>
+          <a:schemeClr val="accent1">
+            <a:tint val="60000"/>
+            <a:hueOff val="0"/>
+            <a:satOff val="0"/>
+            <a:lumOff val="0"/>
+            <a:alphaOff val="0"/>
+          </a:schemeClr>
+        </a:solidFill>
+        <a:ln>
+          <a:noFill/>
+        </a:ln>
+        <a:effectLst/>
+      </dsp:spPr>
+      <dsp:style>
+        <a:lnRef idx="0">
+          <a:scrgbClr r="0" g="0" b="0"/>
+        </a:lnRef>
+        <a:fillRef idx="1">
+          <a:scrgbClr r="0" g="0" b="0"/>
+        </a:fillRef>
+        <a:effectRef idx="0">
+          <a:scrgbClr r="0" g="0" b="0"/>
+        </a:effectRef>
+        <a:fontRef idx="minor">
+          <a:schemeClr val="lt1"/>
+        </a:fontRef>
+      </dsp:style>
+      <dsp:txBody>
+        <a:bodyPr spcFirstLastPara="0" vert="horz" wrap="square" lIns="0" tIns="0" rIns="0" bIns="0" numCol="1" spcCol="1270" anchor="ctr" anchorCtr="0">
+          <a:noAutofit/>
+        </a:bodyPr>
+        <a:lstStyle/>
+        <a:p>
+          <a:pPr marL="0" lvl="0" indent="0" algn="ctr" defTabSz="755650">
+            <a:lnSpc>
+              <a:spcPct val="90000"/>
+            </a:lnSpc>
+            <a:spcBef>
+              <a:spcPct val="0"/>
+            </a:spcBef>
+            <a:spcAft>
+              <a:spcPct val="35000"/>
+            </a:spcAft>
+            <a:buNone/>
+          </a:pPr>
+          <a:endParaRPr lang="en-IE" sz="1700" kern="1200"/>
+        </a:p>
+      </dsp:txBody>
+      <dsp:txXfrm>
+        <a:off x="2589781" y="1356379"/>
+        <a:ext cx="684612" cy="326925"/>
+      </dsp:txXfrm>
+    </dsp:sp>
+    <dsp:sp modelId="{B406980F-7C33-4F41-9903-3C3E56A5E851}">
+      <dsp:nvSpPr>
+        <dsp:cNvPr id="0" name=""/>
+        <dsp:cNvSpPr/>
+      </dsp:nvSpPr>
+      <dsp:spPr>
+        <a:xfrm>
+          <a:off x="3789885" y="1107509"/>
+          <a:ext cx="2188507" cy="1236997"/>
+        </a:xfrm>
+        <a:prstGeom prst="roundRect">
+          <a:avLst>
+            <a:gd name="adj" fmla="val 10000"/>
+          </a:avLst>
+        </a:prstGeom>
+        <a:solidFill>
+          <a:schemeClr val="accent1">
+            <a:hueOff val="0"/>
+            <a:satOff val="0"/>
+            <a:lumOff val="0"/>
+            <a:alphaOff val="0"/>
+          </a:schemeClr>
+        </a:solidFill>
+        <a:ln w="19050" cap="flat" cmpd="sng" algn="ctr">
+          <a:solidFill>
+            <a:schemeClr val="lt1">
+              <a:hueOff val="0"/>
+              <a:satOff val="0"/>
+              <a:lumOff val="0"/>
+              <a:alphaOff val="0"/>
+            </a:schemeClr>
+          </a:solidFill>
+          <a:prstDash val="solid"/>
+          <a:miter lim="800000"/>
+        </a:ln>
+        <a:effectLst/>
+      </dsp:spPr>
+      <dsp:style>
+        <a:lnRef idx="2">
+          <a:scrgbClr r="0" g="0" b="0"/>
+        </a:lnRef>
+        <a:fillRef idx="1">
+          <a:scrgbClr r="0" g="0" b="0"/>
+        </a:fillRef>
+        <a:effectRef idx="0">
+          <a:scrgbClr r="0" g="0" b="0"/>
+        </a:effectRef>
+        <a:fontRef idx="minor">
+          <a:schemeClr val="lt1"/>
+        </a:fontRef>
+      </dsp:style>
+      <dsp:txBody>
+        <a:bodyPr spcFirstLastPara="0" vert="horz" wrap="square" lIns="149352" tIns="149352" rIns="149352" bIns="80010" numCol="1" spcCol="1270" anchor="t" anchorCtr="0">
+          <a:noAutofit/>
+        </a:bodyPr>
+        <a:lstStyle/>
+        <a:p>
+          <a:pPr marL="0" lvl="0" indent="0" algn="l" defTabSz="933450">
+            <a:lnSpc>
+              <a:spcPct val="90000"/>
+            </a:lnSpc>
+            <a:spcBef>
+              <a:spcPct val="0"/>
+            </a:spcBef>
+            <a:spcAft>
+              <a:spcPct val="35000"/>
+            </a:spcAft>
+            <a:buNone/>
+          </a:pPr>
+          <a:r>
+            <a:rPr lang="en-GB" sz="2100" kern="1200" dirty="0"/>
+            <a:t>Part 2: Deployed to Cloud</a:t>
+          </a:r>
+          <a:endParaRPr lang="en-IE" sz="2100" kern="1200" dirty="0"/>
+        </a:p>
+      </dsp:txBody>
+      <dsp:txXfrm>
+        <a:off x="3789885" y="1107509"/>
+        <a:ext cx="2188507" cy="824665"/>
+      </dsp:txXfrm>
+    </dsp:sp>
+    <dsp:sp modelId="{6D861FB8-EB67-4826-9F94-21A22604FC81}">
+      <dsp:nvSpPr>
+        <dsp:cNvPr id="0" name=""/>
+        <dsp:cNvSpPr/>
+      </dsp:nvSpPr>
+      <dsp:spPr>
+        <a:xfrm>
+          <a:off x="4013593" y="1932174"/>
+          <a:ext cx="2637589" cy="3152460"/>
+        </a:xfrm>
+        <a:prstGeom prst="roundRect">
+          <a:avLst>
+            <a:gd name="adj" fmla="val 10000"/>
+          </a:avLst>
+        </a:prstGeom>
+        <a:solidFill>
+          <a:schemeClr val="lt1">
+            <a:alpha val="90000"/>
+            <a:hueOff val="0"/>
+            <a:satOff val="0"/>
+            <a:lumOff val="0"/>
+            <a:alphaOff val="0"/>
+          </a:schemeClr>
+        </a:solidFill>
+        <a:ln w="19050" cap="flat" cmpd="sng" algn="ctr">
+          <a:solidFill>
+            <a:schemeClr val="accent1">
+              <a:hueOff val="0"/>
+              <a:satOff val="0"/>
+              <a:lumOff val="0"/>
+              <a:alphaOff val="0"/>
+            </a:schemeClr>
+          </a:solidFill>
+          <a:prstDash val="solid"/>
+          <a:miter lim="800000"/>
+        </a:ln>
+        <a:effectLst/>
+      </dsp:spPr>
+      <dsp:style>
+        <a:lnRef idx="2">
+          <a:scrgbClr r="0" g="0" b="0"/>
+        </a:lnRef>
+        <a:fillRef idx="1">
+          <a:scrgbClr r="0" g="0" b="0"/>
+        </a:fillRef>
+        <a:effectRef idx="0">
+          <a:scrgbClr r="0" g="0" b="0"/>
+        </a:effectRef>
+        <a:fontRef idx="minor"/>
+      </dsp:style>
+      <dsp:txBody>
+        <a:bodyPr spcFirstLastPara="0" vert="horz" wrap="square" lIns="149352" tIns="149352" rIns="149352" bIns="149352" numCol="1" spcCol="1270" anchor="t" anchorCtr="0">
+          <a:noAutofit/>
+        </a:bodyPr>
+        <a:lstStyle/>
+        <a:p>
+          <a:pPr marL="228600" lvl="1" indent="-228600" algn="l" defTabSz="933450">
+            <a:lnSpc>
+              <a:spcPct val="90000"/>
+            </a:lnSpc>
+            <a:spcBef>
+              <a:spcPct val="0"/>
+            </a:spcBef>
+            <a:spcAft>
+              <a:spcPct val="15000"/>
+            </a:spcAft>
+            <a:buChar char="•"/>
+          </a:pPr>
+          <a:r>
+            <a:rPr lang="en-GB" sz="2100" kern="1200" dirty="0"/>
+            <a:t>Saves photo to cloud</a:t>
+          </a:r>
+          <a:endParaRPr lang="en-IE" sz="2100" kern="1200" dirty="0"/>
+        </a:p>
+        <a:p>
+          <a:pPr marL="228600" lvl="1" indent="-228600" algn="l" defTabSz="933450">
+            <a:lnSpc>
+              <a:spcPct val="90000"/>
+            </a:lnSpc>
+            <a:spcBef>
+              <a:spcPct val="0"/>
+            </a:spcBef>
+            <a:spcAft>
+              <a:spcPct val="15000"/>
+            </a:spcAft>
+            <a:buChar char="•"/>
+          </a:pPr>
+          <a:r>
+            <a:rPr lang="en-GB" sz="2100" kern="1200" dirty="0"/>
+            <a:t>Can view last visitor on App deployed to hosting platform</a:t>
+          </a:r>
+          <a:endParaRPr lang="en-IE" sz="2100" kern="1200" dirty="0"/>
+        </a:p>
+      </dsp:txBody>
+      <dsp:txXfrm>
+        <a:off x="4090845" y="2009426"/>
+        <a:ext cx="2483085" cy="2997956"/>
+      </dsp:txXfrm>
+    </dsp:sp>
+    <dsp:sp modelId="{F5015279-0E80-48CE-BB3C-84E311D73487}">
+      <dsp:nvSpPr>
+        <dsp:cNvPr id="0" name=""/>
+        <dsp:cNvSpPr/>
+      </dsp:nvSpPr>
+      <dsp:spPr>
+        <a:xfrm>
+          <a:off x="6373278" y="1247404"/>
+          <a:ext cx="837154" cy="544875"/>
+        </a:xfrm>
+        <a:prstGeom prst="rightArrow">
+          <a:avLst>
+            <a:gd name="adj1" fmla="val 60000"/>
+            <a:gd name="adj2" fmla="val 50000"/>
+          </a:avLst>
+        </a:prstGeom>
+        <a:solidFill>
+          <a:schemeClr val="accent1">
+            <a:tint val="60000"/>
+            <a:hueOff val="0"/>
+            <a:satOff val="0"/>
+            <a:lumOff val="0"/>
+            <a:alphaOff val="0"/>
+          </a:schemeClr>
+        </a:solidFill>
+        <a:ln>
+          <a:noFill/>
+        </a:ln>
+        <a:effectLst/>
+      </dsp:spPr>
+      <dsp:style>
+        <a:lnRef idx="0">
+          <a:scrgbClr r="0" g="0" b="0"/>
+        </a:lnRef>
+        <a:fillRef idx="1">
+          <a:scrgbClr r="0" g="0" b="0"/>
+        </a:fillRef>
+        <a:effectRef idx="0">
+          <a:scrgbClr r="0" g="0" b="0"/>
+        </a:effectRef>
+        <a:fontRef idx="minor">
+          <a:schemeClr val="lt1"/>
+        </a:fontRef>
+      </dsp:style>
+      <dsp:txBody>
+        <a:bodyPr spcFirstLastPara="0" vert="horz" wrap="square" lIns="0" tIns="0" rIns="0" bIns="0" numCol="1" spcCol="1270" anchor="ctr" anchorCtr="0">
+          <a:noAutofit/>
+        </a:bodyPr>
+        <a:lstStyle/>
+        <a:p>
+          <a:pPr marL="0" lvl="0" indent="0" algn="ctr" defTabSz="755650">
+            <a:lnSpc>
+              <a:spcPct val="90000"/>
+            </a:lnSpc>
+            <a:spcBef>
+              <a:spcPct val="0"/>
+            </a:spcBef>
+            <a:spcAft>
+              <a:spcPct val="35000"/>
+            </a:spcAft>
+            <a:buNone/>
+          </a:pPr>
+          <a:endParaRPr lang="en-IE" sz="1700" kern="1200"/>
+        </a:p>
+      </dsp:txBody>
+      <dsp:txXfrm>
+        <a:off x="6373278" y="1356379"/>
+        <a:ext cx="673692" cy="326925"/>
+      </dsp:txXfrm>
+    </dsp:sp>
+    <dsp:sp modelId="{1E59154B-8A20-4D6B-9E68-B6FB15FE88C5}">
+      <dsp:nvSpPr>
+        <dsp:cNvPr id="0" name=""/>
+        <dsp:cNvSpPr/>
+      </dsp:nvSpPr>
+      <dsp:spPr>
+        <a:xfrm>
+          <a:off x="7557930" y="1107509"/>
+          <a:ext cx="2188507" cy="1236997"/>
+        </a:xfrm>
+        <a:prstGeom prst="roundRect">
+          <a:avLst>
+            <a:gd name="adj" fmla="val 10000"/>
+          </a:avLst>
+        </a:prstGeom>
+        <a:solidFill>
+          <a:schemeClr val="accent1">
+            <a:hueOff val="0"/>
+            <a:satOff val="0"/>
+            <a:lumOff val="0"/>
+            <a:alphaOff val="0"/>
+          </a:schemeClr>
+        </a:solidFill>
+        <a:ln w="19050" cap="flat" cmpd="sng" algn="ctr">
+          <a:solidFill>
+            <a:schemeClr val="lt1">
+              <a:hueOff val="0"/>
+              <a:satOff val="0"/>
+              <a:lumOff val="0"/>
+              <a:alphaOff val="0"/>
+            </a:schemeClr>
+          </a:solidFill>
+          <a:prstDash val="solid"/>
+          <a:miter lim="800000"/>
+        </a:ln>
+        <a:effectLst/>
+      </dsp:spPr>
+      <dsp:style>
+        <a:lnRef idx="2">
+          <a:scrgbClr r="0" g="0" b="0"/>
+        </a:lnRef>
+        <a:fillRef idx="1">
+          <a:scrgbClr r="0" g="0" b="0"/>
+        </a:fillRef>
+        <a:effectRef idx="0">
+          <a:scrgbClr r="0" g="0" b="0"/>
+        </a:effectRef>
+        <a:fontRef idx="minor">
+          <a:schemeClr val="lt1"/>
+        </a:fontRef>
+      </dsp:style>
+      <dsp:txBody>
+        <a:bodyPr spcFirstLastPara="0" vert="horz" wrap="square" lIns="149352" tIns="149352" rIns="149352" bIns="80010" numCol="1" spcCol="1270" anchor="t" anchorCtr="0">
+          <a:noAutofit/>
+        </a:bodyPr>
+        <a:lstStyle/>
+        <a:p>
+          <a:pPr marL="0" lvl="0" indent="0" algn="l" defTabSz="933450">
+            <a:lnSpc>
+              <a:spcPct val="90000"/>
+            </a:lnSpc>
+            <a:spcBef>
+              <a:spcPct val="0"/>
+            </a:spcBef>
+            <a:spcAft>
+              <a:spcPct val="35000"/>
+            </a:spcAft>
+            <a:buNone/>
+          </a:pPr>
+          <a:r>
+            <a:rPr lang="en-GB" sz="2100" kern="1200" dirty="0"/>
+            <a:t>Part 3: Event Driven</a:t>
+          </a:r>
+          <a:endParaRPr lang="en-IE" sz="2100" kern="1200" dirty="0"/>
+        </a:p>
+      </dsp:txBody>
+      <dsp:txXfrm>
+        <a:off x="7557930" y="1107509"/>
+        <a:ext cx="2188507" cy="824665"/>
+      </dsp:txXfrm>
+    </dsp:sp>
+    <dsp:sp modelId="{749122D7-474D-4389-98D9-0CF7D8087194}">
+      <dsp:nvSpPr>
+        <dsp:cNvPr id="0" name=""/>
+        <dsp:cNvSpPr/>
+      </dsp:nvSpPr>
+      <dsp:spPr>
+        <a:xfrm>
+          <a:off x="7530014" y="1932174"/>
+          <a:ext cx="3140837" cy="3152460"/>
+        </a:xfrm>
+        <a:prstGeom prst="roundRect">
+          <a:avLst>
+            <a:gd name="adj" fmla="val 10000"/>
+          </a:avLst>
+        </a:prstGeom>
+        <a:solidFill>
+          <a:schemeClr val="lt1">
+            <a:alpha val="90000"/>
+            <a:hueOff val="0"/>
+            <a:satOff val="0"/>
+            <a:lumOff val="0"/>
+            <a:alphaOff val="0"/>
+          </a:schemeClr>
+        </a:solidFill>
+        <a:ln w="19050" cap="flat" cmpd="sng" algn="ctr">
+          <a:solidFill>
+            <a:schemeClr val="accent1">
+              <a:hueOff val="0"/>
+              <a:satOff val="0"/>
+              <a:lumOff val="0"/>
+              <a:alphaOff val="0"/>
+            </a:schemeClr>
+          </a:solidFill>
+          <a:prstDash val="solid"/>
+          <a:miter lim="800000"/>
+        </a:ln>
+        <a:effectLst/>
+      </dsp:spPr>
+      <dsp:style>
+        <a:lnRef idx="2">
+          <a:scrgbClr r="0" g="0" b="0"/>
+        </a:lnRef>
+        <a:fillRef idx="1">
+          <a:scrgbClr r="0" g="0" b="0"/>
+        </a:fillRef>
+        <a:effectRef idx="0">
+          <a:scrgbClr r="0" g="0" b="0"/>
+        </a:effectRef>
+        <a:fontRef idx="minor"/>
+      </dsp:style>
+      <dsp:txBody>
+        <a:bodyPr spcFirstLastPara="0" vert="horz" wrap="square" lIns="149352" tIns="149352" rIns="149352" bIns="149352" numCol="1" spcCol="1270" anchor="t" anchorCtr="0">
+          <a:noAutofit/>
+        </a:bodyPr>
+        <a:lstStyle/>
+        <a:p>
+          <a:pPr marL="228600" lvl="1" indent="-228600" algn="l" defTabSz="933450">
+            <a:lnSpc>
+              <a:spcPct val="90000"/>
+            </a:lnSpc>
+            <a:spcBef>
+              <a:spcPct val="0"/>
+            </a:spcBef>
+            <a:spcAft>
+              <a:spcPct val="15000"/>
+            </a:spcAft>
+            <a:buChar char="•"/>
+          </a:pPr>
+          <a:r>
+            <a:rPr lang="en-GB" sz="2100" kern="1200" dirty="0" err="1"/>
+            <a:t>Rpi</a:t>
+          </a:r>
+          <a:r>
+            <a:rPr lang="en-GB" sz="2100" kern="1200" dirty="0"/>
+            <a:t> publishes event data to Message Broker</a:t>
+          </a:r>
+          <a:endParaRPr lang="en-IE" sz="2100" kern="1200" dirty="0"/>
+        </a:p>
+        <a:p>
+          <a:pPr marL="228600" lvl="1" indent="-228600" algn="l" defTabSz="933450">
+            <a:lnSpc>
+              <a:spcPct val="90000"/>
+            </a:lnSpc>
+            <a:spcBef>
+              <a:spcPct val="0"/>
+            </a:spcBef>
+            <a:spcAft>
+              <a:spcPct val="15000"/>
+            </a:spcAft>
+            <a:buChar char="•"/>
+          </a:pPr>
+          <a:r>
+            <a:rPr lang="en-GB" sz="2100" kern="1200" dirty="0"/>
+            <a:t> Deployed app </a:t>
+          </a:r>
+          <a:r>
+            <a:rPr lang="en-GB" sz="2100" kern="1200" dirty="0" err="1"/>
+            <a:t>subscibes</a:t>
+          </a:r>
+          <a:r>
+            <a:rPr lang="en-GB" sz="2100" kern="1200" dirty="0"/>
+            <a:t> to Broker</a:t>
+          </a:r>
+          <a:endParaRPr lang="en-IE" sz="2100" kern="1200" dirty="0"/>
+        </a:p>
+      </dsp:txBody>
+      <dsp:txXfrm>
+        <a:off x="7622006" y="2024166"/>
+        <a:ext cx="2956853" cy="2968476"/>
+      </dsp:txXfrm>
+    </dsp:sp>
+  </dsp:spTree>
+</dsp:drawing>
+</file>
+
+<file path=ppt/diagrams/layout1.xml><?xml version="1.0" encoding="utf-8"?>
+<dgm:layoutDef xmlns:dgm="http://schemas.openxmlformats.org/drawingml/2006/diagram" xmlns:a="http://schemas.openxmlformats.org/drawingml/2006/main" uniqueId="urn:microsoft.com/office/officeart/2005/8/layout/process3">
+  <dgm:title val=""/>
+  <dgm:desc val=""/>
+  <dgm:catLst>
+    <dgm:cat type="process" pri="2000"/>
+  </dgm:catLst>
+  <dgm:sampData>
+    <dgm:dataModel>
+      <dgm:ptLst>
+        <dgm:pt modelId="0" type="doc"/>
+        <dgm:pt modelId="1">
+          <dgm:prSet phldr="1"/>
+        </dgm:pt>
+        <dgm:pt modelId="11">
+          <dgm:prSet phldr="1"/>
+        </dgm:pt>
+        <dgm:pt modelId="2">
+          <dgm:prSet phldr="1"/>
+        </dgm:pt>
+        <dgm:pt modelId="21">
+          <dgm:prSet phldr="1"/>
+        </dgm:pt>
+        <dgm:pt modelId="3">
+          <dgm:prSet phldr="1"/>
+        </dgm:pt>
+        <dgm:pt modelId="31">
+          <dgm:prSet phldr="1"/>
+        </dgm:pt>
+      </dgm:ptLst>
+      <dgm:cxnLst>
+        <dgm:cxn modelId="4" srcId="0" destId="1" srcOrd="0" destOrd="0"/>
+        <dgm:cxn modelId="5" srcId="0" destId="2" srcOrd="1" destOrd="0"/>
+        <dgm:cxn modelId="6" srcId="0" destId="3" srcOrd="3" destOrd="0"/>
+        <dgm:cxn modelId="12" srcId="1" destId="11" srcOrd="0" destOrd="0"/>
+        <dgm:cxn modelId="23" srcId="2" destId="21" srcOrd="0" destOrd="0"/>
+        <dgm:cxn modelId="34" srcId="3" destId="31" srcOrd="0" destOrd="0"/>
+      </dgm:cxnLst>
+      <dgm:bg/>
+      <dgm:whole/>
+    </dgm:dataModel>
+  </dgm:sampData>
+  <dgm:styleData>
+    <dgm:dataModel>
+      <dgm:ptLst>
+        <dgm:pt modelId="0" type="doc"/>
+        <dgm:pt modelId="1">
+          <dgm:prSet phldr="1"/>
+        </dgm:pt>
+        <dgm:pt modelId="11">
+          <dgm:prSet phldr="1"/>
+        </dgm:pt>
+        <dgm:pt modelId="2">
+          <dgm:prSet phldr="1"/>
+        </dgm:pt>
+        <dgm:pt modelId="21">
+          <dgm:prSet phldr="1"/>
+        </dgm:pt>
+      </dgm:ptLst>
+      <dgm:cxnLst>
+        <dgm:cxn modelId="4" srcId="0" destId="1" srcOrd="0" destOrd="0"/>
+        <dgm:cxn modelId="5" srcId="0" destId="2" srcOrd="1" destOrd="0"/>
+        <dgm:cxn modelId="13" srcId="1" destId="11" srcOrd="0" destOrd="0"/>
+        <dgm:cxn modelId="23" srcId="2" destId="21" srcOrd="0" destOrd="0"/>
+      </dgm:cxnLst>
+      <dgm:bg/>
+      <dgm:whole/>
+    </dgm:dataModel>
+  </dgm:styleData>
+  <dgm:clrData>
+    <dgm:dataModel>
+      <dgm:ptLst>
+        <dgm:pt modelId="0" type="doc"/>
+        <dgm:pt modelId="1">
+          <dgm:prSet phldr="1"/>
+        </dgm:pt>
+        <dgm:pt modelId="11">
+          <dgm:prSet phldr="1"/>
+        </dgm:pt>
+        <dgm:pt modelId="2">
+          <dgm:prSet phldr="1"/>
+        </dgm:pt>
+        <dgm:pt modelId="21">
+          <dgm:prSet phldr="1"/>
+        </dgm:pt>
+        <dgm:pt modelId="3">
+          <dgm:prSet phldr="1"/>
+        </dgm:pt>
+        <dgm:pt modelId="31">
+          <dgm:prSet phldr="1"/>
+        </dgm:pt>
+        <dgm:pt modelId="4">
+          <dgm:prSet phldr="1"/>
+        </dgm:pt>
+        <dgm:pt modelId="41">
+          <dgm:prSet phldr="1"/>
+        </dgm:pt>
+      </dgm:ptLst>
+      <dgm:cxnLst>
+        <dgm:cxn modelId="5" srcId="0" destId="1" srcOrd="0" destOrd="0"/>
+        <dgm:cxn modelId="6" srcId="0" destId="2" srcOrd="1" destOrd="0"/>
+        <dgm:cxn modelId="7" srcId="0" destId="3" srcOrd="2" destOrd="0"/>
+        <dgm:cxn modelId="8" srcId="0" destId="4" srcOrd="3" destOrd="0"/>
+        <dgm:cxn modelId="13" srcId="1" destId="11" srcOrd="0" destOrd="0"/>
+        <dgm:cxn modelId="23" srcId="2" destId="21" srcOrd="0" destOrd="0"/>
+        <dgm:cxn modelId="33" srcId="3" destId="31" srcOrd="0" destOrd="0"/>
+        <dgm:cxn modelId="43" srcId="4" destId="41" srcOrd="0" destOrd="0"/>
+      </dgm:cxnLst>
+      <dgm:bg/>
+      <dgm:whole/>
+    </dgm:dataModel>
+  </dgm:clrData>
+  <dgm:layoutNode name="linearFlow">
+    <dgm:varLst>
+      <dgm:dir/>
+      <dgm:animLvl val="lvl"/>
+      <dgm:resizeHandles val="exact"/>
+    </dgm:varLst>
+    <dgm:choose name="Name0">
+      <dgm:if name="Name1" func="var" arg="dir" op="equ" val="norm">
+        <dgm:alg type="lin"/>
+      </dgm:if>
+      <dgm:else name="Name2">
+        <dgm:alg type="lin">
+          <dgm:param type="linDir" val="fromR"/>
+        </dgm:alg>
+      </dgm:else>
+    </dgm:choose>
+    <dgm:shape xmlns:r="http://schemas.openxmlformats.org/officeDocument/2006/relationships" r:blip="">
+      <dgm:adjLst/>
+    </dgm:shape>
+    <dgm:presOf/>
+    <dgm:constrLst>
+      <dgm:constr type="w" for="ch" forName="composite" refType="w"/>
+      <dgm:constr type="w" for="ch" ptType="sibTrans" refType="w" refFor="ch" refForName="composite" fact="0.3333"/>
+      <dgm:constr type="w" for="des" forName="parTx"/>
+      <dgm:constr type="h" for="des" forName="parTx" op="equ"/>
+      <dgm:constr type="h" for="des" forName="parSh" op="equ"/>
+      <dgm:constr type="w" for="des" forName="desTx"/>
+      <dgm:constr type="h" for="des" forName="desTx" op="equ"/>
+      <dgm:constr type="w" for="des" forName="parSh"/>
+      <dgm:constr type="primFontSz" for="des" forName="parTx" val="65"/>
+      <dgm:constr type="secFontSz" for="des" forName="desTx" refType="primFontSz" refFor="des" refForName="parTx" op="equ"/>
+      <dgm:constr type="primFontSz" for="des" forName="connTx" refType="primFontSz" refFor="des" refForName="parTx" fact="0.8"/>
+      <dgm:constr type="primFontSz" for="des" forName="connTx" refType="primFontSz" refFor="des" refForName="parTx" op="lte" fact="0.8"/>
+      <dgm:constr type="h" for="des" forName="parTx" refType="primFontSz" refFor="des" refForName="parTx" fact="0.8"/>
+      <dgm:constr type="h" for="des" forName="parSh" refType="primFontSz" refFor="des" refForName="parTx" fact="1.2"/>
+      <dgm:constr type="h" for="des" forName="desTx" refType="primFontSz" refFor="des" refForName="parTx" fact="1.6"/>
+      <dgm:constr type="h" for="des" forName="parSh" refType="h" refFor="des" refForName="parTx" op="lte" fact="1.5"/>
+      <dgm:constr type="h" for="des" forName="parSh" refType="h" refFor="des" refForName="parTx" op="gte" fact="1.5"/>
+    </dgm:constrLst>
+    <dgm:ruleLst>
+      <dgm:rule type="w" for="ch" forName="composite" val="0" fact="NaN" max="NaN"/>
+      <dgm:rule type="primFontSz" for="des" forName="parTx" val="5" fact="NaN" max="NaN"/>
+    </dgm:ruleLst>
+    <dgm:forEach name="Name3" axis="ch" ptType="node">
+      <dgm:layoutNode name="composite">
+        <dgm:alg type="composite"/>
+        <dgm:shape xmlns:r="http://schemas.openxmlformats.org/officeDocument/2006/relationships" r:blip="">
+          <dgm:adjLst/>
+        </dgm:shape>
+        <dgm:presOf/>
+        <dgm:choose name="Name4">
+          <dgm:if name="Name5" func="var" arg="dir" op="equ" val="norm">
+            <dgm:constrLst>
+              <dgm:constr type="h" refType="w" fact="1000"/>
+              <dgm:constr type="l" for="ch" forName="parTx"/>
+              <dgm:constr type="w" for="ch" forName="parTx" refType="w" fact="0.83"/>
+              <dgm:constr type="t" for="ch" forName="parTx"/>
+              <dgm:constr type="l" for="ch" forName="parSh"/>
+              <dgm:constr type="w" for="ch" forName="parSh" refType="w" refFor="ch" refForName="parTx"/>
+              <dgm:constr type="t" for="ch" forName="parSh"/>
+              <dgm:constr type="l" for="ch" forName="desTx" refType="w" fact="0.17"/>
+              <dgm:constr type="w" for="ch" forName="desTx" refType="w" refFor="ch" refForName="parTx"/>
+              <dgm:constr type="t" for="ch" forName="desTx" refType="h" refFor="ch" refForName="parTx"/>
+            </dgm:constrLst>
+          </dgm:if>
+          <dgm:else name="Name6">
+            <dgm:constrLst>
+              <dgm:constr type="h" refType="w" fact="1000"/>
+              <dgm:constr type="l" for="ch" forName="parTx" refType="w" fact="0.17"/>
+              <dgm:constr type="w" for="ch" forName="parTx" refType="w" fact="0.83"/>
+              <dgm:constr type="t" for="ch" forName="parTx"/>
+              <dgm:constr type="l" for="ch" forName="parSh" refType="w" fact="0.15"/>
+              <dgm:constr type="w" for="ch" forName="parSh" refType="w" refFor="ch" refForName="parTx"/>
+              <dgm:constr type="t" for="ch" forName="parSh"/>
+              <dgm:constr type="l" for="ch" forName="desTx"/>
+              <dgm:constr type="w" for="ch" forName="desTx" refType="w" refFor="ch" refForName="parTx"/>
+              <dgm:constr type="t" for="ch" forName="desTx" refType="h" refFor="ch" refForName="parTx"/>
+            </dgm:constrLst>
+          </dgm:else>
+        </dgm:choose>
+        <dgm:ruleLst>
+          <dgm:rule type="h" val="INF" fact="NaN" max="NaN"/>
+        </dgm:ruleLst>
+        <dgm:layoutNode name="parTx">
+          <dgm:varLst>
+            <dgm:chMax val="0"/>
+            <dgm:chPref val="0"/>
+            <dgm:bulletEnabled val="1"/>
+          </dgm:varLst>
+          <dgm:alg type="tx">
+            <dgm:param type="parTxLTRAlign" val="l"/>
+            <dgm:param type="parTxRTLAlign" val="r"/>
+            <dgm:param type="txAnchorVert" val="t"/>
+          </dgm:alg>
+          <dgm:shape xmlns:r="http://schemas.openxmlformats.org/officeDocument/2006/relationships" type="rect" r:blip="" zOrderOff="1" hideGeom="1">
+            <dgm:adjLst>
+              <dgm:adj idx="1" val="0.1"/>
+            </dgm:adjLst>
+          </dgm:shape>
+          <dgm:presOf axis="self" ptType="node"/>
+          <dgm:constrLst>
+            <dgm:constr type="h" refType="w" op="lte" fact="0.4"/>
+            <dgm:constr type="bMarg" refType="primFontSz" fact="0.3"/>
+            <dgm:constr type="h"/>
+          </dgm:constrLst>
+          <dgm:ruleLst>
+            <dgm:rule type="h" val="INF" fact="NaN" max="NaN"/>
+          </dgm:ruleLst>
+        </dgm:layoutNode>
+        <dgm:layoutNode name="parSh">
+          <dgm:alg type="sp"/>
+          <dgm:shape xmlns:r="http://schemas.openxmlformats.org/officeDocument/2006/relationships" type="roundRect" r:blip="">
+            <dgm:adjLst>
+              <dgm:adj idx="1" val="0.1"/>
+            </dgm:adjLst>
+          </dgm:shape>
+          <dgm:presOf axis="self" ptType="node"/>
+          <dgm:constrLst>
+            <dgm:constr type="h"/>
+          </dgm:constrLst>
+          <dgm:ruleLst/>
+        </dgm:layoutNode>
+        <dgm:layoutNode name="desTx" styleLbl="fgAcc1">
+          <dgm:varLst>
+            <dgm:bulletEnabled val="1"/>
+          </dgm:varLst>
+          <dgm:alg type="tx">
+            <dgm:param type="stBulletLvl" val="1"/>
+          </dgm:alg>
+          <dgm:shape xmlns:r="http://schemas.openxmlformats.org/officeDocument/2006/relationships" type="roundRect" r:blip="">
+            <dgm:adjLst>
+              <dgm:adj idx="1" val="0.1"/>
+            </dgm:adjLst>
+          </dgm:shape>
+          <dgm:presOf axis="des" ptType="node"/>
+          <dgm:constrLst>
+            <dgm:constr type="secFontSz" val="65"/>
+            <dgm:constr type="primFontSz" refType="secFontSz"/>
+            <dgm:constr type="h"/>
+          </dgm:constrLst>
+          <dgm:ruleLst>
+            <dgm:rule type="h" val="INF" fact="NaN" max="NaN"/>
+          </dgm:ruleLst>
+        </dgm:layoutNode>
+      </dgm:layoutNode>
+      <dgm:forEach name="sibTransForEach" axis="followSib" ptType="sibTrans" cnt="1">
+        <dgm:layoutNode name="sibTrans">
+          <dgm:alg type="conn">
+            <dgm:param type="begPts" val="auto"/>
+            <dgm:param type="endPts" val="auto"/>
+            <dgm:param type="srcNode" val="parTx"/>
+            <dgm:param type="dstNode" val="parTx"/>
+          </dgm:alg>
+          <dgm:shape xmlns:r="http://schemas.openxmlformats.org/officeDocument/2006/relationships" type="conn" r:blip="">
+            <dgm:adjLst/>
+          </dgm:shape>
+          <dgm:presOf axis="self"/>
+          <dgm:constrLst>
+            <dgm:constr type="h" refType="w" fact="0.62"/>
+            <dgm:constr type="connDist"/>
+            <dgm:constr type="begPad" refType="connDist" fact="0.25"/>
+            <dgm:constr type="endPad" refType="connDist" fact="0.22"/>
+          </dgm:constrLst>
+          <dgm:ruleLst/>
+          <dgm:layoutNode name="connTx">
+            <dgm:alg type="tx">
+              <dgm:param type="autoTxRot" val="grav"/>
+            </dgm:alg>
+            <dgm:shape xmlns:r="http://schemas.openxmlformats.org/officeDocument/2006/relationships" type="conn" r:blip="" hideGeom="1">
+              <dgm:adjLst/>
+            </dgm:shape>
+            <dgm:presOf axis="self"/>
+            <dgm:constrLst>
+              <dgm:constr type="lMarg"/>
+              <dgm:constr type="rMarg"/>
+              <dgm:constr type="tMarg"/>
+              <dgm:constr type="bMarg"/>
+            </dgm:constrLst>
+            <dgm:ruleLst>
+              <dgm:rule type="primFontSz" val="5" fact="NaN" max="NaN"/>
+            </dgm:ruleLst>
+          </dgm:layoutNode>
+        </dgm:layoutNode>
+      </dgm:forEach>
+    </dgm:forEach>
+  </dgm:layoutNode>
+</dgm:layoutDef>
+</file>
+
+<file path=ppt/diagrams/quickStyle1.xml><?xml version="1.0" encoding="utf-8"?>
+<dgm:styleDef xmlns:dgm="http://schemas.openxmlformats.org/drawingml/2006/diagram" xmlns:a="http://schemas.openxmlformats.org/drawingml/2006/main" uniqueId="urn:microsoft.com/office/officeart/2005/8/quickstyle/simple1">
+  <dgm:title val=""/>
+  <dgm:desc val=""/>
+  <dgm:catLst>
+    <dgm:cat type="simple" pri="10100"/>
+  </dgm:catLst>
+  <dgm:scene3d>
+    <a:camera prst="orthographicFront"/>
+    <a:lightRig rig="threePt" dir="t"/>
+  </dgm:scene3d>
+  <dgm:styleLbl name="node0">
+    <dgm:scene3d>
+      <a:camera prst="orthographicFront"/>
+      <a:lightRig rig="threePt" dir="t"/>
+    </dgm:scene3d>
+    <dgm:sp3d/>
+    <dgm:txPr/>
+    <dgm:style>
+      <a:lnRef idx="2">
+        <a:scrgbClr r="0" g="0" b="0"/>
+      </a:lnRef>
+      <a:fillRef idx="1">
+        <a:scrgbClr r="0" g="0" b="0"/>
+      </a:fillRef>
+      <a:effectRef idx="0">
+        <a:scrgbClr r="0" g="0" b="0"/>
+      </a:effectRef>
+      <a:fontRef idx="minor">
+        <a:schemeClr val="lt1"/>
+      </a:fontRef>
+    </dgm:style>
+  </dgm:styleLbl>
+  <dgm:styleLbl name="lnNode1">
+    <dgm:scene3d>
+      <a:camera prst="orthographicFront"/>
+      <a:lightRig rig="threePt" dir="t"/>
+    </dgm:scene3d>
+    <dgm:sp3d/>
+    <dgm:txPr/>
+    <dgm:style>
+      <a:lnRef idx="2">
+        <a:scrgbClr r="0" g="0" b="0"/>
+      </a:lnRef>
+      <a:fillRef idx="1">
+        <a:scrgbClr r="0" g="0" b="0"/>
+      </a:fillRef>
+      <a:effectRef idx="0">
+        <a:scrgbClr r="0" g="0" b="0"/>
+      </a:effectRef>
+      <a:fontRef idx="minor">
+        <a:schemeClr val="lt1"/>
+      </a:fontRef>
+    </dgm:style>
+  </dgm:styleLbl>
+  <dgm:styleLbl name="vennNode1">
+    <dgm:scene3d>
+      <a:camera prst="orthographicFront"/>
+      <a:lightRig rig="threePt" dir="t"/>
+    </dgm:scene3d>
+    <dgm:sp3d/>
+    <dgm:txPr/>
+    <dgm:style>
+      <a:lnRef idx="2">
+        <a:scrgbClr r="0" g="0" b="0"/>
+      </a:lnRef>
+      <a:fillRef idx="1">
+        <a:scrgbClr r="0" g="0" b="0"/>
+      </a:fillRef>
+      <a:effectRef idx="0">
+        <a:scrgbClr r="0" g="0" b="0"/>
+      </a:effectRef>
+      <a:fontRef idx="minor">
+        <a:schemeClr val="tx1"/>
+      </a:fontRef>
+    </dgm:style>
+  </dgm:styleLbl>
+  <dgm:styleLbl name="alignNode1">
+    <dgm:scene3d>
+      <a:camera prst="orthographicFront"/>
+      <a:lightRig rig="threePt" dir="t"/>
+    </dgm:scene3d>
+    <dgm:sp3d/>
+    <dgm:txPr/>
+    <dgm:style>
+      <a:lnRef idx="2">
+        <a:scrgbClr r="0" g="0" b="0"/>
+      </a:lnRef>
+      <a:fillRef idx="1">
+        <a:scrgbClr r="0" g="0" b="0"/>
+      </a:fillRef>
+      <a:effectRef idx="0">
+        <a:scrgbClr r="0" g="0" b="0"/>
+      </a:effectRef>
+      <a:fontRef idx="minor">
+        <a:schemeClr val="lt1"/>
+      </a:fontRef>
+    </dgm:style>
+  </dgm:styleLbl>
+  <dgm:styleLbl name="node1">
+    <dgm:scene3d>
+      <a:camera prst="orthographicFront"/>
+      <a:lightRig rig="threePt" dir="t"/>
+    </dgm:scene3d>
+    <dgm:sp3d/>
+    <dgm:txPr/>
+    <dgm:style>
+      <a:lnRef idx="2">
+        <a:scrgbClr r="0" g="0" b="0"/>
+      </a:lnRef>
+      <a:fillRef idx="1">
+        <a:scrgbClr r="0" g="0" b="0"/>
+      </a:fillRef>
+      <a:effectRef idx="0">
+        <a:scrgbClr r="0" g="0" b="0"/>
+      </a:effectRef>
+      <a:fontRef idx="minor">
+        <a:schemeClr val="lt1"/>
+      </a:fontRef>
+    </dgm:style>
+  </dgm:styleLbl>
+  <dgm:styleLbl name="node2">
+    <dgm:scene3d>
+      <a:camera prst="orthographicFront"/>
+      <a:lightRig rig="threePt" dir="t"/>
+    </dgm:scene3d>
+    <dgm:sp3d/>
+    <dgm:txPr/>
+    <dgm:style>
+      <a:lnRef idx="2">
+        <a:scrgbClr r="0" g="0" b="0"/>
+      </a:lnRef>
+      <a:fillRef idx="1">
+        <a:scrgbClr r="0" g="0" b="0"/>
+      </a:fillRef>
+      <a:effectRef idx="0">
+        <a:scrgbClr r="0" g="0" b="0"/>
+      </a:effectRef>
+      <a:fontRef idx="minor">
+        <a:schemeClr val="lt1"/>
+      </a:fontRef>
+    </dgm:style>
+  </dgm:styleLbl>
+  <dgm:styleLbl name="node3">
+    <dgm:scene3d>
+      <a:camera prst="orthographicFront"/>
+      <a:lightRig rig="threePt" dir="t"/>
+    </dgm:scene3d>
+    <dgm:sp3d/>
+    <dgm:txPr/>
+    <dgm:style>
+      <a:lnRef idx="2">
+        <a:scrgbClr r="0" g="0" b="0"/>
+      </a:lnRef>
+      <a:fillRef idx="1">
+        <a:scrgbClr r="0" g="0" b="0"/>
+      </a:fillRef>
+      <a:effectRef idx="0">
+        <a:scrgbClr r="0" g="0" b="0"/>
+      </a:effectRef>
+      <a:fontRef idx="minor">
+        <a:schemeClr val="lt1"/>
+      </a:fontRef>
+    </dgm:style>
+  </dgm:styleLbl>
+  <dgm:styleLbl name="node4">
+    <dgm:scene3d>
+      <a:camera prst="orthographicFront"/>
+      <a:lightRig rig="threePt" dir="t"/>
+    </dgm:scene3d>
+    <dgm:sp3d/>
+    <dgm:txPr/>
+    <dgm:style>
+      <a:lnRef idx="2">
+        <a:scrgbClr r="0" g="0" b="0"/>
+      </a:lnRef>
+      <a:fillRef idx="1">
+        <a:scrgbClr r="0" g="0" b="0"/>
+      </a:fillRef>
+      <a:effectRef idx="0">
+        <a:scrgbClr r="0" g="0" b="0"/>
+      </a:effectRef>
+      <a:fontRef idx="minor">
+        <a:schemeClr val="lt1"/>
+      </a:fontRef>
+    </dgm:style>
+  </dgm:styleLbl>
+  <dgm:styleLbl name="fgImgPlace1">
+    <dgm:scene3d>
+      <a:camera prst="orthographicFront"/>
+      <a:lightRig rig="threePt" dir="t"/>
+    </dgm:scene3d>
+    <dgm:sp3d/>
+    <dgm:txPr/>
+    <dgm:style>
+      <a:lnRef idx="2">
+        <a:scrgbClr r="0" g="0" b="0"/>
+      </a:lnRef>
+      <a:fillRef idx="1">
+        <a:scrgbClr r="0" g="0" b="0"/>
+      </a:fillRef>
+      <a:effectRef idx="0">
+        <a:scrgbClr r="0" g="0" b="0"/>
+      </a:effectRef>
+      <a:fontRef idx="minor"/>
+    </dgm:style>
+  </dgm:styleLbl>
+  <dgm:styleLbl name="alignImgPlace1">
+    <dgm:scene3d>
+      <a:camera prst="orthographicFront"/>
+      <a:lightRig rig="threePt" dir="t"/>
+    </dgm:scene3d>
+    <dgm:sp3d/>
+    <dgm:txPr/>
+    <dgm:style>
+      <a:lnRef idx="2">
+        <a:scrgbClr r="0" g="0" b="0"/>
+      </a:lnRef>
+      <a:fillRef idx="1">
+        <a:scrgbClr r="0" g="0" b="0"/>
+      </a:fillRef>
+      <a:effectRef idx="0">
+        <a:scrgbClr r="0" g="0" b="0"/>
+      </a:effectRef>
+      <a:fontRef idx="minor"/>
+    </dgm:style>
+  </dgm:styleLbl>
+  <dgm:styleLbl name="bgImgPlace1">
+    <dgm:scene3d>
+      <a:camera prst="orthographicFront"/>
+      <a:lightRig rig="threePt" dir="t"/>
+    </dgm:scene3d>
+    <dgm:sp3d/>
+    <dgm:txPr/>
+    <dgm:style>
+      <a:lnRef idx="2">
+        <a:scrgbClr r="0" g="0" b="0"/>
+      </a:lnRef>
+      <a:fillRef idx="1">
+        <a:scrgbClr r="0" g="0" b="0"/>
+      </a:fillRef>
+      <a:effectRef idx="0">
+        <a:scrgbClr r="0" g="0" b="0"/>
+      </a:effectRef>
+      <a:fontRef idx="minor"/>
+    </dgm:style>
+  </dgm:styleLbl>
+  <dgm:styleLbl name="sibTrans2D1">
+    <dgm:scene3d>
+      <a:camera prst="orthographicFront"/>
+      <a:lightRig rig="threePt" dir="t"/>
+    </dgm:scene3d>
+    <dgm:sp3d/>
+    <dgm:txPr/>
+    <dgm:style>
+      <a:lnRef idx="0">
+        <a:scrgbClr r="0" g="0" b="0"/>
+      </a:lnRef>
+      <a:fillRef idx="1">
+        <a:scrgbClr r="0" g="0" b="0"/>
+      </a:fillRef>
+      <a:effectRef idx="0">
+        <a:scrgbClr r="0" g="0" b="0"/>
+      </a:effectRef>
+      <a:fontRef idx="minor">
+        <a:schemeClr val="lt1"/>
+      </a:fontRef>
+    </dgm:style>
+  </dgm:styleLbl>
+  <dgm:styleLbl name="fgSibTrans2D1">
+    <dgm:scene3d>
+      <a:camera prst="orthographicFront"/>
+      <a:lightRig rig="threePt" dir="t"/>
+    </dgm:scene3d>
+    <dgm:sp3d/>
+    <dgm:txPr/>
+    <dgm:style>
+      <a:lnRef idx="0">
+        <a:scrgbClr r="0" g="0" b="0"/>
+      </a:lnRef>
+      <a:fillRef idx="1">
+        <a:scrgbClr r="0" g="0" b="0"/>
+      </a:fillRef>
+      <a:effectRef idx="0">
+        <a:scrgbClr r="0" g="0" b="0"/>
+      </a:effectRef>
+      <a:fontRef idx="minor">
+        <a:schemeClr val="lt1"/>
+      </a:fontRef>
+    </dgm:style>
+  </dgm:styleLbl>
+  <dgm:styleLbl name="bgSibTrans2D1">
+    <dgm:scene3d>
+      <a:camera prst="orthographicFront"/>
+      <a:lightRig rig="threePt" dir="t"/>
+    </dgm:scene3d>
+    <dgm:sp3d/>
+    <dgm:txPr/>
+    <dgm:style>
+      <a:lnRef idx="0">
+        <a:scrgbClr r="0" g="0" b="0"/>
+      </a:lnRef>
+      <a:fillRef idx="1">
+        <a:scrgbClr r="0" g="0" b="0"/>
+      </a:fillRef>
+      <a:effectRef idx="0">
+        <a:scrgbClr r="0" g="0" b="0"/>
+      </a:effectRef>
+      <a:fontRef idx="minor">
+        <a:schemeClr val="lt1"/>
+      </a:fontRef>
+    </dgm:style>
+  </dgm:styleLbl>
+  <dgm:styleLbl name="sibTrans1D1">
+    <dgm:scene3d>
+      <a:camera prst="orthographicFront"/>
+      <a:lightRig rig="threePt" dir="t"/>
+    </dgm:scene3d>
+    <dgm:sp3d/>
+    <dgm:txPr/>
+    <dgm:style>
+      <a:lnRef idx="1">
+        <a:scrgbClr r="0" g="0" b="0"/>
+      </a:lnRef>
+      <a:fillRef idx="0">
+        <a:scrgbClr r="0" g="0" b="0"/>
+      </a:fillRef>
+      <a:effectRef idx="0">
+        <a:scrgbClr r="0" g="0" b="0"/>
+      </a:effectRef>
+      <a:fontRef idx="minor"/>
+    </dgm:style>
+  </dgm:styleLbl>
+  <dgm:styleLbl name="callout">
+    <dgm:scene3d>
+      <a:camera prst="orthographicFront"/>
+      <a:lightRig rig="threePt" dir="t"/>
+    </dgm:scene3d>
+    <dgm:sp3d/>
+    <dgm:txPr/>
+    <dgm:style>
+      <a:lnRef idx="2">
+        <a:scrgbClr r="0" g="0" b="0"/>
+      </a:lnRef>
+      <a:fillRef idx="1">
+        <a:scrgbClr r="0" g="0" b="0"/>
+      </a:fillRef>
+      <a:effectRef idx="0">
+        <a:scrgbClr r="0" g="0" b="0"/>
+      </a:effectRef>
+      <a:fontRef idx="minor"/>
+    </dgm:style>
+  </dgm:styleLbl>
+  <dgm:styleLbl name="asst0">
+    <dgm:scene3d>
+      <a:camera prst="orthographicFront"/>
+      <a:lightRig rig="threePt" dir="t"/>
+    </dgm:scene3d>
+    <dgm:sp3d/>
+    <dgm:txPr/>
+    <dgm:style>
+      <a:lnRef idx="2">
+        <a:scrgbClr r="0" g="0" b="0"/>
+      </a:lnRef>
+      <a:fillRef idx="1">
+        <a:scrgbClr r="0" g="0" b="0"/>
+      </a:fillRef>
+      <a:effectRef idx="0">
+        <a:scrgbClr r="0" g="0" b="0"/>
+      </a:effectRef>
+      <a:fontRef idx="minor">
+        <a:schemeClr val="lt1"/>
+      </a:fontRef>
+    </dgm:style>
+  </dgm:styleLbl>
+  <dgm:styleLbl name="asst1">
+    <dgm:scene3d>
+      <a:camera prst="orthographicFront"/>
+      <a:lightRig rig="threePt" dir="t"/>
+    </dgm:scene3d>
+    <dgm:sp3d/>
+    <dgm:txPr/>
+    <dgm:style>
+      <a:lnRef idx="2">
+        <a:scrgbClr r="0" g="0" b="0"/>
+      </a:lnRef>
+      <a:fillRef idx="1">
+        <a:scrgbClr r="0" g="0" b="0"/>
+      </a:fillRef>
+      <a:effectRef idx="0">
+        <a:scrgbClr r="0" g="0" b="0"/>
+      </a:effectRef>
+      <a:fontRef idx="minor">
+        <a:schemeClr val="lt1"/>
+      </a:fontRef>
+    </dgm:style>
+  </dgm:styleLbl>
+  <dgm:styleLbl name="asst2">
+    <dgm:scene3d>
+      <a:camera prst="orthographicFront"/>
+      <a:lightRig rig="threePt" dir="t"/>
+    </dgm:scene3d>
+    <dgm:sp3d/>
+    <dgm:txPr/>
+    <dgm:style>
+      <a:lnRef idx="2">
+        <a:scrgbClr r="0" g="0" b="0"/>
+      </a:lnRef>
+      <a:fillRef idx="1">
+        <a:scrgbClr r="0" g="0" b="0"/>
+      </a:fillRef>
+      <a:effectRef idx="0">
+        <a:scrgbClr r="0" g="0" b="0"/>
+      </a:effectRef>
+      <a:fontRef idx="minor">
+        <a:schemeClr val="lt1"/>
+      </a:fontRef>
+    </dgm:style>
+  </dgm:styleLbl>
+  <dgm:styleLbl name="asst3">
+    <dgm:scene3d>
+      <a:camera prst="orthographicFront"/>
+      <a:lightRig rig="threePt" dir="t"/>
+    </dgm:scene3d>
+    <dgm:sp3d/>
+    <dgm:txPr/>
+    <dgm:style>
+      <a:lnRef idx="2">
+        <a:scrgbClr r="0" g="0" b="0"/>
+      </a:lnRef>
+      <a:fillRef idx="1">
+        <a:scrgbClr r="0" g="0" b="0"/>
+      </a:fillRef>
+      <a:effectRef idx="0">
+        <a:scrgbClr r="0" g="0" b="0"/>
+      </a:effectRef>
+      <a:fontRef idx="minor">
+        <a:schemeClr val="lt1"/>
+      </a:fontRef>
+    </dgm:style>
+  </dgm:styleLbl>
+  <dgm:styleLbl name="asst4">
+    <dgm:scene3d>
+      <a:camera prst="orthographicFront"/>
+      <a:lightRig rig="threePt" dir="t"/>
+    </dgm:scene3d>
+    <dgm:sp3d/>
+    <dgm:txPr/>
+    <dgm:style>
+      <a:lnRef idx="2">
+        <a:scrgbClr r="0" g="0" b="0"/>
+      </a:lnRef>
+      <a:fillRef idx="1">
+        <a:scrgbClr r="0" g="0" b="0"/>
+      </a:fillRef>
+      <a:effectRef idx="0">
+        <a:scrgbClr r="0" g="0" b="0"/>
+      </a:effectRef>
+      <a:fontRef idx="minor">
+        <a:schemeClr val="lt1"/>
+      </a:fontRef>
+    </dgm:style>
+  </dgm:styleLbl>
+  <dgm:styleLbl name="parChTrans2D1">
+    <dgm:scene3d>
+      <a:camera prst="orthographicFront"/>
+      <a:lightRig rig="threePt" dir="t"/>
+    </dgm:scene3d>
+    <dgm:sp3d/>
+    <dgm:txPr/>
+    <dgm:style>
+      <a:lnRef idx="2">
+        <a:scrgbClr r="0" g="0" b="0"/>
+      </a:lnRef>
+      <a:fillRef idx="1">
+        <a:scrgbClr r="0" g="0" b="0"/>
+      </a:fillRef>
+      <a:effectRef idx="0">
+        <a:scrgbClr r="0" g="0" b="0"/>
+      </a:effectRef>
+      <a:fontRef idx="minor">
+        <a:schemeClr val="lt1"/>
+      </a:fontRef>
+    </dgm:style>
+  </dgm:styleLbl>
+  <dgm:styleLbl name="parChTrans2D2">
+    <dgm:scene3d>
+      <a:camera prst="orthographicFront"/>
+      <a:lightRig rig="threePt" dir="t"/>
+    </dgm:scene3d>
+    <dgm:sp3d/>
+    <dgm:txPr/>
+    <dgm:style>
+      <a:lnRef idx="2">
+        <a:scrgbClr r="0" g="0" b="0"/>
+      </a:lnRef>
+      <a:fillRef idx="1">
+        <a:scrgbClr r="0" g="0" b="0"/>
+      </a:fillRef>
+      <a:effectRef idx="0">
+        <a:scrgbClr r="0" g="0" b="0"/>
+      </a:effectRef>
+      <a:fontRef idx="minor">
+        <a:schemeClr val="lt1"/>
+      </a:fontRef>
+    </dgm:style>
+  </dgm:styleLbl>
+  <dgm:styleLbl name="parChTrans2D3">
+    <dgm:scene3d>
+      <a:camera prst="orthographicFront"/>
+      <a:lightRig rig="threePt" dir="t"/>
+    </dgm:scene3d>
+    <dgm:sp3d/>
+    <dgm:txPr/>
+    <dgm:style>
+      <a:lnRef idx="2">
+        <a:scrgbClr r="0" g="0" b="0"/>
+      </a:lnRef>
+      <a:fillRef idx="1">
+        <a:scrgbClr r="0" g="0" b="0"/>
+      </a:fillRef>
+      <a:effectRef idx="0">
+        <a:scrgbClr r="0" g="0" b="0"/>
+      </a:effectRef>
+      <a:fontRef idx="minor">
+        <a:schemeClr val="lt1"/>
+      </a:fontRef>
+    </dgm:style>
+  </dgm:styleLbl>
+  <dgm:styleLbl name="parChTrans2D4">
+    <dgm:scene3d>
+      <a:camera prst="orthographicFront"/>
+      <a:lightRig rig="threePt" dir="t"/>
+    </dgm:scene3d>
+    <dgm:sp3d/>
+    <dgm:txPr/>
+    <dgm:style>
+      <a:lnRef idx="2">
+        <a:scrgbClr r="0" g="0" b="0"/>
+      </a:lnRef>
+      <a:fillRef idx="1">
+        <a:scrgbClr r="0" g="0" b="0"/>
+      </a:fillRef>
+      <a:effectRef idx="0">
+        <a:scrgbClr r="0" g="0" b="0"/>
+      </a:effectRef>
+      <a:fontRef idx="minor">
+        <a:schemeClr val="lt1"/>
+      </a:fontRef>
+    </dgm:style>
+  </dgm:styleLbl>
+  <dgm:styleLbl name="parChTrans1D1">
+    <dgm:scene3d>
+      <a:camera prst="orthographicFront"/>
+      <a:lightRig rig="threePt" dir="t"/>
+    </dgm:scene3d>
+    <dgm:sp3d/>
+    <dgm:txPr/>
+    <dgm:style>
+      <a:lnRef idx="2">
+        <a:scrgbClr r="0" g="0" b="0"/>
+      </a:lnRef>
+      <a:fillRef idx="0">
+        <a:scrgbClr r="0" g="0" b="0"/>
+      </a:fillRef>
+      <a:effectRef idx="0">
+        <a:scrgbClr r="0" g="0" b="0"/>
+      </a:effectRef>
+      <a:fontRef idx="minor"/>
+    </dgm:style>
+  </dgm:styleLbl>
+  <dgm:styleLbl name="parChTrans1D2">
+    <dgm:scene3d>
+      <a:camera prst="orthographicFront"/>
+      <a:lightRig rig="threePt" dir="t"/>
+    </dgm:scene3d>
+    <dgm:sp3d/>
+    <dgm:txPr/>
+    <dgm:style>
+      <a:lnRef idx="2">
+        <a:scrgbClr r="0" g="0" b="0"/>
+      </a:lnRef>
+      <a:fillRef idx="0">
+        <a:scrgbClr r="0" g="0" b="0"/>
+      </a:fillRef>
+      <a:effectRef idx="0">
+        <a:scrgbClr r="0" g="0" b="0"/>
+      </a:effectRef>
+      <a:fontRef idx="minor"/>
+    </dgm:style>
+  </dgm:styleLbl>
+  <dgm:styleLbl name="parChTrans1D3">
+    <dgm:scene3d>
+      <a:camera prst="orthographicFront"/>
+      <a:lightRig rig="threePt" dir="t"/>
+    </dgm:scene3d>
+    <dgm:sp3d/>
+    <dgm:txPr/>
+    <dgm:style>
+      <a:lnRef idx="2">
+        <a:scrgbClr r="0" g="0" b="0"/>
+      </a:lnRef>
+      <a:fillRef idx="0">
+        <a:scrgbClr r="0" g="0" b="0"/>
+      </a:fillRef>
+      <a:effectRef idx="0">
+        <a:scrgbClr r="0" g="0" b="0"/>
+      </a:effectRef>
+      <a:fontRef idx="minor"/>
+    </dgm:style>
+  </dgm:styleLbl>
+  <dgm:styleLbl name="parChTrans1D4">
+    <dgm:scene3d>
+      <a:camera prst="orthographicFront"/>
+      <a:lightRig rig="threePt" dir="t"/>
+    </dgm:scene3d>
+    <dgm:sp3d/>
+    <dgm:txPr/>
+    <dgm:style>
+      <a:lnRef idx="2">
+        <a:scrgbClr r="0" g="0" b="0"/>
+      </a:lnRef>
+      <a:fillRef idx="0">
+        <a:scrgbClr r="0" g="0" b="0"/>
+      </a:fillRef>
+      <a:effectRef idx="0">
+        <a:scrgbClr r="0" g="0" b="0"/>
+      </a:effectRef>
+      <a:fontRef idx="minor"/>
+    </dgm:style>
+  </dgm:styleLbl>
+  <dgm:styleLbl name="fgAcc1">
+    <dgm:scene3d>
+      <a:camera prst="orthographicFront"/>
+      <a:lightRig rig="threePt" dir="t"/>
+    </dgm:scene3d>
+    <dgm:sp3d/>
+    <dgm:txPr/>
+    <dgm:style>
+      <a:lnRef idx="2">
+        <a:scrgbClr r="0" g="0" b="0"/>
+      </a:lnRef>
+      <a:fillRef idx="1">
+        <a:scrgbClr r="0" g="0" b="0"/>
+      </a:fillRef>
+      <a:effectRef idx="0">
+        <a:scrgbClr r="0" g="0" b="0"/>
+      </a:effectRef>
+      <a:fontRef idx="minor"/>
+    </dgm:style>
+  </dgm:styleLbl>
+  <dgm:styleLbl name="conFgAcc1">
+    <dgm:scene3d>
+      <a:camera prst="orthographicFront"/>
+      <a:lightRig rig="threePt" dir="t"/>
+    </dgm:scene3d>
+    <dgm:sp3d/>
+    <dgm:txPr/>
+    <dgm:style>
+      <a:lnRef idx="2">
+        <a:scrgbClr r="0" g="0" b="0"/>
+      </a:lnRef>
+      <a:fillRef idx="1">
+        <a:scrgbClr r="0" g="0" b="0"/>
+      </a:fillRef>
+      <a:effectRef idx="0">
+        <a:scrgbClr r="0" g="0" b="0"/>
+      </a:effectRef>
+      <a:fontRef idx="minor"/>
+    </dgm:style>
+  </dgm:styleLbl>
+  <dgm:styleLbl name="alignAcc1">
+    <dgm:scene3d>
+      <a:camera prst="orthographicFront"/>
+      <a:lightRig rig="threePt" dir="t"/>
+    </dgm:scene3d>
+    <dgm:sp3d/>
+    <dgm:txPr/>
+    <dgm:style>
+      <a:lnRef idx="2">
+        <a:scrgbClr r="0" g="0" b="0"/>
+      </a:lnRef>
+      <a:fillRef idx="1">
+        <a:scrgbClr r="0" g="0" b="0"/>
+      </a:fillRef>
+      <a:effectRef idx="0">
+        <a:scrgbClr r="0" g="0" b="0"/>
+      </a:effectRef>
+      <a:fontRef idx="minor"/>
+    </dgm:style>
+  </dgm:styleLbl>
+  <dgm:styleLbl name="trAlignAcc1">
+    <dgm:scene3d>
+      <a:camera prst="orthographicFront"/>
+      <a:lightRig rig="threePt" dir="t"/>
+    </dgm:scene3d>
+    <dgm:sp3d/>
+    <dgm:txPr/>
+    <dgm:style>
+      <a:lnRef idx="1">
+        <a:scrgbClr r="0" g="0" b="0"/>
+      </a:lnRef>
+      <a:fillRef idx="1">
+        <a:scrgbClr r="0" g="0" b="0"/>
+      </a:fillRef>
+      <a:effectRef idx="0">
+        <a:scrgbClr r="0" g="0" b="0"/>
+      </a:effectRef>
+      <a:fontRef idx="minor"/>
+    </dgm:style>
+  </dgm:styleLbl>
+  <dgm:styleLbl name="bgAcc1">
+    <dgm:scene3d>
+      <a:camera prst="orthographicFront"/>
+      <a:lightRig rig="threePt" dir="t"/>
+    </dgm:scene3d>
+    <dgm:sp3d/>
+    <dgm:txPr/>
+    <dgm:style>
+      <a:lnRef idx="2">
+        <a:scrgbClr r="0" g="0" b="0"/>
+      </a:lnRef>
+      <a:fillRef idx="1">
+        <a:scrgbClr r="0" g="0" b="0"/>
+      </a:fillRef>
+      <a:effectRef idx="0">
+        <a:scrgbClr r="0" g="0" b="0"/>
+      </a:effectRef>
+      <a:fontRef idx="minor"/>
+    </dgm:style>
+  </dgm:styleLbl>
+  <dgm:styleLbl name="solidFgAcc1">
+    <dgm:scene3d>
+      <a:camera prst="orthographicFront"/>
+      <a:lightRig rig="threePt" dir="t"/>
+    </dgm:scene3d>
+    <dgm:sp3d/>
+    <dgm:txPr/>
+    <dgm:style>
+      <a:lnRef idx="2">
+        <a:scrgbClr r="0" g="0" b="0"/>
+      </a:lnRef>
+      <a:fillRef idx="1">
+        <a:scrgbClr r="0" g="0" b="0"/>
+      </a:fillRef>
+      <a:effectRef idx="0">
+        <a:scrgbClr r="0" g="0" b="0"/>
+      </a:effectRef>
+      <a:fontRef idx="minor"/>
+    </dgm:style>
+  </dgm:styleLbl>
+  <dgm:styleLbl name="solidAlignAcc1">
+    <dgm:scene3d>
+      <a:camera prst="orthographicFront"/>
+      <a:lightRig rig="threePt" dir="t"/>
+    </dgm:scene3d>
+    <dgm:sp3d/>
+    <dgm:txPr/>
+    <dgm:style>
+      <a:lnRef idx="2">
+        <a:scrgbClr r="0" g="0" b="0"/>
+      </a:lnRef>
+      <a:fillRef idx="1">
+        <a:scrgbClr r="0" g="0" b="0"/>
+      </a:fillRef>
+      <a:effectRef idx="0">
+        <a:scrgbClr r="0" g="0" b="0"/>
+      </a:effectRef>
+      <a:fontRef idx="minor"/>
+    </dgm:style>
+  </dgm:styleLbl>
+  <dgm:styleLbl name="solidBgAcc1">
+    <dgm:scene3d>
+      <a:camera prst="orthographicFront"/>
+      <a:lightRig rig="threePt" dir="t"/>
+    </dgm:scene3d>
+    <dgm:sp3d/>
+    <dgm:txPr/>
+    <dgm:style>
+      <a:lnRef idx="2">
+        <a:scrgbClr r="0" g="0" b="0"/>
+      </a:lnRef>
+      <a:fillRef idx="1">
+        <a:scrgbClr r="0" g="0" b="0"/>
+      </a:fillRef>
+      <a:effectRef idx="0">
+        <a:scrgbClr r="0" g="0" b="0"/>
+      </a:effectRef>
+      <a:fontRef idx="minor"/>
+    </dgm:style>
+  </dgm:styleLbl>
+  <dgm:styleLbl name="fgAccFollowNode1">
+    <dgm:scene3d>
+      <a:camera prst="orthographicFront"/>
+      <a:lightRig rig="threePt" dir="t"/>
+    </dgm:scene3d>
+    <dgm:sp3d/>
+    <dgm:txPr/>
+    <dgm:style>
+      <a:lnRef idx="2">
+        <a:scrgbClr r="0" g="0" b="0"/>
+      </a:lnRef>
+      <a:fillRef idx="1">
+        <a:scrgbClr r="0" g="0" b="0"/>
+      </a:fillRef>
+      <a:effectRef idx="0">
+        <a:scrgbClr r="0" g="0" b="0"/>
+      </a:effectRef>
+      <a:fontRef idx="minor"/>
+    </dgm:style>
+  </dgm:styleLbl>
+  <dgm:styleLbl name="alignAccFollowNode1">
+    <dgm:scene3d>
+      <a:camera prst="orthographicFront"/>
+      <a:lightRig rig="threePt" dir="t"/>
+    </dgm:scene3d>
+    <dgm:sp3d/>
+    <dgm:txPr/>
+    <dgm:style>
+      <a:lnRef idx="2">
+        <a:scrgbClr r="0" g="0" b="0"/>
+      </a:lnRef>
+      <a:fillRef idx="1">
+        <a:scrgbClr r="0" g="0" b="0"/>
+      </a:fillRef>
+      <a:effectRef idx="0">
+        <a:scrgbClr r="0" g="0" b="0"/>
+      </a:effectRef>
+      <a:fontRef idx="minor"/>
+    </dgm:style>
+  </dgm:styleLbl>
+  <dgm:styleLbl name="bgAccFollowNode1">
+    <dgm:scene3d>
+      <a:camera prst="orthographicFront"/>
+      <a:lightRig rig="threePt" dir="t"/>
+    </dgm:scene3d>
+    <dgm:sp3d/>
+    <dgm:txPr/>
+    <dgm:style>
+      <a:lnRef idx="2">
+        <a:scrgbClr r="0" g="0" b="0"/>
+      </a:lnRef>
+      <a:fillRef idx="1">
+        <a:scrgbClr r="0" g="0" b="0"/>
+      </a:fillRef>
+      <a:effectRef idx="0">
+        <a:scrgbClr r="0" g="0" b="0"/>
+      </a:effectRef>
+      <a:fontRef idx="minor"/>
+    </dgm:style>
+  </dgm:styleLbl>
+  <dgm:styleLbl name="fgAcc0">
+    <dgm:scene3d>
+      <a:camera prst="orthographicFront"/>
+      <a:lightRig rig="threePt" dir="t"/>
+    </dgm:scene3d>
+    <dgm:sp3d/>
+    <dgm:txPr/>
+    <dgm:style>
+      <a:lnRef idx="2">
+        <a:scrgbClr r="0" g="0" b="0"/>
+      </a:lnRef>
+      <a:fillRef idx="1">
+        <a:scrgbClr r="0" g="0" b="0"/>
+      </a:fillRef>
+      <a:effectRef idx="0">
+        <a:scrgbClr r="0" g="0" b="0"/>
+      </a:effectRef>
+      <a:fontRef idx="minor"/>
+    </dgm:style>
+  </dgm:styleLbl>
+  <dgm:styleLbl name="fgAcc2">
+    <dgm:scene3d>
+      <a:camera prst="orthographicFront"/>
+      <a:lightRig rig="threePt" dir="t"/>
+    </dgm:scene3d>
+    <dgm:sp3d/>
+    <dgm:txPr/>
+    <dgm:style>
+      <a:lnRef idx="2">
+        <a:scrgbClr r="0" g="0" b="0"/>
+      </a:lnRef>
+      <a:fillRef idx="1">
+        <a:scrgbClr r="0" g="0" b="0"/>
+      </a:fillRef>
+      <a:effectRef idx="0">
+        <a:scrgbClr r="0" g="0" b="0"/>
+      </a:effectRef>
+      <a:fontRef idx="minor"/>
+    </dgm:style>
+  </dgm:styleLbl>
+  <dgm:styleLbl name="fgAcc3">
+    <dgm:scene3d>
+      <a:camera prst="orthographicFront"/>
+      <a:lightRig rig="threePt" dir="t"/>
+    </dgm:scene3d>
+    <dgm:sp3d/>
+    <dgm:txPr/>
+    <dgm:style>
+      <a:lnRef idx="2">
+        <a:scrgbClr r="0" g="0" b="0"/>
+      </a:lnRef>
+      <a:fillRef idx="1">
+        <a:scrgbClr r="0" g="0" b="0"/>
+      </a:fillRef>
+      <a:effectRef idx="0">
+        <a:scrgbClr r="0" g="0" b="0"/>
+      </a:effectRef>
+      <a:fontRef idx="minor"/>
+    </dgm:style>
+  </dgm:styleLbl>
+  <dgm:styleLbl name="fgAcc4">
+    <dgm:scene3d>
+      <a:camera prst="orthographicFront"/>
+      <a:lightRig rig="threePt" dir="t"/>
+    </dgm:scene3d>
+    <dgm:sp3d/>
+    <dgm:txPr/>
+    <dgm:style>
+      <a:lnRef idx="2">
+        <a:scrgbClr r="0" g="0" b="0"/>
+      </a:lnRef>
+      <a:fillRef idx="1">
+        <a:scrgbClr r="0" g="0" b="0"/>
+      </a:fillRef>
+      <a:effectRef idx="0">
+        <a:scrgbClr r="0" g="0" b="0"/>
+      </a:effectRef>
+      <a:fontRef idx="minor"/>
+    </dgm:style>
+  </dgm:styleLbl>
+  <dgm:styleLbl name="bgShp">
+    <dgm:scene3d>
+      <a:camera prst="orthographicFront"/>
+      <a:lightRig rig="threePt" dir="t"/>
+    </dgm:scene3d>
+    <dgm:sp3d/>
+    <dgm:txPr/>
+    <dgm:style>
+      <a:lnRef idx="0">
+        <a:scrgbClr r="0" g="0" b="0"/>
+      </a:lnRef>
+      <a:fillRef idx="1">
+        <a:scrgbClr r="0" g="0" b="0"/>
+      </a:fillRef>
+      <a:effectRef idx="0">
+        <a:scrgbClr r="0" g="0" b="0"/>
+      </a:effectRef>
+      <a:fontRef idx="minor"/>
+    </dgm:style>
+  </dgm:styleLbl>
+  <dgm:styleLbl name="dkBgShp">
+    <dgm:scene3d>
+      <a:camera prst="orthographicFront"/>
+      <a:lightRig rig="threePt" dir="t"/>
+    </dgm:scene3d>
+    <dgm:sp3d/>
+    <dgm:txPr/>
+    <dgm:style>
+      <a:lnRef idx="0">
+        <a:scrgbClr r="0" g="0" b="0"/>
+      </a:lnRef>
+      <a:fillRef idx="1">
+        <a:scrgbClr r="0" g="0" b="0"/>
+      </a:fillRef>
+      <a:effectRef idx="0">
+        <a:scrgbClr r="0" g="0" b="0"/>
+      </a:effectRef>
+      <a:fontRef idx="minor"/>
+    </dgm:style>
+  </dgm:styleLbl>
+  <dgm:styleLbl name="trBgShp">
+    <dgm:scene3d>
+      <a:camera prst="orthographicFront"/>
+      <a:lightRig rig="threePt" dir="t"/>
+    </dgm:scene3d>
+    <dgm:sp3d/>
+    <dgm:txPr/>
+    <dgm:style>
+      <a:lnRef idx="0">
+        <a:scrgbClr r="0" g="0" b="0"/>
+      </a:lnRef>
+      <a:fillRef idx="1">
+        <a:scrgbClr r="0" g="0" b="0"/>
+      </a:fillRef>
+      <a:effectRef idx="0">
+        <a:scrgbClr r="0" g="0" b="0"/>
+      </a:effectRef>
+      <a:fontRef idx="minor"/>
+    </dgm:style>
+  </dgm:styleLbl>
+  <dgm:styleLbl name="fgShp">
+    <dgm:scene3d>
+      <a:camera prst="orthographicFront"/>
+      <a:lightRig rig="threePt" dir="t"/>
+    </dgm:scene3d>
+    <dgm:sp3d/>
+    <dgm:txPr/>
+    <dgm:style>
+      <a:lnRef idx="2">
+        <a:scrgbClr r="0" g="0" b="0"/>
+      </a:lnRef>
+      <a:fillRef idx="1">
+        <a:scrgbClr r="0" g="0" b="0"/>
+      </a:fillRef>
+      <a:effectRef idx="0">
+        <a:scrgbClr r="0" g="0" b="0"/>
+      </a:effectRef>
+      <a:fontRef idx="minor"/>
+    </dgm:style>
+  </dgm:styleLbl>
+  <dgm:styleLbl name="revTx">
+    <dgm:scene3d>
+      <a:camera prst="orthographicFront"/>
+      <a:lightRig rig="threePt" dir="t"/>
+    </dgm:scene3d>
+    <dgm:sp3d/>
+    <dgm:txPr/>
+    <dgm:style>
+      <a:lnRef idx="0">
+        <a:scrgbClr r="0" g="0" b="0"/>
+      </a:lnRef>
+      <a:fillRef idx="0">
+        <a:scrgbClr r="0" g="0" b="0"/>
+      </a:fillRef>
+      <a:effectRef idx="0">
+        <a:scrgbClr r="0" g="0" b="0"/>
+      </a:effectRef>
+      <a:fontRef idx="minor"/>
+    </dgm:style>
+  </dgm:styleLbl>
+</dgm:styleDef>
 </file>
 
 <file path=ppt/notesMasters/notesMaster1.xml><?xml version="1.0" encoding="utf-8"?>
@@ -545,7 +3939,7 @@
           <a:p>
             <a:fld id="{A069943A-4099-4E42-9056-E98AA5503A5B}" type="slidenum">
               <a:rPr lang="en-IE" smtClean="0"/>
-              <a:t>5</a:t>
+              <a:t>6</a:t>
             </a:fld>
             <a:endParaRPr lang="en-IE"/>
           </a:p>
@@ -4369,6 +7763,64 @@
   <p:cSld>
     <p:spTree>
       <p:nvGrpSpPr>
+        <p:cNvPr id="1" name=""/>
+        <p:cNvGrpSpPr/>
+        <p:nvPr/>
+      </p:nvGrpSpPr>
+      <p:grpSpPr>
+        <a:xfrm>
+          <a:off x="0" y="0"/>
+          <a:ext cx="0" cy="0"/>
+          <a:chOff x="0" y="0"/>
+          <a:chExt cx="0" cy="0"/>
+        </a:xfrm>
+      </p:grpSpPr>
+      <p:graphicFrame>
+        <p:nvGraphicFramePr>
+          <p:cNvPr id="4" name="Diagram 3">
+            <a:extLst>
+              <a:ext uri="{FF2B5EF4-FFF2-40B4-BE49-F238E27FC236}">
+                <a16:creationId xmlns:a16="http://schemas.microsoft.com/office/drawing/2014/main" id="{BA7394BA-49C6-D4EB-B23D-188D1C9DE52C}"/>
+              </a:ext>
+            </a:extLst>
+          </p:cNvPr>
+          <p:cNvGraphicFramePr/>
+          <p:nvPr>
+            <p:extLst>
+              <p:ext uri="{D42A27DB-BD31-4B8C-83A1-F6EECF244321}">
+                <p14:modId xmlns:p14="http://schemas.microsoft.com/office/powerpoint/2010/main" val="3163045513"/>
+              </p:ext>
+            </p:extLst>
+          </p:nvPr>
+        </p:nvGraphicFramePr>
+        <p:xfrm>
+          <a:off x="1049413" y="405036"/>
+          <a:ext cx="10672090" cy="6192145"/>
+        </p:xfrm>
+        <a:graphic>
+          <a:graphicData uri="http://schemas.openxmlformats.org/drawingml/2006/diagram">
+            <dgm:relIds xmlns:dgm="http://schemas.openxmlformats.org/drawingml/2006/diagram" xmlns:r="http://schemas.openxmlformats.org/officeDocument/2006/relationships" r:dm="rId2" r:lo="rId3" r:qs="rId4" r:cs="rId5"/>
+          </a:graphicData>
+        </a:graphic>
+      </p:graphicFrame>
+    </p:spTree>
+    <p:extLst>
+      <p:ext uri="{BB962C8B-B14F-4D97-AF65-F5344CB8AC3E}">
+        <p14:creationId xmlns:p14="http://schemas.microsoft.com/office/powerpoint/2010/main" val="3660948314"/>
+      </p:ext>
+    </p:extLst>
+  </p:cSld>
+  <p:clrMapOvr>
+    <a:masterClrMapping/>
+  </p:clrMapOvr>
+</p:sld>
+</file>
+
+<file path=ppt/slides/slide3.xml><?xml version="1.0" encoding="utf-8"?>
+<p:sld xmlns:a="http://schemas.openxmlformats.org/drawingml/2006/main" xmlns:r="http://schemas.openxmlformats.org/officeDocument/2006/relationships" xmlns:p="http://schemas.openxmlformats.org/presentationml/2006/main">
+  <p:cSld>
+    <p:spTree>
+      <p:nvGrpSpPr>
         <p:cNvPr id="1" name="">
           <a:extLst>
             <a:ext uri="{FF2B5EF4-FFF2-40B4-BE49-F238E27FC236}">
@@ -4744,7 +8196,7 @@
 </p:sld>
 </file>
 
-<file path=ppt/slides/slide3.xml><?xml version="1.0" encoding="utf-8"?>
+<file path=ppt/slides/slide4.xml><?xml version="1.0" encoding="utf-8"?>
 <p:sld xmlns:a="http://schemas.openxmlformats.org/drawingml/2006/main" xmlns:r="http://schemas.openxmlformats.org/officeDocument/2006/relationships" xmlns:p="http://schemas.openxmlformats.org/presentationml/2006/main">
   <p:cSld>
     <p:spTree>
@@ -5194,7 +8646,7 @@
 </p:sld>
 </file>
 
-<file path=ppt/slides/slide4.xml><?xml version="1.0" encoding="utf-8"?>
+<file path=ppt/slides/slide5.xml><?xml version="1.0" encoding="utf-8"?>
 <p:sld xmlns:a="http://schemas.openxmlformats.org/drawingml/2006/main" xmlns:r="http://schemas.openxmlformats.org/officeDocument/2006/relationships" xmlns:p="http://schemas.openxmlformats.org/presentationml/2006/main">
   <p:cSld>
     <p:spTree>
@@ -5650,7 +9102,7 @@
 </p:sld>
 </file>
 
-<file path=ppt/slides/slide5.xml><?xml version="1.0" encoding="utf-8"?>
+<file path=ppt/slides/slide6.xml><?xml version="1.0" encoding="utf-8"?>
 <p:sld xmlns:a="http://schemas.openxmlformats.org/drawingml/2006/main" xmlns:r="http://schemas.openxmlformats.org/officeDocument/2006/relationships" xmlns:p="http://schemas.openxmlformats.org/presentationml/2006/main">
   <p:cSld>
     <p:spTree>

--- a/topic-10-week10/unit-1/talk-1/Presentation1.pptx
+++ b/topic-10-week10/unit-1/talk-1/Presentation1.pptx
@@ -5,7 +5,7 @@
     <p:sldMasterId id="2147483648" r:id="rId1"/>
   </p:sldMasterIdLst>
   <p:notesMasterIdLst>
-    <p:notesMasterId r:id="rId8"/>
+    <p:notesMasterId r:id="rId9"/>
   </p:notesMasterIdLst>
   <p:sldIdLst>
     <p:sldId id="256" r:id="rId2"/>
@@ -14,6 +14,7 @@
     <p:sldId id="257" r:id="rId5"/>
     <p:sldId id="259" r:id="rId6"/>
     <p:sldId id="261" r:id="rId7"/>
+    <p:sldId id="263" r:id="rId8"/>
   </p:sldIdLst>
   <p:sldSz cx="12192000" cy="6858000"/>
   <p:notesSz cx="6858000" cy="9144000"/>
@@ -120,7 +121,7 @@
             <a:srgbClr val="A4A3A4"/>
           </p15:clr>
         </p15:guide>
-        <p15:guide id="2" pos="3840" userDrawn="1">
+        <p15:guide id="2" pos="5473" userDrawn="1">
           <p15:clr>
             <a:srgbClr val="A4A3A4"/>
           </p15:clr>
@@ -9755,93 +9756,96 @@
           </a:p>
         </p:txBody>
       </p:sp>
-      <p:pic>
-        <p:nvPicPr>
-          <p:cNvPr id="12" name="Content Placeholder 4" descr="Thermometer with solid fill">
-            <a:extLst>
-              <a:ext uri="{FF2B5EF4-FFF2-40B4-BE49-F238E27FC236}">
-                <a16:creationId xmlns:a16="http://schemas.microsoft.com/office/drawing/2014/main" id="{F54A5D8A-4841-CD05-F984-AC720DA7F11E}"/>
-              </a:ext>
-            </a:extLst>
-          </p:cNvPr>
-          <p:cNvPicPr>
-            <a:picLocks noChangeAspect="1"/>
-          </p:cNvPicPr>
+      <p:sp>
+        <p:nvSpPr>
+          <p:cNvPr id="32" name="AutoShape 2" descr="Generated image">
+            <a:extLst>
+              <a:ext uri="{FF2B5EF4-FFF2-40B4-BE49-F238E27FC236}">
+                <a16:creationId xmlns:a16="http://schemas.microsoft.com/office/drawing/2014/main" id="{D45E2487-D30C-A10E-5502-71EBF15BC173}"/>
+              </a:ext>
+            </a:extLst>
+          </p:cNvPr>
+          <p:cNvSpPr>
+            <a:spLocks noChangeAspect="1" noChangeArrowheads="1"/>
+          </p:cNvSpPr>
           <p:nvPr/>
-        </p:nvPicPr>
-        <p:blipFill>
-          <a:blip r:embed="rId3">
-            <a:extLst>
-              <a:ext uri="{96DAC541-7B7A-43D3-8B79-37D633B846F1}">
-                <asvg:svgBlip xmlns:asvg="http://schemas.microsoft.com/office/drawing/2016/SVG/main" r:embed="rId4"/>
-              </a:ext>
-            </a:extLst>
-          </a:blip>
-          <a:stretch>
-            <a:fillRect/>
-          </a:stretch>
-        </p:blipFill>
-        <p:spPr>
+        </p:nvSpPr>
+        <p:spPr bwMode="auto">
           <a:xfrm>
-            <a:off x="1460121" y="4332685"/>
-            <a:ext cx="914400" cy="914400"/>
+            <a:off x="5943600" y="3276600"/>
+            <a:ext cx="304800" cy="304800"/>
           </a:xfrm>
           <a:prstGeom prst="rect">
             <a:avLst/>
           </a:prstGeom>
+          <a:noFill/>
+          <a:extLst>
+            <a:ext uri="{909E8E84-426E-40DD-AFC4-6F175D3DCCD1}">
+              <a14:hiddenFill xmlns:a14="http://schemas.microsoft.com/office/drawing/2010/main">
+                <a:solidFill>
+                  <a:srgbClr val="FFFFFF"/>
+                </a:solidFill>
+              </a14:hiddenFill>
+            </a:ext>
+          </a:extLst>
         </p:spPr>
-      </p:pic>
-      <p:pic>
-        <p:nvPicPr>
-          <p:cNvPr id="14" name="Graphic 13" descr="Do Not Washing Machine with solid fill">
-            <a:extLst>
-              <a:ext uri="{FF2B5EF4-FFF2-40B4-BE49-F238E27FC236}">
-                <a16:creationId xmlns:a16="http://schemas.microsoft.com/office/drawing/2014/main" id="{FF412A39-DF00-981B-2702-8616233520DC}"/>
-              </a:ext>
-            </a:extLst>
-          </p:cNvPr>
-          <p:cNvPicPr>
-            <a:picLocks noChangeAspect="1"/>
-          </p:cNvPicPr>
+        <p:txBody>
+          <a:bodyPr vert="horz" wrap="square" lIns="91440" tIns="45720" rIns="91440" bIns="45720" numCol="1" anchor="t" anchorCtr="0" compatLnSpc="1">
+            <a:prstTxWarp prst="textNoShape">
+              <a:avLst/>
+            </a:prstTxWarp>
+          </a:bodyPr>
+          <a:lstStyle/>
+          <a:p>
+            <a:endParaRPr lang="en-IE"/>
+          </a:p>
+        </p:txBody>
+      </p:sp>
+    </p:spTree>
+    <p:extLst>
+      <p:ext uri="{BB962C8B-B14F-4D97-AF65-F5344CB8AC3E}">
+        <p14:creationId xmlns:p14="http://schemas.microsoft.com/office/powerpoint/2010/main" val="223095956"/>
+      </p:ext>
+    </p:extLst>
+  </p:cSld>
+  <p:clrMapOvr>
+    <a:masterClrMapping/>
+  </p:clrMapOvr>
+</p:sld>
+</file>
+
+<file path=ppt/slides/slide7.xml><?xml version="1.0" encoding="utf-8"?>
+<p:sld xmlns:a="http://schemas.openxmlformats.org/drawingml/2006/main" xmlns:r="http://schemas.openxmlformats.org/officeDocument/2006/relationships" xmlns:p="http://schemas.openxmlformats.org/presentationml/2006/main">
+  <p:cSld>
+    <p:spTree>
+      <p:nvGrpSpPr>
+        <p:cNvPr id="1" name=""/>
+        <p:cNvGrpSpPr/>
+        <p:nvPr/>
+      </p:nvGrpSpPr>
+      <p:grpSpPr>
+        <a:xfrm>
+          <a:off x="0" y="0"/>
+          <a:ext cx="0" cy="0"/>
+          <a:chOff x="0" y="0"/>
+          <a:chExt cx="0" cy="0"/>
+        </a:xfrm>
+      </p:grpSpPr>
+      <p:sp>
+        <p:nvSpPr>
+          <p:cNvPr id="16" name="Rectangle: Rounded Corners 15">
+            <a:extLst>
+              <a:ext uri="{FF2B5EF4-FFF2-40B4-BE49-F238E27FC236}">
+                <a16:creationId xmlns:a16="http://schemas.microsoft.com/office/drawing/2014/main" id="{1235AF44-15EB-E701-9201-6D2A597E7CF3}"/>
+              </a:ext>
+            </a:extLst>
+          </p:cNvPr>
+          <p:cNvSpPr/>
           <p:nvPr/>
-        </p:nvPicPr>
-        <p:blipFill>
-          <a:blip r:embed="rId5">
-            <a:extLst>
-              <a:ext uri="{96DAC541-7B7A-43D3-8B79-37D633B846F1}">
-                <asvg:svgBlip xmlns:asvg="http://schemas.microsoft.com/office/drawing/2016/SVG/main" r:embed="rId6"/>
-              </a:ext>
-            </a:extLst>
-          </a:blip>
-          <a:stretch>
-            <a:fillRect/>
-          </a:stretch>
-        </p:blipFill>
+        </p:nvSpPr>
         <p:spPr>
           <a:xfrm>
-            <a:off x="1505761" y="5455740"/>
-            <a:ext cx="914400" cy="914400"/>
-          </a:xfrm>
-          <a:prstGeom prst="rect">
-            <a:avLst/>
-          </a:prstGeom>
-        </p:spPr>
-      </p:pic>
-      <p:sp>
-        <p:nvSpPr>
-          <p:cNvPr id="16" name="Rectangle: Rounded Corners 15">
-            <a:extLst>
-              <a:ext uri="{FF2B5EF4-FFF2-40B4-BE49-F238E27FC236}">
-                <a16:creationId xmlns:a16="http://schemas.microsoft.com/office/drawing/2014/main" id="{1235AF44-15EB-E701-9201-6D2A597E7CF3}"/>
-              </a:ext>
-            </a:extLst>
-          </p:cNvPr>
-          <p:cNvSpPr/>
-          <p:nvPr/>
-        </p:nvSpPr>
-        <p:spPr>
-          <a:xfrm>
-            <a:off x="1103621" y="4033177"/>
+            <a:off x="820468" y="494537"/>
             <a:ext cx="1687651" cy="2595914"/>
           </a:xfrm>
           <a:prstGeom prst="roundRect">
@@ -9874,7 +9878,7 @@
           <a:lstStyle/>
           <a:p>
             <a:pPr algn="ctr"/>
-            <a:endParaRPr lang="en-IE"/>
+            <a:endParaRPr lang="en-IE" dirty="0"/>
           </a:p>
         </p:txBody>
       </p:sp>
@@ -9892,7 +9896,7 @@
         </p:nvSpPr>
         <p:spPr>
           <a:xfrm>
-            <a:off x="3529311" y="4033177"/>
+            <a:off x="3247013" y="478972"/>
             <a:ext cx="4212236" cy="2595914"/>
           </a:xfrm>
           <a:prstGeom prst="rect">
@@ -9938,7 +9942,7 @@
         </p:nvSpPr>
         <p:spPr>
           <a:xfrm>
-            <a:off x="1145070" y="3554205"/>
+            <a:off x="862772" y="0"/>
             <a:ext cx="1695657" cy="369332"/>
           </a:xfrm>
           <a:prstGeom prst="rect">
@@ -9973,7 +9977,7 @@
         </p:nvSpPr>
         <p:spPr>
           <a:xfrm>
-            <a:off x="3851600" y="4264845"/>
+            <a:off x="3569302" y="710640"/>
             <a:ext cx="3387777" cy="858187"/>
           </a:xfrm>
           <a:prstGeom prst="roundRect">
@@ -10010,10 +10014,10 @@
       </p:sp>
       <p:sp>
         <p:nvSpPr>
-          <p:cNvPr id="23" name="Rectangle: Rounded Corners 22">
-            <a:extLst>
-              <a:ext uri="{FF2B5EF4-FFF2-40B4-BE49-F238E27FC236}">
-                <a16:creationId xmlns:a16="http://schemas.microsoft.com/office/drawing/2014/main" id="{2F8C1B5A-6325-0DAA-53F7-09950199A2AD}"/>
+          <p:cNvPr id="24" name="Flowchart: Magnetic Disk 23">
+            <a:extLst>
+              <a:ext uri="{FF2B5EF4-FFF2-40B4-BE49-F238E27FC236}">
+                <a16:creationId xmlns:a16="http://schemas.microsoft.com/office/drawing/2014/main" id="{BE6A1E30-A5A9-3C51-D395-3DB989BD4D8C}"/>
               </a:ext>
             </a:extLst>
           </p:cNvPr>
@@ -10022,56 +10026,7 @@
         </p:nvSpPr>
         <p:spPr>
           <a:xfrm>
-            <a:off x="5615443" y="5354700"/>
-            <a:ext cx="1623934" cy="1038495"/>
-          </a:xfrm>
-          <a:prstGeom prst="roundRect">
-            <a:avLst/>
-          </a:prstGeom>
-        </p:spPr>
-        <p:style>
-          <a:lnRef idx="2">
-            <a:schemeClr val="accent4">
-              <a:shade val="15000"/>
-            </a:schemeClr>
-          </a:lnRef>
-          <a:fillRef idx="1">
-            <a:schemeClr val="accent4"/>
-          </a:fillRef>
-          <a:effectRef idx="0">
-            <a:schemeClr val="accent4"/>
-          </a:effectRef>
-          <a:fontRef idx="minor">
-            <a:schemeClr val="lt1"/>
-          </a:fontRef>
-        </p:style>
-        <p:txBody>
-          <a:bodyPr rtlCol="0" anchor="ctr"/>
-          <a:lstStyle/>
-          <a:p>
-            <a:pPr algn="ctr"/>
-            <a:r>
-              <a:rPr lang="en-IE" dirty="0"/>
-              <a:t>Event Processor</a:t>
-            </a:r>
-          </a:p>
-        </p:txBody>
-      </p:sp>
-      <p:sp>
-        <p:nvSpPr>
-          <p:cNvPr id="24" name="Flowchart: Magnetic Disk 23">
-            <a:extLst>
-              <a:ext uri="{FF2B5EF4-FFF2-40B4-BE49-F238E27FC236}">
-                <a16:creationId xmlns:a16="http://schemas.microsoft.com/office/drawing/2014/main" id="{BE6A1E30-A5A9-3C51-D395-3DB989BD4D8C}"/>
-              </a:ext>
-            </a:extLst>
-          </p:cNvPr>
-          <p:cNvSpPr/>
-          <p:nvPr/>
-        </p:nvSpPr>
-        <p:spPr>
-          <a:xfrm>
-            <a:off x="3964026" y="5455740"/>
+            <a:off x="3681728" y="1901535"/>
             <a:ext cx="1469036" cy="776564"/>
           </a:xfrm>
           <a:prstGeom prst="flowChartMagneticDisk">
@@ -10120,7 +10075,7 @@
         </p:nvSpPr>
         <p:spPr>
           <a:xfrm>
-            <a:off x="8318667" y="4000238"/>
+            <a:off x="8036369" y="446033"/>
             <a:ext cx="1687651" cy="2595914"/>
           </a:xfrm>
           <a:prstGeom prst="roundRect">
@@ -10171,7 +10126,7 @@
         </p:nvSpPr>
         <p:spPr>
           <a:xfrm>
-            <a:off x="8208191" y="3601605"/>
+            <a:off x="7925893" y="47400"/>
             <a:ext cx="1945661" cy="369332"/>
           </a:xfrm>
           <a:prstGeom prst="rect">
@@ -10207,10 +10162,10 @@
           <p:nvPr/>
         </p:nvPicPr>
         <p:blipFill>
-          <a:blip r:embed="rId7">
+          <a:blip r:embed="rId2">
             <a:extLst>
               <a:ext uri="{96DAC541-7B7A-43D3-8B79-37D633B846F1}">
-                <asvg:svgBlip xmlns:asvg="http://schemas.microsoft.com/office/drawing/2016/SVG/main" r:embed="rId8"/>
+                <asvg:svgBlip xmlns:asvg="http://schemas.microsoft.com/office/drawing/2016/SVG/main" r:embed="rId3"/>
               </a:ext>
             </a:extLst>
           </a:blip>
@@ -10220,7 +10175,7 @@
         </p:blipFill>
         <p:spPr>
           <a:xfrm>
-            <a:off x="8712788" y="4137429"/>
+            <a:off x="8430490" y="583224"/>
             <a:ext cx="914400" cy="914400"/>
           </a:xfrm>
           <a:prstGeom prst="rect">
@@ -10243,10 +10198,10 @@
           <p:nvPr/>
         </p:nvPicPr>
         <p:blipFill>
-          <a:blip r:embed="rId9">
+          <a:blip r:embed="rId4">
             <a:extLst>
               <a:ext uri="{96DAC541-7B7A-43D3-8B79-37D633B846F1}">
-                <asvg:svgBlip xmlns:asvg="http://schemas.microsoft.com/office/drawing/2016/SVG/main" r:embed="rId10"/>
+                <asvg:svgBlip xmlns:asvg="http://schemas.microsoft.com/office/drawing/2016/SVG/main" r:embed="rId5"/>
               </a:ext>
             </a:extLst>
           </a:blip>
@@ -10256,7 +10211,7 @@
         </p:blipFill>
         <p:spPr>
           <a:xfrm>
-            <a:off x="8812080" y="5171696"/>
+            <a:off x="8529782" y="1617491"/>
             <a:ext cx="737881" cy="737881"/>
           </a:xfrm>
           <a:prstGeom prst="rect">
@@ -10279,10 +10234,10 @@
           <p:nvPr/>
         </p:nvPicPr>
         <p:blipFill>
-          <a:blip r:embed="rId11">
+          <a:blip r:embed="rId6">
             <a:extLst>
               <a:ext uri="{96DAC541-7B7A-43D3-8B79-37D633B846F1}">
-                <asvg:svgBlip xmlns:asvg="http://schemas.microsoft.com/office/drawing/2016/SVG/main" r:embed="rId12"/>
+                <asvg:svgBlip xmlns:asvg="http://schemas.microsoft.com/office/drawing/2016/SVG/main" r:embed="rId7"/>
               </a:ext>
             </a:extLst>
           </a:blip>
@@ -10292,7 +10247,7 @@
         </p:blipFill>
         <p:spPr>
           <a:xfrm>
-            <a:off x="8712788" y="5808812"/>
+            <a:off x="8430490" y="2254607"/>
             <a:ext cx="914400" cy="914400"/>
           </a:xfrm>
           <a:prstGeom prst="rect">
@@ -10314,7 +10269,7 @@
         </p:nvSpPr>
         <p:spPr>
           <a:xfrm>
-            <a:off x="2821819" y="4965635"/>
+            <a:off x="2539521" y="1411430"/>
             <a:ext cx="676944" cy="490105"/>
           </a:xfrm>
           <a:prstGeom prst="leftRightArrow">
@@ -10346,56 +10301,40 @@
           </a:p>
         </p:txBody>
       </p:sp>
-      <p:sp>
-        <p:nvSpPr>
-          <p:cNvPr id="31" name="Arrow: Left-Right 30">
-            <a:extLst>
-              <a:ext uri="{FF2B5EF4-FFF2-40B4-BE49-F238E27FC236}">
-                <a16:creationId xmlns:a16="http://schemas.microsoft.com/office/drawing/2014/main" id="{AFC0076F-8AE6-16E7-A0E6-486FD81566B1}"/>
-              </a:ext>
-            </a:extLst>
-          </p:cNvPr>
-          <p:cNvSpPr/>
+      <p:pic>
+        <p:nvPicPr>
+          <p:cNvPr id="34" name="Picture 33">
+            <a:extLst>
+              <a:ext uri="{FF2B5EF4-FFF2-40B4-BE49-F238E27FC236}">
+                <a16:creationId xmlns:a16="http://schemas.microsoft.com/office/drawing/2014/main" id="{9A2108DB-27DA-EBCD-A712-06819570722E}"/>
+              </a:ext>
+            </a:extLst>
+          </p:cNvPr>
+          <p:cNvPicPr>
+            <a:picLocks noChangeAspect="1"/>
+          </p:cNvPicPr>
           <p:nvPr/>
-        </p:nvSpPr>
+        </p:nvPicPr>
+        <p:blipFill>
+          <a:blip r:embed="rId8"/>
+          <a:stretch>
+            <a:fillRect/>
+          </a:stretch>
+        </p:blipFill>
         <p:spPr>
           <a:xfrm>
-            <a:off x="7732790" y="5095301"/>
-            <a:ext cx="627032" cy="471666"/>
+            <a:off x="937438" y="1062979"/>
+            <a:ext cx="1504939" cy="1247891"/>
           </a:xfrm>
-          <a:prstGeom prst="leftRightArrow">
+          <a:prstGeom prst="rect">
             <a:avLst/>
           </a:prstGeom>
         </p:spPr>
-        <p:style>
-          <a:lnRef idx="2">
-            <a:schemeClr val="accent1">
-              <a:shade val="15000"/>
-            </a:schemeClr>
-          </a:lnRef>
-          <a:fillRef idx="1">
-            <a:schemeClr val="accent1"/>
-          </a:fillRef>
-          <a:effectRef idx="0">
-            <a:schemeClr val="accent1"/>
-          </a:effectRef>
-          <a:fontRef idx="minor">
-            <a:schemeClr val="lt1"/>
-          </a:fontRef>
-        </p:style>
-        <p:txBody>
-          <a:bodyPr rtlCol="0" anchor="ctr"/>
-          <a:lstStyle/>
-          <a:p>
-            <a:pPr algn="ctr"/>
-            <a:endParaRPr lang="en-IE"/>
-          </a:p>
-        </p:txBody>
-      </p:sp>
+      </p:pic>
     </p:spTree>
     <p:extLst>
       <p:ext uri="{BB962C8B-B14F-4D97-AF65-F5344CB8AC3E}">
-        <p14:creationId xmlns:p14="http://schemas.microsoft.com/office/powerpoint/2010/main" val="223095956"/>
+        <p14:creationId xmlns:p14="http://schemas.microsoft.com/office/powerpoint/2010/main" val="1118280739"/>
       </p:ext>
     </p:extLst>
   </p:cSld>
